--- a/slides/release/08__inter-4-schema-registry.pptx
+++ b/slides/release/08__inter-4-schema-registry.pptx
@@ -5,25 +5,25 @@
     <p:sldMasterId id="2147483651" r:id="rId1"/>
   </p:sldMasterIdLst>
   <p:notesMasterIdLst>
-    <p:notesMasterId r:id="rId2"/>
+    <p:notesMasterId r:id="rId15"/>
   </p:notesMasterIdLst>
   <p:handoutMasterIdLst>
-    <p:handoutMasterId r:id="rId3"/>
+    <p:handoutMasterId r:id="rId16"/>
   </p:handoutMasterIdLst>
   <p:sldIdLst>
-    <p:sldId id="256" r:id="rId9"/>
-    <p:sldId id="257" r:id="rId10"/>
-    <p:sldId id="258" r:id="rId11"/>
-    <p:sldId id="259" r:id="rId12"/>
-    <p:sldId id="260" r:id="rId13"/>
-    <p:sldId id="261" r:id="rId14"/>
-    <p:sldId id="262" r:id="rId15"/>
-    <p:sldId id="263" r:id="rId16"/>
-    <p:sldId id="264" r:id="rId17"/>
-    <p:sldId id="265" r:id="rId18"/>
-    <p:sldId id="266" r:id="rId19"/>
-    <p:sldId id="267" r:id="rId20"/>
-    <p:sldId id="268" r:id="rId21"/>
+    <p:sldId id="256" r:id="rId2"/>
+    <p:sldId id="257" r:id="rId3"/>
+    <p:sldId id="258" r:id="rId4"/>
+    <p:sldId id="259" r:id="rId5"/>
+    <p:sldId id="260" r:id="rId6"/>
+    <p:sldId id="261" r:id="rId7"/>
+    <p:sldId id="262" r:id="rId8"/>
+    <p:sldId id="263" r:id="rId9"/>
+    <p:sldId id="264" r:id="rId10"/>
+    <p:sldId id="265" r:id="rId11"/>
+    <p:sldId id="266" r:id="rId12"/>
+    <p:sldId id="267" r:id="rId13"/>
+    <p:sldId id="268" r:id="rId14"/>
   </p:sldIdLst>
   <p:sldSz cx="9372600" cy="8297863"/>
   <p:notesSz cx="7315200" cy="9601200"/>
@@ -191,9 +191,7 @@
   <p:cmAuthor id="2" name="Mark Kerzner" initials="MK" lastIdx="6" clrIdx="1"/>
   <p:cmAuthor id="3" name="Mary Beth Conlee" initials="MBC" lastIdx="7" clrIdx="2"/>
   <p:cmAuthor id="4" name="Michelle" initials="M" lastIdx="5" clrIdx="3"/>
-  <p:cmAuthor id="5" name="Tricia Murphy" initials="TM" lastIdx="4" clrIdx="4">
-    <p:extLst/>
-  </p:cmAuthor>
+  <p:cmAuthor id="5" name="Tricia Murphy" initials="TM" lastIdx="4" clrIdx="4"/>
 </p:cmAuthorLst>
 </file>
 
@@ -763,7 +761,7 @@
 </file>
 
 <file path=ppt/notesSlides/notesSlide1.xml><?xml version="1.0" encoding="utf-8"?>
-<p:notes xmlns:a="http://schemas.openxmlformats.org/drawingml/2006/main" xmlns:p="http://schemas.openxmlformats.org/presentationml/2006/main" xmlns:r="http://schemas.openxmlformats.org/officeDocument/2006/relationships">
+<p:notes xmlns:a="http://schemas.openxmlformats.org/drawingml/2006/main" xmlns:r="http://schemas.openxmlformats.org/officeDocument/2006/relationships" xmlns:p="http://schemas.openxmlformats.org/presentationml/2006/main">
   <p:cSld>
     <p:spTree>
       <p:nvGrpSpPr>
@@ -783,7 +781,7 @@
         <p:nvSpPr>
           <p:cNvPr id="2" name="Slide Image Placeholder 1"/>
           <p:cNvSpPr>
-            <a:spLocks noGrp="1"/>
+            <a:spLocks noGrp="1" noRot="1" noChangeAspect="1"/>
           </p:cNvSpPr>
           <p:nvPr>
             <p:ph type="sldImg" idx="2"/>
@@ -798,7 +796,7 @@
             <a:spLocks noGrp="1"/>
           </p:cNvSpPr>
           <p:nvPr>
-            <p:ph type="sldNum" idx="5" sz="quarter"/>
+            <p:ph type="sldNum" sz="quarter" idx="5"/>
           </p:nvPr>
         </p:nvSpPr>
         <p:spPr/>
@@ -810,7 +808,7 @@
             <a:spLocks noGrp="1"/>
           </p:cNvSpPr>
           <p:nvPr>
-            <p:ph type="body" idx="3" sz="quarter"/>
+            <p:ph type="body" sz="quarter" idx="3"/>
           </p:nvPr>
         </p:nvSpPr>
         <p:spPr/>
@@ -833,7 +831,7 @@
 </file>
 
 <file path=ppt/notesSlides/notesSlide2.xml><?xml version="1.0" encoding="utf-8"?>
-<p:notes xmlns:a="http://schemas.openxmlformats.org/drawingml/2006/main" xmlns:p="http://schemas.openxmlformats.org/presentationml/2006/main" xmlns:r="http://schemas.openxmlformats.org/officeDocument/2006/relationships">
+<p:notes xmlns:a="http://schemas.openxmlformats.org/drawingml/2006/main" xmlns:r="http://schemas.openxmlformats.org/officeDocument/2006/relationships" xmlns:p="http://schemas.openxmlformats.org/presentationml/2006/main">
   <p:cSld>
     <p:spTree>
       <p:nvGrpSpPr>
@@ -853,7 +851,7 @@
         <p:nvSpPr>
           <p:cNvPr id="2" name="Slide Image Placeholder 1"/>
           <p:cNvSpPr>
-            <a:spLocks noGrp="1"/>
+            <a:spLocks noGrp="1" noRot="1" noChangeAspect="1"/>
           </p:cNvSpPr>
           <p:nvPr>
             <p:ph type="sldImg" idx="2"/>
@@ -868,7 +866,7 @@
             <a:spLocks noGrp="1"/>
           </p:cNvSpPr>
           <p:nvPr>
-            <p:ph type="sldNum" idx="5" sz="quarter"/>
+            <p:ph type="sldNum" sz="quarter" idx="5"/>
           </p:nvPr>
         </p:nvSpPr>
         <p:spPr/>
@@ -880,7 +878,7 @@
             <a:spLocks noGrp="1"/>
           </p:cNvSpPr>
           <p:nvPr>
-            <p:ph type="body" idx="3" sz="quarter"/>
+            <p:ph type="body" sz="quarter" idx="3"/>
           </p:nvPr>
         </p:nvSpPr>
         <p:spPr/>
@@ -903,7 +901,7 @@
 </file>
 
 <file path=ppt/notesSlides/notesSlide3.xml><?xml version="1.0" encoding="utf-8"?>
-<p:notes xmlns:a="http://schemas.openxmlformats.org/drawingml/2006/main" xmlns:p="http://schemas.openxmlformats.org/presentationml/2006/main" xmlns:r="http://schemas.openxmlformats.org/officeDocument/2006/relationships">
+<p:notes xmlns:a="http://schemas.openxmlformats.org/drawingml/2006/main" xmlns:r="http://schemas.openxmlformats.org/officeDocument/2006/relationships" xmlns:p="http://schemas.openxmlformats.org/presentationml/2006/main">
   <p:cSld>
     <p:spTree>
       <p:nvGrpSpPr>
@@ -923,7 +921,7 @@
         <p:nvSpPr>
           <p:cNvPr id="2" name="Slide Image Placeholder 1"/>
           <p:cNvSpPr>
-            <a:spLocks noGrp="1"/>
+            <a:spLocks noGrp="1" noRot="1" noChangeAspect="1"/>
           </p:cNvSpPr>
           <p:nvPr>
             <p:ph type="sldImg" idx="2"/>
@@ -938,7 +936,7 @@
             <a:spLocks noGrp="1"/>
           </p:cNvSpPr>
           <p:nvPr>
-            <p:ph type="sldNum" idx="5" sz="quarter"/>
+            <p:ph type="sldNum" sz="quarter" idx="5"/>
           </p:nvPr>
         </p:nvSpPr>
         <p:spPr/>
@@ -950,7 +948,7 @@
             <a:spLocks noGrp="1"/>
           </p:cNvSpPr>
           <p:nvPr>
-            <p:ph type="body" idx="3" sz="quarter"/>
+            <p:ph type="body" sz="quarter" idx="3"/>
           </p:nvPr>
         </p:nvSpPr>
         <p:spPr/>
@@ -973,7 +971,7 @@
 </file>
 
 <file path=ppt/notesSlides/notesSlide4.xml><?xml version="1.0" encoding="utf-8"?>
-<p:notes xmlns:a="http://schemas.openxmlformats.org/drawingml/2006/main" xmlns:p="http://schemas.openxmlformats.org/presentationml/2006/main" xmlns:r="http://schemas.openxmlformats.org/officeDocument/2006/relationships">
+<p:notes xmlns:a="http://schemas.openxmlformats.org/drawingml/2006/main" xmlns:r="http://schemas.openxmlformats.org/officeDocument/2006/relationships" xmlns:p="http://schemas.openxmlformats.org/presentationml/2006/main">
   <p:cSld>
     <p:spTree>
       <p:nvGrpSpPr>
@@ -993,7 +991,7 @@
         <p:nvSpPr>
           <p:cNvPr id="2" name="Slide Image Placeholder 1"/>
           <p:cNvSpPr>
-            <a:spLocks noGrp="1"/>
+            <a:spLocks noGrp="1" noRot="1" noChangeAspect="1"/>
           </p:cNvSpPr>
           <p:nvPr>
             <p:ph type="sldImg" idx="2"/>
@@ -1008,7 +1006,7 @@
             <a:spLocks noGrp="1"/>
           </p:cNvSpPr>
           <p:nvPr>
-            <p:ph type="sldNum" idx="5" sz="quarter"/>
+            <p:ph type="sldNum" sz="quarter" idx="5"/>
           </p:nvPr>
         </p:nvSpPr>
         <p:spPr/>
@@ -1020,7 +1018,7 @@
             <a:spLocks noGrp="1"/>
           </p:cNvSpPr>
           <p:nvPr>
-            <p:ph type="body" idx="3" sz="quarter"/>
+            <p:ph type="body" sz="quarter" idx="3"/>
           </p:nvPr>
         </p:nvSpPr>
         <p:spPr/>
@@ -1043,7 +1041,7 @@
 </file>
 
 <file path=ppt/notesSlides/notesSlide5.xml><?xml version="1.0" encoding="utf-8"?>
-<p:notes xmlns:a="http://schemas.openxmlformats.org/drawingml/2006/main" xmlns:p="http://schemas.openxmlformats.org/presentationml/2006/main" xmlns:r="http://schemas.openxmlformats.org/officeDocument/2006/relationships">
+<p:notes xmlns:a="http://schemas.openxmlformats.org/drawingml/2006/main" xmlns:r="http://schemas.openxmlformats.org/officeDocument/2006/relationships" xmlns:p="http://schemas.openxmlformats.org/presentationml/2006/main">
   <p:cSld>
     <p:spTree>
       <p:nvGrpSpPr>
@@ -1063,7 +1061,7 @@
         <p:nvSpPr>
           <p:cNvPr id="2" name="Slide Image Placeholder 1"/>
           <p:cNvSpPr>
-            <a:spLocks noGrp="1"/>
+            <a:spLocks noGrp="1" noRot="1" noChangeAspect="1"/>
           </p:cNvSpPr>
           <p:nvPr>
             <p:ph type="sldImg" idx="2"/>
@@ -1078,7 +1076,7 @@
             <a:spLocks noGrp="1"/>
           </p:cNvSpPr>
           <p:nvPr>
-            <p:ph type="sldNum" idx="5" sz="quarter"/>
+            <p:ph type="sldNum" sz="quarter" idx="5"/>
           </p:nvPr>
         </p:nvSpPr>
         <p:spPr/>
@@ -1090,7 +1088,7 @@
             <a:spLocks noGrp="1"/>
           </p:cNvSpPr>
           <p:nvPr>
-            <p:ph type="body" idx="3" sz="quarter"/>
+            <p:ph type="body" sz="quarter" idx="3"/>
           </p:nvPr>
         </p:nvSpPr>
         <p:spPr/>
@@ -2626,7 +2624,7 @@
 </file>
 
 <file path=ppt/slides/slide1.xml><?xml version="1.0" encoding="utf-8"?>
-<p:sld xmlns:a="http://schemas.openxmlformats.org/drawingml/2006/main" xmlns:p="http://schemas.openxmlformats.org/presentationml/2006/main" xmlns:r="http://schemas.openxmlformats.org/officeDocument/2006/relationships">
+<p:sld xmlns:a="http://schemas.openxmlformats.org/drawingml/2006/main" xmlns:r="http://schemas.openxmlformats.org/officeDocument/2006/relationships" xmlns:p="http://schemas.openxmlformats.org/presentationml/2006/main">
   <p:cSld>
     <p:spTree>
       <p:nvGrpSpPr>
@@ -2634,7 +2632,14 @@
         <p:cNvGrpSpPr/>
         <p:nvPr/>
       </p:nvGrpSpPr>
-      <p:grpSpPr/>
+      <p:grpSpPr>
+        <a:xfrm>
+          <a:off x="0" y="0"/>
+          <a:ext cx="0" cy="0"/>
+          <a:chOff x="0" y="0"/>
+          <a:chExt cx="0" cy="0"/>
+        </a:xfrm>
+      </p:grpSpPr>
       <p:sp>
         <p:nvSpPr>
           <p:cNvPr id="2" name="Subtitle 1"/>
@@ -2642,14 +2647,16 @@
             <a:spLocks noGrp="1"/>
           </p:cNvSpPr>
           <p:nvPr>
-            <p:ph type="subTitle" idx="1" sz="quarter"/>
+            <p:ph type="subTitle" sz="quarter" idx="1"/>
           </p:nvPr>
         </p:nvSpPr>
         <p:spPr/>
         <p:txBody>
           <a:bodyPr/>
           <a:lstStyle/>
-          <a:p/>
+          <a:p>
+            <a:endParaRPr/>
+          </a:p>
         </p:txBody>
       </p:sp>
       <p:sp>
@@ -2675,9 +2682,6 @@
               </a:rPr>
               <a:t>Intermediate 4 — Serialization &amp; Schema Registry</a:t>
             </a:r>
-            <a:endParaRPr sz="4200" b="1" i="0">
-              <a:latin typeface="Times New Roman"/>
-            </a:endParaRPr>
           </a:p>
         </p:txBody>
       </p:sp>
@@ -2723,7 +2727,7 @@
 </file>
 
 <file path=ppt/slides/slide10.xml><?xml version="1.0" encoding="utf-8"?>
-<p:sld xmlns:a="http://schemas.openxmlformats.org/drawingml/2006/main" xmlns:p="http://schemas.openxmlformats.org/presentationml/2006/main" xmlns:r="http://schemas.openxmlformats.org/officeDocument/2006/relationships">
+<p:sld xmlns:a="http://schemas.openxmlformats.org/drawingml/2006/main" xmlns:r="http://schemas.openxmlformats.org/officeDocument/2006/relationships" xmlns:p="http://schemas.openxmlformats.org/presentationml/2006/main">
   <p:cSld>
     <p:spTree>
       <p:nvGrpSpPr>
@@ -2731,7 +2735,14 @@
         <p:cNvGrpSpPr/>
         <p:nvPr/>
       </p:nvGrpSpPr>
-      <p:grpSpPr/>
+      <p:grpSpPr>
+        <a:xfrm>
+          <a:off x="0" y="0"/>
+          <a:ext cx="0" cy="0"/>
+          <a:chOff x="0" y="0"/>
+          <a:chExt cx="0" cy="0"/>
+        </a:xfrm>
+      </p:grpSpPr>
       <p:sp>
         <p:nvSpPr>
           <p:cNvPr id="2" name="Title 1"/>
@@ -2769,83 +2780,102 @@
           <a:lstStyle/>
           <a:p>
             <a:r>
+              <a:rPr dirty="0"/>
               <a:t> The one habit that keeps evolution safe under BACKWARD/FULL:</a:t>
             </a:r>
           </a:p>
           <a:p>
             <a:r>
-              <a:rPr b="1"/>
+              <a:rPr b="1" dirty="0"/>
               <a:t> Adding a field?</a:t>
             </a:r>
             <a:r>
+              <a:rPr dirty="0"/>
               <a:t> Give it a</a:t>
             </a:r>
             <a:r>
-              <a:rPr b="1"/>
+              <a:rPr b="1" dirty="0"/>
               <a:t> default value</a:t>
             </a:r>
             <a:r>
+              <a:rPr dirty="0"/>
               <a:t> → old data (missing the field) still deserializes</a:t>
             </a:r>
           </a:p>
           <a:p>
             <a:r>
-              <a:rPr b="1"/>
+              <a:rPr b="1" dirty="0"/>
               <a:t> Removing a field?</a:t>
             </a:r>
             <a:r>
+              <a:rPr dirty="0"/>
               <a:t> Only safe if it</a:t>
             </a:r>
             <a:r>
-              <a:rPr b="1"/>
+              <a:rPr b="1" dirty="0"/>
               <a:t> had a default</a:t>
             </a:r>
             <a:r>
+              <a:rPr dirty="0"/>
               <a:t> → consumers expecting it fall back</a:t>
             </a:r>
           </a:p>
           <a:p>
             <a:r>
-              <a:rPr b="1"/>
+              <a:rPr b="1" dirty="0"/>
               <a:t> Renaming / changing a type?</a:t>
             </a:r>
             <a:r>
+              <a:rPr dirty="0"/>
               <a:t> Usually</a:t>
             </a:r>
             <a:r>
-              <a:rPr b="1"/>
+              <a:rPr b="1" dirty="0"/>
               <a:t> breaking</a:t>
             </a:r>
             <a:r>
+              <a:rPr dirty="0"/>
               <a:t> — use aliases or a new field instead</a:t>
             </a:r>
           </a:p>
-          <a:p/>
-          <a:p>
-            <a:r>
+          <a:p>
+            <a:endParaRPr lang="en-US" dirty="0"/>
+          </a:p>
+          <a:p>
+            <a:endParaRPr lang="en-US" dirty="0"/>
+          </a:p>
+          <a:p>
+            <a:endParaRPr dirty="0"/>
+          </a:p>
+          <a:p>
+            <a:r>
+              <a:rPr dirty="0"/>
               <a:t> A new consumer reading an old record with no</a:t>
             </a:r>
             <a:r>
-              <a:rPr>
+              <a:rPr dirty="0">
                 <a:latin typeface="Courier New"/>
               </a:rPr>
               <a:t> region</a:t>
             </a:r>
             <a:r>
+              <a:rPr dirty="0"/>
               <a:t> gets</a:t>
             </a:r>
             <a:r>
-              <a:rPr>
+              <a:rPr dirty="0">
                 <a:latin typeface="Courier New"/>
               </a:rPr>
               <a:t> "UNKNOWN"</a:t>
             </a:r>
             <a:r>
+              <a:rPr dirty="0"/>
               <a:t> — no crash</a:t>
             </a:r>
           </a:p>
           <a:p>
             <a:r>
+              <a:rPr dirty="0"/>
               <a:t> This single discipline (defaults on new fields) covers the majority of real evolutions</a:t>
             </a:r>
           </a:p>
@@ -2900,8 +2930,8 @@
         </p:blipFill>
         <p:spPr>
           <a:xfrm>
-            <a:off x="0" y="3108960"/>
-            <a:ext cx="9855200" cy="520700"/>
+            <a:off x="0" y="4529931"/>
+            <a:ext cx="9372600" cy="520700"/>
           </a:xfrm>
           <a:prstGeom prst="rect">
             <a:avLst/>
@@ -2917,7 +2947,7 @@
 </file>
 
 <file path=ppt/slides/slide11.xml><?xml version="1.0" encoding="utf-8"?>
-<p:sld xmlns:a="http://schemas.openxmlformats.org/drawingml/2006/main" xmlns:p="http://schemas.openxmlformats.org/presentationml/2006/main" xmlns:r="http://schemas.openxmlformats.org/officeDocument/2006/relationships">
+<p:sld xmlns:a="http://schemas.openxmlformats.org/drawingml/2006/main" xmlns:r="http://schemas.openxmlformats.org/officeDocument/2006/relationships" xmlns:p="http://schemas.openxmlformats.org/presentationml/2006/main">
   <p:cSld>
     <p:spTree>
       <p:nvGrpSpPr>
@@ -2925,7 +2955,14 @@
         <p:cNvGrpSpPr/>
         <p:nvPr/>
       </p:nvGrpSpPr>
-      <p:grpSpPr/>
+      <p:grpSpPr>
+        <a:xfrm>
+          <a:off x="0" y="0"/>
+          <a:ext cx="0" cy="0"/>
+          <a:chOff x="0" y="0"/>
+          <a:chExt cx="0" cy="0"/>
+        </a:xfrm>
+      </p:grpSpPr>
       <p:sp>
         <p:nvSpPr>
           <p:cNvPr id="2" name="Title 1"/>
@@ -2970,10 +3007,7 @@
               <a:t> governance tool</a:t>
             </a:r>
             <a:r>
-              <a:t> , not just a codec. For an organization with many</a:t>
-            </a:r>
-            <a:r>
-              <a:t> systems sharing events, it's how teams stay coordinated</a:t>
+              <a:t> , not just a codec. For an organization with many systems sharing events, it's how teams stay coordinated</a:t>
             </a:r>
             <a:r>
               <a:rPr b="1"/>
@@ -3077,7 +3111,7 @@
 </file>
 
 <file path=ppt/slides/slide12.xml><?xml version="1.0" encoding="utf-8"?>
-<p:sld xmlns:a="http://schemas.openxmlformats.org/drawingml/2006/main" xmlns:p="http://schemas.openxmlformats.org/presentationml/2006/main" xmlns:r="http://schemas.openxmlformats.org/officeDocument/2006/relationships">
+<p:sld xmlns:a="http://schemas.openxmlformats.org/drawingml/2006/main" xmlns:r="http://schemas.openxmlformats.org/officeDocument/2006/relationships" xmlns:p="http://schemas.openxmlformats.org/presentationml/2006/main">
   <p:cSld>
     <p:spTree>
       <p:nvGrpSpPr>
@@ -3085,7 +3119,14 @@
         <p:cNvGrpSpPr/>
         <p:nvPr/>
       </p:nvGrpSpPr>
-      <p:grpSpPr/>
+      <p:grpSpPr>
+        <a:xfrm>
+          <a:off x="0" y="0"/>
+          <a:ext cx="0" cy="0"/>
+          <a:chOff x="0" y="0"/>
+          <a:chExt cx="0" cy="0"/>
+        </a:xfrm>
+      </p:grpSpPr>
       <p:sp>
         <p:nvSpPr>
           <p:cNvPr id="2" name="Title 1"/>
@@ -3184,10 +3225,7 @@
               <a:t> BACKWARD</a:t>
             </a:r>
             <a:r>
-              <a:t> compatibility — prove old</a:t>
-            </a:r>
-            <a:r>
-              <a:t> consumers still work</a:t>
+              <a:t> compatibility — prove old consumers still work</a:t>
             </a:r>
           </a:p>
           <a:p>
@@ -3259,7 +3297,7 @@
 </file>
 
 <file path=ppt/slides/slide13.xml><?xml version="1.0" encoding="utf-8"?>
-<p:sld xmlns:a="http://schemas.openxmlformats.org/drawingml/2006/main" xmlns:p="http://schemas.openxmlformats.org/presentationml/2006/main" xmlns:r="http://schemas.openxmlformats.org/officeDocument/2006/relationships">
+<p:sld xmlns:a="http://schemas.openxmlformats.org/drawingml/2006/main" xmlns:r="http://schemas.openxmlformats.org/officeDocument/2006/relationships" xmlns:p="http://schemas.openxmlformats.org/presentationml/2006/main">
   <p:cSld>
     <p:spTree>
       <p:nvGrpSpPr>
@@ -3267,7 +3305,14 @@
         <p:cNvGrpSpPr/>
         <p:nvPr/>
       </p:nvGrpSpPr>
-      <p:grpSpPr/>
+      <p:grpSpPr>
+        <a:xfrm>
+          <a:off x="0" y="0"/>
+          <a:ext cx="0" cy="0"/>
+          <a:chOff x="0" y="0"/>
+          <a:chExt cx="0" cy="0"/>
+        </a:xfrm>
+      </p:grpSpPr>
       <p:sp>
         <p:nvSpPr>
           <p:cNvPr id="2" name="Title 1"/>
@@ -3435,7 +3480,7 @@
 </file>
 
 <file path=ppt/slides/slide2.xml><?xml version="1.0" encoding="utf-8"?>
-<p:sld xmlns:a="http://schemas.openxmlformats.org/drawingml/2006/main" xmlns:p="http://schemas.openxmlformats.org/presentationml/2006/main" xmlns:r="http://schemas.openxmlformats.org/officeDocument/2006/relationships">
+<p:sld xmlns:a="http://schemas.openxmlformats.org/drawingml/2006/main" xmlns:r="http://schemas.openxmlformats.org/officeDocument/2006/relationships" xmlns:p="http://schemas.openxmlformats.org/presentationml/2006/main">
   <p:cSld>
     <p:spTree>
       <p:nvGrpSpPr>
@@ -3443,7 +3488,14 @@
         <p:cNvGrpSpPr/>
         <p:nvPr/>
       </p:nvGrpSpPr>
-      <p:grpSpPr/>
+      <p:grpSpPr>
+        <a:xfrm>
+          <a:off x="0" y="0"/>
+          <a:ext cx="0" cy="0"/>
+          <a:chOff x="0" y="0"/>
+          <a:chExt cx="0" cy="0"/>
+        </a:xfrm>
+      </p:grpSpPr>
       <p:sp>
         <p:nvSpPr>
           <p:cNvPr id="2" name="Title 1"/>
@@ -3548,7 +3600,7 @@
 </file>
 
 <file path=ppt/slides/slide3.xml><?xml version="1.0" encoding="utf-8"?>
-<p:sld xmlns:a="http://schemas.openxmlformats.org/drawingml/2006/main" xmlns:p="http://schemas.openxmlformats.org/presentationml/2006/main" xmlns:r="http://schemas.openxmlformats.org/officeDocument/2006/relationships">
+<p:sld xmlns:a="http://schemas.openxmlformats.org/drawingml/2006/main" xmlns:r="http://schemas.openxmlformats.org/officeDocument/2006/relationships" xmlns:p="http://schemas.openxmlformats.org/presentationml/2006/main">
   <p:cSld>
     <p:spTree>
       <p:nvGrpSpPr>
@@ -3556,7 +3608,14 @@
         <p:cNvGrpSpPr/>
         <p:nvPr/>
       </p:nvGrpSpPr>
-      <p:grpSpPr/>
+      <p:grpSpPr>
+        <a:xfrm>
+          <a:off x="0" y="0"/>
+          <a:ext cx="0" cy="0"/>
+          <a:chOff x="0" y="0"/>
+          <a:chExt cx="0" cy="0"/>
+        </a:xfrm>
+      </p:grpSpPr>
       <p:sp>
         <p:nvSpPr>
           <p:cNvPr id="2" name="Title 1"/>
@@ -3594,75 +3653,88 @@
           <a:lstStyle/>
           <a:p>
             <a:r>
+              <a:rPr dirty="0"/>
               <a:t> From the producer module: Kafka moves</a:t>
             </a:r>
             <a:r>
-              <a:rPr b="1"/>
+              <a:rPr b="1" dirty="0"/>
               <a:t> bytes</a:t>
             </a:r>
             <a:r>
-              <a:t> . The producer serializes; the consumer</a:t>
-            </a:r>
-            <a:r>
-              <a:t> deserializes. Nothing in the broker enforces what those bytes</a:t>
-            </a:r>
-            <a:r>
-              <a:rPr i="1"/>
+              <a:rPr dirty="0"/>
+              <a:t> . The producer serializes; the consumer deserializes. Nothing in the broker enforces what those bytes</a:t>
+            </a:r>
+            <a:r>
+              <a:rPr i="1" dirty="0"/>
               <a:t> mean</a:t>
             </a:r>
             <a:r>
+              <a:rPr dirty="0"/>
               <a:t> .</a:t>
             </a:r>
           </a:p>
-          <a:p/>
-          <a:p>
-            <a:r>
+          <a:p>
+            <a:endParaRPr lang="en-US" dirty="0"/>
+          </a:p>
+          <a:p>
+            <a:endParaRPr lang="en-US" dirty="0"/>
+          </a:p>
+          <a:p>
+            <a:endParaRPr dirty="0"/>
+          </a:p>
+          <a:p>
+            <a:r>
+              <a:rPr dirty="0"/>
               <a:t> If producer and consumer disagree on the shape, the consumer reads</a:t>
             </a:r>
             <a:r>
-              <a:rPr b="1"/>
+              <a:rPr b="1" dirty="0"/>
               <a:t> garbage</a:t>
             </a:r>
             <a:r>
+              <a:rPr dirty="0"/>
               <a:t> — or crashes</a:t>
             </a:r>
           </a:p>
           <a:p>
             <a:r>
+              <a:rPr dirty="0"/>
               <a:t> With</a:t>
             </a:r>
             <a:r>
-              <a:rPr b="1"/>
+              <a:rPr b="1" dirty="0"/>
               <a:t> several systems</a:t>
             </a:r>
             <a:r>
-              <a:t> producing and consuming the same topics, "just agree informally"</a:t>
-            </a:r>
-            <a:r>
-              <a:t> doesn't scale</a:t>
-            </a:r>
-          </a:p>
-          <a:p>
-            <a:r>
+              <a:rPr dirty="0"/>
+              <a:t> producing and consuming the same topics, "just agree informally" doesn't scale</a:t>
+            </a:r>
+          </a:p>
+          <a:p>
+            <a:r>
+              <a:rPr dirty="0"/>
               <a:t> You need a</a:t>
             </a:r>
             <a:r>
-              <a:rPr b="1"/>
+              <a:rPr b="1" dirty="0"/>
               <a:t> contract</a:t>
             </a:r>
             <a:r>
+              <a:rPr dirty="0"/>
               <a:t> on the data's shape — enforced, versioned, shared</a:t>
             </a:r>
           </a:p>
           <a:p>
             <a:r>
+              <a:rPr dirty="0"/>
               <a:t> That contract is a</a:t>
             </a:r>
             <a:r>
-              <a:rPr b="1"/>
+              <a:rPr b="1" dirty="0"/>
               <a:t> schema</a:t>
             </a:r>
             <a:r>
+              <a:rPr dirty="0"/>
               <a:t> , and the Schema Registry is where it lives.</a:t>
             </a:r>
           </a:p>
@@ -3710,14 +3782,14 @@
           <p:nvPr/>
         </p:nvPicPr>
         <p:blipFill>
-          <a:blip r:embed="rId2"/>
+          <a:blip r:embed="rId3"/>
           <a:stretch>
             <a:fillRect/>
           </a:stretch>
         </p:blipFill>
         <p:spPr>
           <a:xfrm>
-            <a:off x="0" y="1792224"/>
+            <a:off x="234950" y="2472531"/>
             <a:ext cx="8915400" cy="550553"/>
           </a:xfrm>
           <a:prstGeom prst="rect">
@@ -3734,7 +3806,7 @@
 </file>
 
 <file path=ppt/slides/slide4.xml><?xml version="1.0" encoding="utf-8"?>
-<p:sld xmlns:a="http://schemas.openxmlformats.org/drawingml/2006/main" xmlns:p="http://schemas.openxmlformats.org/presentationml/2006/main" xmlns:r="http://schemas.openxmlformats.org/officeDocument/2006/relationships">
+<p:sld xmlns:a="http://schemas.openxmlformats.org/drawingml/2006/main" xmlns:r="http://schemas.openxmlformats.org/officeDocument/2006/relationships" xmlns:p="http://schemas.openxmlformats.org/presentationml/2006/main">
   <p:cSld>
     <p:spTree>
       <p:nvGrpSpPr>
@@ -3742,7 +3814,14 @@
         <p:cNvGrpSpPr/>
         <p:nvPr/>
       </p:nvGrpSpPr>
-      <p:grpSpPr/>
+      <p:grpSpPr>
+        <a:xfrm>
+          <a:off x="0" y="0"/>
+          <a:ext cx="0" cy="0"/>
+          <a:chOff x="0" y="0"/>
+          <a:chExt cx="0" cy="0"/>
+        </a:xfrm>
+      </p:grpSpPr>
       <p:sp>
         <p:nvSpPr>
           <p:cNvPr id="2" name="Title 1"/>
@@ -3780,48 +3859,80 @@
           <a:lstStyle/>
           <a:p>
             <a:r>
+              <a:rPr dirty="0"/>
               <a:t> Three common ways to structure event payloads:</a:t>
             </a:r>
           </a:p>
-          <a:p/>
-          <a:p/>
-          <a:p/>
-          <a:p/>
-          <a:p/>
-          <a:p>
-            <a:r>
+          <a:p>
+            <a:endParaRPr dirty="0"/>
+          </a:p>
+          <a:p>
+            <a:endParaRPr dirty="0"/>
+          </a:p>
+          <a:p>
+            <a:endParaRPr dirty="0"/>
+          </a:p>
+          <a:p>
+            <a:endParaRPr dirty="0"/>
+          </a:p>
+          <a:p>
+            <a:endParaRPr lang="en-US" dirty="0"/>
+          </a:p>
+          <a:p>
+            <a:endParaRPr lang="en-US" dirty="0"/>
+          </a:p>
+          <a:p>
+            <a:endParaRPr lang="en-US" dirty="0"/>
+          </a:p>
+          <a:p>
+            <a:endParaRPr lang="en-US" dirty="0"/>
+          </a:p>
+          <a:p>
+            <a:endParaRPr dirty="0"/>
+          </a:p>
+          <a:p>
+            <a:r>
+              <a:rPr dirty="0"/>
               <a:t> Plain JSON is easy but</a:t>
             </a:r>
             <a:r>
-              <a:rPr b="1"/>
+              <a:rPr b="1" dirty="0"/>
               <a:t> unenforced</a:t>
             </a:r>
             <a:r>
+              <a:rPr dirty="0"/>
               <a:t> — every consumer hopes the fields are there</a:t>
             </a:r>
           </a:p>
           <a:p>
             <a:r>
-              <a:rPr b="1"/>
-              <a:t> Avro / Protobuf</a:t>
-            </a:r>
-            <a:r>
+              <a:rPr b="1" dirty="0"/>
+              <a:t> Avro / </a:t>
+            </a:r>
+            <a:r>
+              <a:rPr b="1" dirty="0" err="1"/>
+              <a:t>Protobuf</a:t>
+            </a:r>
+            <a:r>
+              <a:rPr dirty="0"/>
               <a:t> carry a real schema, are compact on the wire, and support</a:t>
             </a:r>
             <a:r>
-              <a:rPr b="1"/>
+              <a:rPr b="1" dirty="0"/>
               <a:t> safe evolution</a:t>
             </a:r>
           </a:p>
           <a:p>
             <a:r>
+              <a:rPr dirty="0"/>
               <a:t> This course uses</a:t>
             </a:r>
             <a:r>
-              <a:rPr b="1"/>
+              <a:rPr b="1" dirty="0"/>
               <a:t> Avro</a:t>
             </a:r>
             <a:r>
+              <a:rPr dirty="0"/>
               <a:t> with the Schema Registry — the mainstream Kafka pattern</a:t>
             </a:r>
           </a:p>
@@ -3866,11 +3977,17 @@
           <p:cNvGraphicFramePr>
             <a:graphicFrameLocks noGrp="1"/>
           </p:cNvGraphicFramePr>
-          <p:nvPr/>
+          <p:nvPr>
+            <p:extLst>
+              <p:ext uri="{D42A27DB-BD31-4B8C-83A1-F6EECF244321}">
+                <p14:modId xmlns:p14="http://schemas.microsoft.com/office/powerpoint/2010/main" val="534517137"/>
+              </p:ext>
+            </p:extLst>
+          </p:nvPr>
         </p:nvGraphicFramePr>
         <p:xfrm>
-          <a:off x="237744" y="1353312"/>
-          <a:ext cx="8915400" cy="1828800"/>
+          <a:off x="571499" y="1693672"/>
+          <a:ext cx="8581645" cy="3383280"/>
         </p:xfrm>
         <a:graphic>
           <a:graphicData uri="http://schemas.openxmlformats.org/drawingml/2006/table">
@@ -3879,12 +3996,36 @@
                 <a:tableStyleId>{5C22544A-7EE6-4342-B048-85BDC9FD1C3A}</a:tableStyleId>
               </a:tblPr>
               <a:tblGrid>
-                <a:gridCol w="2228850"/>
-                <a:gridCol w="2228850"/>
-                <a:gridCol w="2228850"/>
-                <a:gridCol w="2228850"/>
+                <a:gridCol w="1895095">
+                  <a:extLst>
+                    <a:ext uri="{9D8B030D-6E8A-4147-A177-3AD203B41FA5}">
+                      <a16:colId xmlns:a16="http://schemas.microsoft.com/office/drawing/2014/main" val="20000"/>
+                    </a:ext>
+                  </a:extLst>
+                </a:gridCol>
+                <a:gridCol w="2228850">
+                  <a:extLst>
+                    <a:ext uri="{9D8B030D-6E8A-4147-A177-3AD203B41FA5}">
+                      <a16:colId xmlns:a16="http://schemas.microsoft.com/office/drawing/2014/main" val="20001"/>
+                    </a:ext>
+                  </a:extLst>
+                </a:gridCol>
+                <a:gridCol w="2228850">
+                  <a:extLst>
+                    <a:ext uri="{9D8B030D-6E8A-4147-A177-3AD203B41FA5}">
+                      <a16:colId xmlns:a16="http://schemas.microsoft.com/office/drawing/2014/main" val="20002"/>
+                    </a:ext>
+                  </a:extLst>
+                </a:gridCol>
+                <a:gridCol w="2228850">
+                  <a:extLst>
+                    <a:ext uri="{9D8B030D-6E8A-4147-A177-3AD203B41FA5}">
+                      <a16:colId xmlns:a16="http://schemas.microsoft.com/office/drawing/2014/main" val="20003"/>
+                    </a:ext>
+                  </a:extLst>
+                </a:gridCol>
               </a:tblGrid>
-              <a:tr h="457200">
+              <a:tr h="0">
                 <a:tc>
                   <a:txBody>
                     <a:bodyPr/>
@@ -3933,6 +4074,11 @@
                   </a:txBody>
                   <a:tcPr/>
                 </a:tc>
+                <a:extLst>
+                  <a:ext uri="{0D108BD9-81ED-4DB2-BD59-A6C34878D82A}">
+                    <a16:rowId xmlns:a16="http://schemas.microsoft.com/office/drawing/2014/main" val="10000"/>
+                  </a:ext>
+                </a:extLst>
               </a:tr>
               <a:tr h="457200">
                 <a:tc>
@@ -3941,14 +4087,8 @@
                     <a:lstStyle/>
                     <a:p>
                       <a:r>
-                        <a:t/>
-                      </a:r>
-                      <a:r>
                         <a:rPr b="1"/>
                         <a:t>JSON</a:t>
-                      </a:r>
-                      <a:r>
-                        <a:t/>
                       </a:r>
                     </a:p>
                   </a:txBody>
@@ -3990,6 +4130,11 @@
                   </a:txBody>
                   <a:tcPr/>
                 </a:tc>
+                <a:extLst>
+                  <a:ext uri="{0D108BD9-81ED-4DB2-BD59-A6C34878D82A}">
+                    <a16:rowId xmlns:a16="http://schemas.microsoft.com/office/drawing/2014/main" val="10001"/>
+                  </a:ext>
+                </a:extLst>
               </a:tr>
               <a:tr h="457200">
                 <a:tc>
@@ -3998,14 +4143,8 @@
                     <a:lstStyle/>
                     <a:p>
                       <a:r>
-                        <a:t/>
-                      </a:r>
-                      <a:r>
                         <a:rPr b="1"/>
                         <a:t>Avro</a:t>
-                      </a:r>
-                      <a:r>
-                        <a:t/>
                       </a:r>
                     </a:p>
                   </a:txBody>
@@ -4047,6 +4186,11 @@
                   </a:txBody>
                   <a:tcPr/>
                 </a:tc>
+                <a:extLst>
+                  <a:ext uri="{0D108BD9-81ED-4DB2-BD59-A6C34878D82A}">
+                    <a16:rowId xmlns:a16="http://schemas.microsoft.com/office/drawing/2014/main" val="10002"/>
+                  </a:ext>
+                </a:extLst>
               </a:tr>
               <a:tr h="457200">
                 <a:tc>
@@ -4055,14 +4199,8 @@
                     <a:lstStyle/>
                     <a:p>
                       <a:r>
-                        <a:t/>
-                      </a:r>
-                      <a:r>
                         <a:rPr b="1"/>
                         <a:t>Protobuf</a:t>
-                      </a:r>
-                      <a:r>
-                        <a:t/>
                       </a:r>
                     </a:p>
                   </a:txBody>
@@ -4098,12 +4236,26 @@
                     <a:lstStyle/>
                     <a:p>
                       <a:r>
-                        <a:t>cross-language, popular for gRPC shops</a:t>
+                        <a:rPr dirty="0"/>
+                        <a:t>cross-language, popular for </a:t>
+                      </a:r>
+                      <a:r>
+                        <a:rPr dirty="0" err="1"/>
+                        <a:t>gRPC</a:t>
+                      </a:r>
+                      <a:r>
+                        <a:rPr dirty="0"/>
+                        <a:t> shops</a:t>
                       </a:r>
                     </a:p>
                   </a:txBody>
                   <a:tcPr/>
                 </a:tc>
+                <a:extLst>
+                  <a:ext uri="{0D108BD9-81ED-4DB2-BD59-A6C34878D82A}">
+                    <a16:rowId xmlns:a16="http://schemas.microsoft.com/office/drawing/2014/main" val="10003"/>
+                  </a:ext>
+                </a:extLst>
               </a:tr>
             </a:tbl>
           </a:graphicData>
@@ -4118,7 +4270,7 @@
 </file>
 
 <file path=ppt/slides/slide5.xml><?xml version="1.0" encoding="utf-8"?>
-<p:sld xmlns:a="http://schemas.openxmlformats.org/drawingml/2006/main" xmlns:p="http://schemas.openxmlformats.org/presentationml/2006/main" xmlns:r="http://schemas.openxmlformats.org/officeDocument/2006/relationships">
+<p:sld xmlns:a="http://schemas.openxmlformats.org/drawingml/2006/main" xmlns:r="http://schemas.openxmlformats.org/officeDocument/2006/relationships" xmlns:p="http://schemas.openxmlformats.org/presentationml/2006/main">
   <p:cSld>
     <p:spTree>
       <p:nvGrpSpPr>
@@ -4126,7 +4278,14 @@
         <p:cNvGrpSpPr/>
         <p:nvPr/>
       </p:nvGrpSpPr>
-      <p:grpSpPr/>
+      <p:grpSpPr>
+        <a:xfrm>
+          <a:off x="0" y="0"/>
+          <a:ext cx="0" cy="0"/>
+          <a:chOff x="0" y="0"/>
+          <a:chExt cx="0" cy="0"/>
+        </a:xfrm>
+      </p:grpSpPr>
       <p:sp>
         <p:nvSpPr>
           <p:cNvPr id="2" name="Title 1"/>
@@ -4164,53 +4323,74 @@
           <a:lstStyle/>
           <a:p>
             <a:r>
+              <a:rPr dirty="0"/>
               <a:t> A standalone service (in our lab at</a:t>
             </a:r>
             <a:r>
-              <a:rPr>
+              <a:rPr dirty="0">
                 <a:latin typeface="Courier New"/>
               </a:rPr>
               <a:t> :8081</a:t>
             </a:r>
             <a:r>
+              <a:rPr dirty="0"/>
               <a:t> ) that stores schemas and hands out IDs.</a:t>
             </a:r>
           </a:p>
-          <a:p/>
-          <a:p/>
-          <a:p>
-            <a:r>
+          <a:p>
+            <a:endParaRPr dirty="0"/>
+          </a:p>
+          <a:p>
+            <a:endParaRPr lang="en-US" dirty="0"/>
+          </a:p>
+          <a:p>
+            <a:endParaRPr lang="en-US" dirty="0"/>
+          </a:p>
+          <a:p>
+            <a:endParaRPr lang="en-US" dirty="0"/>
+          </a:p>
+          <a:p>
+            <a:endParaRPr dirty="0"/>
+          </a:p>
+          <a:p>
+            <a:r>
+              <a:rPr dirty="0"/>
               <a:t> The</a:t>
             </a:r>
             <a:r>
-              <a:rPr b="1"/>
+              <a:rPr b="1" dirty="0"/>
               <a:t> schema travels by ID</a:t>
             </a:r>
             <a:r>
+              <a:rPr dirty="0"/>
               <a:t> , not inline — a few bytes, not the whole schema per message</a:t>
             </a:r>
           </a:p>
           <a:p>
             <a:r>
+              <a:rPr dirty="0"/>
               <a:t> Producers</a:t>
             </a:r>
             <a:r>
-              <a:rPr b="1"/>
+              <a:rPr b="1" dirty="0"/>
               <a:t> auto-register</a:t>
             </a:r>
             <a:r>
+              <a:rPr dirty="0"/>
               <a:t> schemas; consumers</a:t>
             </a:r>
             <a:r>
-              <a:rPr b="1"/>
+              <a:rPr b="1" dirty="0"/>
               <a:t> fetch by ID</a:t>
             </a:r>
             <a:r>
+              <a:rPr dirty="0"/>
               <a:t> and cache them</a:t>
             </a:r>
           </a:p>
           <a:p>
             <a:r>
+              <a:rPr dirty="0"/>
               <a:t> One source of truth for "what's in this topic," shared across all systems</a:t>
             </a:r>
           </a:p>
@@ -4265,7 +4445,7 @@
         </p:blipFill>
         <p:spPr>
           <a:xfrm>
-            <a:off x="0" y="1353312"/>
+            <a:off x="222250" y="2243931"/>
             <a:ext cx="8915400" cy="946124"/>
           </a:xfrm>
           <a:prstGeom prst="rect">
@@ -4282,7 +4462,7 @@
 </file>
 
 <file path=ppt/slides/slide6.xml><?xml version="1.0" encoding="utf-8"?>
-<p:sld xmlns:a="http://schemas.openxmlformats.org/drawingml/2006/main" xmlns:p="http://schemas.openxmlformats.org/presentationml/2006/main" xmlns:r="http://schemas.openxmlformats.org/officeDocument/2006/relationships">
+<p:sld xmlns:a="http://schemas.openxmlformats.org/drawingml/2006/main" xmlns:r="http://schemas.openxmlformats.org/officeDocument/2006/relationships" xmlns:p="http://schemas.openxmlformats.org/presentationml/2006/main">
   <p:cSld>
     <p:spTree>
       <p:nvGrpSpPr>
@@ -4290,7 +4470,14 @@
         <p:cNvGrpSpPr/>
         <p:nvPr/>
       </p:nvGrpSpPr>
-      <p:grpSpPr/>
+      <p:grpSpPr>
+        <a:xfrm>
+          <a:off x="0" y="0"/>
+          <a:ext cx="0" cy="0"/>
+          <a:chOff x="0" y="0"/>
+          <a:chExt cx="0" cy="0"/>
+        </a:xfrm>
+      </p:grpSpPr>
       <p:sp>
         <p:nvSpPr>
           <p:cNvPr id="2" name="Title 1"/>
@@ -4328,50 +4515,329 @@
           <a:lstStyle/>
           <a:p>
             <a:r>
+              <a:rPr dirty="0"/>
               <a:t> You don't hand-code the wire format — a</a:t>
             </a:r>
             <a:r>
-              <a:rPr b="1"/>
-              <a:t> serializer/deserializer (serde)</a:t>
-            </a:r>
-            <a:r>
-              <a:t> does it. In the</a:t>
-            </a:r>
-            <a:r>
-              <a:t> Kafka</a:t>
-            </a:r>
-            <a:r>
-              <a:rPr b="1"/>
+              <a:rPr b="1" dirty="0"/>
+              <a:t> serializer/</a:t>
+            </a:r>
+            <a:r>
+              <a:rPr b="1" dirty="0" err="1"/>
+              <a:t>deserializer</a:t>
+            </a:r>
+            <a:r>
+              <a:rPr b="1" dirty="0"/>
+              <a:t> (</a:t>
+            </a:r>
+            <a:r>
+              <a:rPr b="1" dirty="0" err="1"/>
+              <a:t>serde</a:t>
+            </a:r>
+            <a:r>
+              <a:rPr b="1" dirty="0"/>
+              <a:t>)</a:t>
+            </a:r>
+            <a:r>
+              <a:rPr dirty="0"/>
+              <a:t> does it. In the Kafka</a:t>
+            </a:r>
+            <a:r>
+              <a:rPr b="1" dirty="0"/>
               <a:t> Java</a:t>
             </a:r>
             <a:r>
-              <a:t> client that's Confluent's Avro serde:</a:t>
-            </a:r>
-          </a:p>
-          <a:p/>
-          <a:p/>
-          <a:p/>
-          <a:p/>
-          <a:p>
-            <a:r>
+              <a:rPr dirty="0"/>
+              <a:t> client that's Confluent's Avro </a:t>
+            </a:r>
+            <a:r>
+              <a:rPr dirty="0" err="1"/>
+              <a:t>serde</a:t>
+            </a:r>
+            <a:r>
+              <a:rPr dirty="0"/>
+              <a:t>:</a:t>
+            </a:r>
+          </a:p>
+          <a:p>
+            <a:endParaRPr dirty="0"/>
+          </a:p>
+          <a:p>
+            <a:endParaRPr dirty="0"/>
+          </a:p>
+          <a:p>
+            <a:endParaRPr lang="en-US" dirty="0"/>
+          </a:p>
+          <a:p>
+            <a:endParaRPr lang="en-US" dirty="0"/>
+          </a:p>
+          <a:p>
+            <a:endParaRPr lang="en-US" dirty="0"/>
+          </a:p>
+          <a:p>
+            <a:endParaRPr dirty="0"/>
+          </a:p>
+          <a:p>
+            <a:endParaRPr dirty="0"/>
+          </a:p>
+          <a:p>
+            <a:r>
+              <a:rPr dirty="0"/>
               <a:t> The serializer registers the schema (if new) and prefixes the ID</a:t>
             </a:r>
           </a:p>
           <a:p>
             <a:r>
-              <a:t> The deserializer reads the ID, fetches/caches the schema, and decodes</a:t>
-            </a:r>
-          </a:p>
-          <a:p>
-            <a:r>
+              <a:rPr dirty="0"/>
+              <a:t> The </a:t>
+            </a:r>
+            <a:r>
+              <a:rPr dirty="0" err="1"/>
+              <a:t>deserializer</a:t>
+            </a:r>
+            <a:r>
+              <a:rPr dirty="0"/>
+              <a:t> reads the ID, fetches/caches the schema, and decodes</a:t>
+            </a:r>
+          </a:p>
+          <a:p>
+            <a:r>
+              <a:rPr dirty="0"/>
               <a:t> Your business code sees</a:t>
             </a:r>
             <a:r>
-              <a:rPr b="1"/>
+              <a:rPr b="1" dirty="0"/>
               <a:t> objects</a:t>
             </a:r>
             <a:r>
+              <a:rPr dirty="0"/>
               <a:t> , not bytes</a:t>
+            </a:r>
+          </a:p>
+        </p:txBody>
+      </p:sp>
+      <p:sp>
+        <p:nvSpPr>
+          <p:cNvPr id="4" name="TextBox 3"/>
+          <p:cNvSpPr txBox="1"/>
+          <p:nvPr/>
+        </p:nvSpPr>
+        <p:spPr>
+          <a:xfrm>
+            <a:off x="704088" y="8065008"/>
+            <a:ext cx="8915400" cy="228600"/>
+          </a:xfrm>
+          <a:prstGeom prst="rect">
+            <a:avLst/>
+          </a:prstGeom>
+          <a:noFill/>
+        </p:spPr>
+        <p:txBody>
+          <a:bodyPr wrap="none">
+            <a:spAutoFit/>
+          </a:bodyPr>
+          <a:lstStyle/>
+          <a:p>
+            <a:r>
+              <a:rPr sz="800">
+                <a:solidFill>
+                  <a:srgbClr val="000000"/>
+                </a:solidFill>
+              </a:rPr>
+              <a:t>Copyright © 2026 by Elephant Scale, All Rights Reserved</a:t>
+            </a:r>
+          </a:p>
+        </p:txBody>
+      </p:sp>
+      <p:pic>
+        <p:nvPicPr>
+          <p:cNvPr id="5" name="Picture 4" descr="1.png"/>
+          <p:cNvPicPr>
+            <a:picLocks noChangeAspect="1"/>
+          </p:cNvPicPr>
+          <p:nvPr/>
+        </p:nvPicPr>
+        <p:blipFill>
+          <a:blip r:embed="rId3"/>
+          <a:stretch>
+            <a:fillRect/>
+          </a:stretch>
+        </p:blipFill>
+        <p:spPr>
+          <a:xfrm>
+            <a:off x="222250" y="2493128"/>
+            <a:ext cx="8915400" cy="1675646"/>
+          </a:xfrm>
+          <a:prstGeom prst="rect">
+            <a:avLst/>
+          </a:prstGeom>
+        </p:spPr>
+      </p:pic>
+    </p:spTree>
+  </p:cSld>
+  <p:clrMapOvr>
+    <a:masterClrMapping/>
+  </p:clrMapOvr>
+</p:sld>
+</file>
+
+<file path=ppt/slides/slide7.xml><?xml version="1.0" encoding="utf-8"?>
+<p:sld xmlns:a="http://schemas.openxmlformats.org/drawingml/2006/main" xmlns:r="http://schemas.openxmlformats.org/officeDocument/2006/relationships" xmlns:p="http://schemas.openxmlformats.org/presentationml/2006/main">
+  <p:cSld>
+    <p:spTree>
+      <p:nvGrpSpPr>
+        <p:cNvPr id="1" name=""/>
+        <p:cNvGrpSpPr/>
+        <p:nvPr/>
+      </p:nvGrpSpPr>
+      <p:grpSpPr>
+        <a:xfrm>
+          <a:off x="0" y="0"/>
+          <a:ext cx="0" cy="0"/>
+          <a:chOff x="0" y="0"/>
+          <a:chExt cx="0" cy="0"/>
+        </a:xfrm>
+      </p:grpSpPr>
+      <p:sp>
+        <p:nvSpPr>
+          <p:cNvPr id="2" name="Title 1"/>
+          <p:cNvSpPr>
+            <a:spLocks noGrp="1"/>
+          </p:cNvSpPr>
+          <p:nvPr>
+            <p:ph type="title"/>
+          </p:nvPr>
+        </p:nvSpPr>
+        <p:spPr/>
+        <p:txBody>
+          <a:bodyPr/>
+          <a:lstStyle/>
+          <a:p>
+            <a:r>
+              <a:t>Subjects and Versions</a:t>
+            </a:r>
+          </a:p>
+        </p:txBody>
+      </p:sp>
+      <p:sp>
+        <p:nvSpPr>
+          <p:cNvPr id="3" name="Content Placeholder 2"/>
+          <p:cNvSpPr>
+            <a:spLocks noGrp="1"/>
+          </p:cNvSpPr>
+          <p:nvPr>
+            <p:ph idx="1"/>
+          </p:nvPr>
+        </p:nvSpPr>
+        <p:spPr/>
+        <p:txBody>
+          <a:bodyPr/>
+          <a:lstStyle/>
+          <a:p>
+            <a:r>
+              <a:rPr dirty="0"/>
+              <a:t> The registry organizes schemas into</a:t>
+            </a:r>
+            <a:r>
+              <a:rPr b="1" dirty="0"/>
+              <a:t> subjects</a:t>
+            </a:r>
+            <a:r>
+              <a:rPr dirty="0"/>
+              <a:t> , each with a version history.</a:t>
+            </a:r>
+          </a:p>
+          <a:p>
+            <a:r>
+              <a:rPr dirty="0"/>
+              <a:t> Default naming: a topic</a:t>
+            </a:r>
+            <a:r>
+              <a:rPr dirty="0">
+                <a:latin typeface="Courier New"/>
+              </a:rPr>
+              <a:t> claims</a:t>
+            </a:r>
+            <a:r>
+              <a:rPr dirty="0"/>
+              <a:t> has subjects</a:t>
+            </a:r>
+            <a:r>
+              <a:rPr dirty="0">
+                <a:latin typeface="Courier New"/>
+              </a:rPr>
+              <a:t> claims-value</a:t>
+            </a:r>
+            <a:r>
+              <a:rPr dirty="0"/>
+              <a:t> (and</a:t>
+            </a:r>
+            <a:r>
+              <a:rPr dirty="0">
+                <a:latin typeface="Courier New"/>
+              </a:rPr>
+              <a:t> claims-key</a:t>
+            </a:r>
+            <a:r>
+              <a:rPr dirty="0"/>
+              <a:t> if keyed)</a:t>
+            </a:r>
+          </a:p>
+          <a:p>
+            <a:r>
+              <a:rPr dirty="0"/>
+              <a:t> Each subject holds an ordered list of</a:t>
+            </a:r>
+            <a:r>
+              <a:rPr b="1" dirty="0"/>
+              <a:t> versions</a:t>
+            </a:r>
+            <a:r>
+              <a:rPr dirty="0"/>
+              <a:t> : v1, v2, v3, …</a:t>
+            </a:r>
+          </a:p>
+          <a:p>
+            <a:r>
+              <a:rPr dirty="0"/>
+              <a:t> A</a:t>
+            </a:r>
+            <a:r>
+              <a:rPr b="1" dirty="0"/>
+              <a:t> compatibility rule</a:t>
+            </a:r>
+            <a:r>
+              <a:rPr dirty="0"/>
+              <a:t> is attached per subject and governs which new versions are allowed</a:t>
+            </a:r>
+          </a:p>
+          <a:p>
+            <a:endParaRPr lang="en-US" dirty="0"/>
+          </a:p>
+          <a:p>
+            <a:endParaRPr lang="en-US" dirty="0"/>
+          </a:p>
+          <a:p>
+            <a:endParaRPr lang="en-US" dirty="0"/>
+          </a:p>
+          <a:p>
+            <a:endParaRPr dirty="0"/>
+          </a:p>
+          <a:p>
+            <a:endParaRPr dirty="0"/>
+          </a:p>
+          <a:p>
+            <a:r>
+              <a:rPr dirty="0"/>
+              <a:t> The registry</a:t>
+            </a:r>
+            <a:r>
+              <a:rPr b="1" dirty="0"/>
+              <a:t> rejects</a:t>
+            </a:r>
+            <a:r>
+              <a:rPr dirty="0"/>
+              <a:t> a new version that violates the subject's compatibility rule — that's the enforcement that keeps producers and consumers from breaking each other.</a:t>
             </a:r>
           </a:p>
         </p:txBody>
@@ -4425,205 +4891,8 @@
         </p:blipFill>
         <p:spPr>
           <a:xfrm>
-            <a:off x="0" y="1353312"/>
-            <a:ext cx="8915400" cy="1675646"/>
-          </a:xfrm>
-          <a:prstGeom prst="rect">
-            <a:avLst/>
-          </a:prstGeom>
-        </p:spPr>
-      </p:pic>
-    </p:spTree>
-  </p:cSld>
-  <p:clrMapOvr>
-    <a:masterClrMapping/>
-  </p:clrMapOvr>
-</p:sld>
-</file>
-
-<file path=ppt/slides/slide7.xml><?xml version="1.0" encoding="utf-8"?>
-<p:sld xmlns:a="http://schemas.openxmlformats.org/drawingml/2006/main" xmlns:p="http://schemas.openxmlformats.org/presentationml/2006/main" xmlns:r="http://schemas.openxmlformats.org/officeDocument/2006/relationships">
-  <p:cSld>
-    <p:spTree>
-      <p:nvGrpSpPr>
-        <p:cNvPr id="1" name=""/>
-        <p:cNvGrpSpPr/>
-        <p:nvPr/>
-      </p:nvGrpSpPr>
-      <p:grpSpPr/>
-      <p:sp>
-        <p:nvSpPr>
-          <p:cNvPr id="2" name="Title 1"/>
-          <p:cNvSpPr>
-            <a:spLocks noGrp="1"/>
-          </p:cNvSpPr>
-          <p:nvPr>
-            <p:ph type="title"/>
-          </p:nvPr>
-        </p:nvSpPr>
-        <p:spPr/>
-        <p:txBody>
-          <a:bodyPr/>
-          <a:lstStyle/>
-          <a:p>
-            <a:r>
-              <a:t>Subjects and Versions</a:t>
-            </a:r>
-          </a:p>
-        </p:txBody>
-      </p:sp>
-      <p:sp>
-        <p:nvSpPr>
-          <p:cNvPr id="3" name="Content Placeholder 2"/>
-          <p:cNvSpPr>
-            <a:spLocks noGrp="1"/>
-          </p:cNvSpPr>
-          <p:nvPr>
-            <p:ph idx="1"/>
-          </p:nvPr>
-        </p:nvSpPr>
-        <p:spPr/>
-        <p:txBody>
-          <a:bodyPr/>
-          <a:lstStyle/>
-          <a:p>
-            <a:r>
-              <a:t> The registry organizes schemas into</a:t>
-            </a:r>
-            <a:r>
-              <a:rPr b="1"/>
-              <a:t> subjects</a:t>
-            </a:r>
-            <a:r>
-              <a:t> , each with a version history.</a:t>
-            </a:r>
-          </a:p>
-          <a:p>
-            <a:r>
-              <a:t> Default naming: a topic</a:t>
-            </a:r>
-            <a:r>
-              <a:rPr>
-                <a:latin typeface="Courier New"/>
-              </a:rPr>
-              <a:t> claims</a:t>
-            </a:r>
-            <a:r>
-              <a:t> has subjects</a:t>
-            </a:r>
-            <a:r>
-              <a:rPr>
-                <a:latin typeface="Courier New"/>
-              </a:rPr>
-              <a:t> claims-value</a:t>
-            </a:r>
-            <a:r>
-              <a:t> (and</a:t>
-            </a:r>
-            <a:r>
-              <a:rPr>
-                <a:latin typeface="Courier New"/>
-              </a:rPr>
-              <a:t> claims-key</a:t>
-            </a:r>
-            <a:r>
-              <a:t> if keyed)</a:t>
-            </a:r>
-          </a:p>
-          <a:p>
-            <a:r>
-              <a:t> Each subject holds an ordered list of</a:t>
-            </a:r>
-            <a:r>
-              <a:rPr b="1"/>
-              <a:t> versions</a:t>
-            </a:r>
-            <a:r>
-              <a:t> : v1, v2, v3, …</a:t>
-            </a:r>
-          </a:p>
-          <a:p>
-            <a:r>
-              <a:t> A</a:t>
-            </a:r>
-            <a:r>
-              <a:rPr b="1"/>
-              <a:t> compatibility rule</a:t>
-            </a:r>
-            <a:r>
-              <a:t> is attached per subject and governs which new versions are allowed</a:t>
-            </a:r>
-          </a:p>
-          <a:p/>
-          <a:p/>
-          <a:p>
-            <a:r>
-              <a:t> The registry</a:t>
-            </a:r>
-            <a:r>
-              <a:rPr b="1"/>
-              <a:t> rejects</a:t>
-            </a:r>
-            <a:r>
-              <a:t> a new version that violates the subject's compatibility rule — that's</a:t>
-            </a:r>
-            <a:r>
-              <a:t> the enforcement that keeps producers and consumers from breaking each other.</a:t>
-            </a:r>
-          </a:p>
-        </p:txBody>
-      </p:sp>
-      <p:sp>
-        <p:nvSpPr>
-          <p:cNvPr id="4" name="TextBox 3"/>
-          <p:cNvSpPr txBox="1"/>
-          <p:nvPr/>
-        </p:nvSpPr>
-        <p:spPr>
-          <a:xfrm>
-            <a:off x="704088" y="8065008"/>
-            <a:ext cx="8915400" cy="228600"/>
-          </a:xfrm>
-          <a:prstGeom prst="rect">
-            <a:avLst/>
-          </a:prstGeom>
-          <a:noFill/>
-        </p:spPr>
-        <p:txBody>
-          <a:bodyPr wrap="none">
-            <a:spAutoFit/>
-          </a:bodyPr>
-          <a:lstStyle/>
-          <a:p>
-            <a:r>
-              <a:rPr sz="800">
-                <a:solidFill>
-                  <a:srgbClr val="000000"/>
-                </a:solidFill>
-              </a:rPr>
-              <a:t>Copyright © 2026 by Elephant Scale, All Rights Reserved</a:t>
-            </a:r>
-          </a:p>
-        </p:txBody>
-      </p:sp>
-      <p:pic>
-        <p:nvPicPr>
-          <p:cNvPr id="5" name="Picture 4" descr="1.png"/>
-          <p:cNvPicPr>
-            <a:picLocks noChangeAspect="1"/>
-          </p:cNvPicPr>
-          <p:nvPr/>
-        </p:nvPicPr>
-        <p:blipFill>
-          <a:blip r:embed="rId2"/>
-          <a:stretch>
-            <a:fillRect/>
-          </a:stretch>
-        </p:blipFill>
-        <p:spPr>
-          <a:xfrm>
-            <a:off x="0" y="3108960"/>
-            <a:ext cx="11684000" cy="1320800"/>
+            <a:off x="0" y="4358625"/>
+            <a:ext cx="9372600" cy="1059511"/>
           </a:xfrm>
           <a:prstGeom prst="rect">
             <a:avLst/>
@@ -4639,7 +4908,7 @@
 </file>
 
 <file path=ppt/slides/slide8.xml><?xml version="1.0" encoding="utf-8"?>
-<p:sld xmlns:a="http://schemas.openxmlformats.org/drawingml/2006/main" xmlns:p="http://schemas.openxmlformats.org/presentationml/2006/main" xmlns:r="http://schemas.openxmlformats.org/officeDocument/2006/relationships">
+<p:sld xmlns:a="http://schemas.openxmlformats.org/drawingml/2006/main" xmlns:r="http://schemas.openxmlformats.org/officeDocument/2006/relationships" xmlns:p="http://schemas.openxmlformats.org/presentationml/2006/main">
   <p:cSld>
     <p:spTree>
       <p:nvGrpSpPr>
@@ -4647,7 +4916,14 @@
         <p:cNvGrpSpPr/>
         <p:nvPr/>
       </p:nvGrpSpPr>
-      <p:grpSpPr/>
+      <p:grpSpPr>
+        <a:xfrm>
+          <a:off x="0" y="0"/>
+          <a:ext cx="0" cy="0"/>
+          <a:chOff x="0" y="0"/>
+          <a:chExt cx="0" cy="0"/>
+        </a:xfrm>
+      </p:grpSpPr>
       <p:sp>
         <p:nvSpPr>
           <p:cNvPr id="2" name="Title 1"/>
@@ -4685,10 +4961,7 @@
           <a:lstStyle/>
           <a:p>
             <a:r>
-              <a:t> Systems change independently. A producer adds a field; a consumer hasn't been updated yet — or</a:t>
-            </a:r>
-            <a:r>
-              <a:t> vice versa.</a:t>
+              <a:t> Systems change independently. A producer adds a field; a consumer hasn't been updated yet — or vice versa.</a:t>
             </a:r>
             <a:r>
               <a:rPr b="1"/>
@@ -4737,10 +5010,7 @@
               <a:t> old and new versions at once</a:t>
             </a:r>
             <a:r>
-              <a:t> — a</a:t>
-            </a:r>
-            <a:r>
-              <a:t> consumer replaying history will meet both. So evolution isn't optional; it's the normal state.</a:t>
+              <a:t> — a consumer replaying history will meet both. So evolution isn't optional; it's the normal state.</a:t>
             </a:r>
           </a:p>
         </p:txBody>
@@ -4787,7 +5057,7 @@
 </file>
 
 <file path=ppt/slides/slide9.xml><?xml version="1.0" encoding="utf-8"?>
-<p:sld xmlns:a="http://schemas.openxmlformats.org/drawingml/2006/main" xmlns:p="http://schemas.openxmlformats.org/presentationml/2006/main" xmlns:r="http://schemas.openxmlformats.org/officeDocument/2006/relationships">
+<p:sld xmlns:a="http://schemas.openxmlformats.org/drawingml/2006/main" xmlns:r="http://schemas.openxmlformats.org/officeDocument/2006/relationships" xmlns:p="http://schemas.openxmlformats.org/presentationml/2006/main">
   <p:cSld>
     <p:spTree>
       <p:nvGrpSpPr>
@@ -4795,7 +5065,14 @@
         <p:cNvGrpSpPr/>
         <p:nvPr/>
       </p:nvGrpSpPr>
-      <p:grpSpPr/>
+      <p:grpSpPr>
+        <a:xfrm>
+          <a:off x="0" y="0"/>
+          <a:ext cx="0" cy="0"/>
+          <a:chOff x="0" y="0"/>
+          <a:chExt cx="0" cy="0"/>
+        </a:xfrm>
+      </p:grpSpPr>
       <p:sp>
         <p:nvSpPr>
           <p:cNvPr id="2" name="Title 1"/>
@@ -4833,39 +5110,62 @@
           <a:lstStyle/>
           <a:p>
             <a:r>
+              <a:rPr dirty="0"/>
               <a:t> The subject's mode defines what changes are allowed and who can upgrade first.</a:t>
             </a:r>
-          </a:p>
-          <a:p/>
-          <a:p/>
-          <a:p/>
-          <a:p/>
-          <a:p/>
-          <a:p/>
-          <a:p>
-            <a:r>
-              <a:rPr b="1"/>
+            <a:endParaRPr lang="en-US" dirty="0"/>
+          </a:p>
+          <a:p>
+            <a:endParaRPr lang="en-US" dirty="0"/>
+          </a:p>
+          <a:p>
+            <a:endParaRPr dirty="0"/>
+          </a:p>
+          <a:p>
+            <a:endParaRPr dirty="0"/>
+          </a:p>
+          <a:p>
+            <a:endParaRPr dirty="0"/>
+          </a:p>
+          <a:p>
+            <a:endParaRPr dirty="0"/>
+          </a:p>
+          <a:p>
+            <a:endParaRPr dirty="0"/>
+          </a:p>
+          <a:p>
+            <a:endParaRPr dirty="0"/>
+          </a:p>
+          <a:p>
+            <a:endParaRPr dirty="0"/>
+          </a:p>
+          <a:p>
+            <a:r>
+              <a:rPr b="1" dirty="0"/>
               <a:t> BACKWARD</a:t>
             </a:r>
             <a:r>
+              <a:rPr dirty="0"/>
               <a:t> is the default and most common: upgrade consumers, they still read the old log</a:t>
             </a:r>
           </a:p>
           <a:p>
             <a:r>
-              <a:rPr b="1"/>
+              <a:rPr b="1" dirty="0"/>
               <a:t> FORWARD</a:t>
             </a:r>
             <a:r>
+              <a:rPr dirty="0"/>
               <a:t> when producers must move first and old consumers must tolerate new data</a:t>
             </a:r>
           </a:p>
           <a:p>
             <a:r>
-              <a:rPr b="1"/>
+              <a:rPr b="1" dirty="0"/>
               <a:t> FULL</a:t>
             </a:r>
             <a:r>
+              <a:rPr dirty="0"/>
               <a:t> for the strictest cross-team contracts</a:t>
             </a:r>
           </a:p>
@@ -4910,11 +5210,17 @@
           <p:cNvGraphicFramePr>
             <a:graphicFrameLocks noGrp="1"/>
           </p:cNvGraphicFramePr>
-          <p:nvPr/>
+          <p:nvPr>
+            <p:extLst>
+              <p:ext uri="{D42A27DB-BD31-4B8C-83A1-F6EECF244321}">
+                <p14:modId xmlns:p14="http://schemas.microsoft.com/office/powerpoint/2010/main" val="515643704"/>
+              </p:ext>
+            </p:extLst>
+          </p:nvPr>
         </p:nvGraphicFramePr>
         <p:xfrm>
-          <a:off x="237744" y="1792224"/>
-          <a:ext cx="8915400" cy="2286000"/>
+          <a:off x="237744" y="2132584"/>
+          <a:ext cx="8915400" cy="2926080"/>
         </p:xfrm>
         <a:graphic>
           <a:graphicData uri="http://schemas.openxmlformats.org/drawingml/2006/table">
@@ -4923,12 +5229,36 @@
                 <a:tableStyleId>{5C22544A-7EE6-4342-B048-85BDC9FD1C3A}</a:tableStyleId>
               </a:tblPr>
               <a:tblGrid>
-                <a:gridCol w="2228850"/>
-                <a:gridCol w="2228850"/>
-                <a:gridCol w="2228850"/>
-                <a:gridCol w="2228850"/>
+                <a:gridCol w="2228850">
+                  <a:extLst>
+                    <a:ext uri="{9D8B030D-6E8A-4147-A177-3AD203B41FA5}">
+                      <a16:colId xmlns:a16="http://schemas.microsoft.com/office/drawing/2014/main" val="20000"/>
+                    </a:ext>
+                  </a:extLst>
+                </a:gridCol>
+                <a:gridCol w="2228850">
+                  <a:extLst>
+                    <a:ext uri="{9D8B030D-6E8A-4147-A177-3AD203B41FA5}">
+                      <a16:colId xmlns:a16="http://schemas.microsoft.com/office/drawing/2014/main" val="20001"/>
+                    </a:ext>
+                  </a:extLst>
+                </a:gridCol>
+                <a:gridCol w="2228850">
+                  <a:extLst>
+                    <a:ext uri="{9D8B030D-6E8A-4147-A177-3AD203B41FA5}">
+                      <a16:colId xmlns:a16="http://schemas.microsoft.com/office/drawing/2014/main" val="20002"/>
+                    </a:ext>
+                  </a:extLst>
+                </a:gridCol>
+                <a:gridCol w="2228850">
+                  <a:extLst>
+                    <a:ext uri="{9D8B030D-6E8A-4147-A177-3AD203B41FA5}">
+                      <a16:colId xmlns:a16="http://schemas.microsoft.com/office/drawing/2014/main" val="20003"/>
+                    </a:ext>
+                  </a:extLst>
+                </a:gridCol>
               </a:tblGrid>
-              <a:tr h="457200">
+              <a:tr h="0">
                 <a:tc>
                   <a:txBody>
                     <a:bodyPr/>
@@ -4977,6 +5307,11 @@
                   </a:txBody>
                   <a:tcPr/>
                 </a:tc>
+                <a:extLst>
+                  <a:ext uri="{0D108BD9-81ED-4DB2-BD59-A6C34878D82A}">
+                    <a16:rowId xmlns:a16="http://schemas.microsoft.com/office/drawing/2014/main" val="10000"/>
+                  </a:ext>
+                </a:extLst>
               </a:tr>
               <a:tr h="457200">
                 <a:tc>
@@ -4984,9 +5319,6 @@
                     <a:bodyPr/>
                     <a:lstStyle/>
                     <a:p>
-                      <a:r>
-                        <a:t/>
-                      </a:r>
                       <a:r>
                         <a:rPr b="1"/>
                         <a:t>BACKWARD</a:t>
@@ -5016,9 +5348,6 @@
                     <a:lstStyle/>
                     <a:p>
                       <a:r>
-                        <a:t/>
-                      </a:r>
-                      <a:r>
                         <a:rPr b="1"/>
                         <a:t>delete</a:t>
                       </a:r>
@@ -5028,9 +5357,6 @@
                       <a:r>
                         <a:rPr b="1"/>
                         <a:t>add optional</a:t>
-                      </a:r>
-                      <a:r>
-                        <a:t/>
                       </a:r>
                     </a:p>
                   </a:txBody>
@@ -5042,19 +5368,18 @@
                     <a:lstStyle/>
                     <a:p>
                       <a:r>
-                        <a:t/>
-                      </a:r>
-                      <a:r>
                         <a:rPr b="1"/>
                         <a:t>consumers</a:t>
-                      </a:r>
-                      <a:r>
-                        <a:t/>
                       </a:r>
                     </a:p>
                   </a:txBody>
                   <a:tcPr/>
                 </a:tc>
+                <a:extLst>
+                  <a:ext uri="{0D108BD9-81ED-4DB2-BD59-A6C34878D82A}">
+                    <a16:rowId xmlns:a16="http://schemas.microsoft.com/office/drawing/2014/main" val="10001"/>
+                  </a:ext>
+                </a:extLst>
               </a:tr>
               <a:tr h="457200">
                 <a:tc>
@@ -5063,14 +5388,8 @@
                     <a:lstStyle/>
                     <a:p>
                       <a:r>
-                        <a:t/>
-                      </a:r>
-                      <a:r>
                         <a:rPr b="1"/>
                         <a:t>FORWARD</a:t>
-                      </a:r>
-                      <a:r>
-                        <a:t/>
                       </a:r>
                     </a:p>
                   </a:txBody>
@@ -5094,9 +5413,6 @@
                     <a:lstStyle/>
                     <a:p>
                       <a:r>
-                        <a:t/>
-                      </a:r>
-                      <a:r>
                         <a:rPr b="1"/>
                         <a:t>add</a:t>
                       </a:r>
@@ -5106,9 +5422,6 @@
                       <a:r>
                         <a:rPr b="1"/>
                         <a:t>delete optional</a:t>
-                      </a:r>
-                      <a:r>
-                        <a:t/>
                       </a:r>
                     </a:p>
                   </a:txBody>
@@ -5120,19 +5433,18 @@
                     <a:lstStyle/>
                     <a:p>
                       <a:r>
-                        <a:t/>
-                      </a:r>
-                      <a:r>
                         <a:rPr b="1"/>
                         <a:t>producers</a:t>
-                      </a:r>
-                      <a:r>
-                        <a:t/>
                       </a:r>
                     </a:p>
                   </a:txBody>
                   <a:tcPr/>
                 </a:tc>
+                <a:extLst>
+                  <a:ext uri="{0D108BD9-81ED-4DB2-BD59-A6C34878D82A}">
+                    <a16:rowId xmlns:a16="http://schemas.microsoft.com/office/drawing/2014/main" val="10002"/>
+                  </a:ext>
+                </a:extLst>
               </a:tr>
               <a:tr h="457200">
                 <a:tc>
@@ -5141,14 +5453,8 @@
                     <a:lstStyle/>
                     <a:p>
                       <a:r>
-                        <a:t/>
-                      </a:r>
-                      <a:r>
                         <a:rPr b="1"/>
                         <a:t>FULL</a:t>
-                      </a:r>
-                      <a:r>
-                        <a:t/>
                       </a:r>
                     </a:p>
                   </a:txBody>
@@ -5197,6 +5503,11 @@
                   </a:txBody>
                   <a:tcPr/>
                 </a:tc>
+                <a:extLst>
+                  <a:ext uri="{0D108BD9-81ED-4DB2-BD59-A6C34878D82A}">
+                    <a16:rowId xmlns:a16="http://schemas.microsoft.com/office/drawing/2014/main" val="10003"/>
+                  </a:ext>
+                </a:extLst>
               </a:tr>
               <a:tr h="457200">
                 <a:tc>
@@ -5205,14 +5516,8 @@
                     <a:lstStyle/>
                     <a:p>
                       <a:r>
-                        <a:t/>
-                      </a:r>
-                      <a:r>
                         <a:rPr b="1"/>
                         <a:t>NONE</a:t>
-                      </a:r>
-                      <a:r>
-                        <a:t/>
                       </a:r>
                     </a:p>
                   </a:txBody>
@@ -5248,12 +5553,18 @@
                     <a:lstStyle/>
                     <a:p>
                       <a:r>
+                        <a:rPr dirty="0"/>
                         <a:t>—</a:t>
                       </a:r>
                     </a:p>
                   </a:txBody>
                   <a:tcPr/>
                 </a:tc>
+                <a:extLst>
+                  <a:ext uri="{0D108BD9-81ED-4DB2-BD59-A6C34878D82A}">
+                    <a16:rowId xmlns:a16="http://schemas.microsoft.com/office/drawing/2014/main" val="10004"/>
+                  </a:ext>
+                </a:extLst>
               </a:tr>
             </a:tbl>
           </a:graphicData>

--- a/slides/release/08__inter-4-schema-registry.pptx
+++ b/slides/release/08__inter-4-schema-registry.pptx
@@ -5,10 +5,10 @@
     <p:sldMasterId id="2147483651" r:id="rId1"/>
   </p:sldMasterIdLst>
   <p:notesMasterIdLst>
-    <p:notesMasterId r:id="rId15"/>
+    <p:notesMasterId r:id="rId16"/>
   </p:notesMasterIdLst>
   <p:handoutMasterIdLst>
-    <p:handoutMasterId r:id="rId16"/>
+    <p:handoutMasterId r:id="rId17"/>
   </p:handoutMasterIdLst>
   <p:sldIdLst>
     <p:sldId id="256" r:id="rId2"/>
@@ -24,6 +24,7 @@
     <p:sldId id="266" r:id="rId12"/>
     <p:sldId id="267" r:id="rId13"/>
     <p:sldId id="268" r:id="rId14"/>
+    <p:sldId id="269" r:id="rId15"/>
   </p:sldIdLst>
   <p:sldSz cx="9372600" cy="8297863"/>
   <p:notesSz cx="7315200" cy="9601200"/>
@@ -887,7 +888,7 @@
           <a:lstStyle/>
           <a:p>
             <a:r>
-              <a:t> The magic is that "schema management" becomes two config lines plus a serde. Students should see it's not extra plumbing they maintain.</a:t>
+              <a:t> 2-3 min, and only if it comes up — but it comes up most deliveries, usually right here when students notice the image is confluentinc/ rather than apache/. The honest answer to "do I need Confluent?": not for Kafka itself, but the moment you want a schema registry or off-the-shelf connectors you are usually reaching into their ecosystem. Open alternatives exist — Karapace and Apicurio for the registry, Debezium for CDC. If asked about Redpanda: it is a Kafka-PROTOCOL-compatible broker (C++, no JVM, no ZooKeeper), not Apache Kafka at all, but clients cannot tell the difference.</a:t>
             </a:r>
           </a:p>
         </p:txBody>
@@ -957,7 +958,7 @@
           <a:lstStyle/>
           <a:p>
             <a:r>
-              <a:t> Callback to Intro 2 retention: the log holds mixed versions. This is exactly the SSA "when do we upgrade" question — it's really "which compatibility mode."</a:t>
+              <a:t> The magic is that "schema management" becomes two config lines plus a serde. Students should see it's not extra plumbing they maintain.</a:t>
             </a:r>
           </a:p>
         </p:txBody>
@@ -1027,7 +1028,7 @@
           <a:lstStyle/>
           <a:p>
             <a:r>
-              <a:t> The "who upgrades first" column is the practical takeaway. Match the mode to your rollout order — this directly answers their upgrade-timing concern.</a:t>
+              <a:t> Callback to Intro 2 retention: the log holds mixed versions. This is exactly the SSA "when do we upgrade" question — it's really "which compatibility mode."</a:t>
             </a:r>
           </a:p>
         </p:txBody>
@@ -1041,6 +1042,76 @@
 </file>
 
 <file path=ppt/notesSlides/notesSlide5.xml><?xml version="1.0" encoding="utf-8"?>
+<p:notes xmlns:a="http://schemas.openxmlformats.org/drawingml/2006/main" xmlns:r="http://schemas.openxmlformats.org/officeDocument/2006/relationships" xmlns:p="http://schemas.openxmlformats.org/presentationml/2006/main">
+  <p:cSld>
+    <p:spTree>
+      <p:nvGrpSpPr>
+        <p:cNvPr id="1" name=""/>
+        <p:cNvGrpSpPr/>
+        <p:nvPr/>
+      </p:nvGrpSpPr>
+      <p:grpSpPr>
+        <a:xfrm>
+          <a:off x="0" y="0"/>
+          <a:ext cx="0" cy="0"/>
+          <a:chOff x="0" y="0"/>
+          <a:chExt cx="0" cy="0"/>
+        </a:xfrm>
+      </p:grpSpPr>
+      <p:sp>
+        <p:nvSpPr>
+          <p:cNvPr id="2" name="Slide Image Placeholder 1"/>
+          <p:cNvSpPr>
+            <a:spLocks noGrp="1" noRot="1" noChangeAspect="1"/>
+          </p:cNvSpPr>
+          <p:nvPr>
+            <p:ph type="sldImg" idx="2"/>
+          </p:nvPr>
+        </p:nvSpPr>
+        <p:spPr/>
+      </p:sp>
+      <p:sp>
+        <p:nvSpPr>
+          <p:cNvPr id="3" name="Slide Number Placeholder 2"/>
+          <p:cNvSpPr>
+            <a:spLocks noGrp="1"/>
+          </p:cNvSpPr>
+          <p:nvPr>
+            <p:ph type="sldNum" sz="quarter" idx="5"/>
+          </p:nvPr>
+        </p:nvSpPr>
+        <p:spPr/>
+      </p:sp>
+      <p:sp>
+        <p:nvSpPr>
+          <p:cNvPr id="4" name="Notes Placeholder 3"/>
+          <p:cNvSpPr>
+            <a:spLocks noGrp="1"/>
+          </p:cNvSpPr>
+          <p:nvPr>
+            <p:ph type="body" sz="quarter" idx="3"/>
+          </p:nvPr>
+        </p:nvSpPr>
+        <p:spPr/>
+        <p:txBody>
+          <a:bodyPr/>
+          <a:lstStyle/>
+          <a:p>
+            <a:r>
+              <a:t> The "who upgrades first" column is the practical takeaway. Match the mode to your rollout order — this directly answers their upgrade-timing concern.</a:t>
+            </a:r>
+          </a:p>
+        </p:txBody>
+      </p:sp>
+    </p:spTree>
+  </p:cSld>
+  <p:clrMapOvr>
+    <a:masterClrMapping/>
+  </p:clrMapOvr>
+</p:notes>
+</file>
+
+<file path=ppt/notesSlides/notesSlide6.xml><?xml version="1.0" encoding="utf-8"?>
 <p:notes xmlns:a="http://schemas.openxmlformats.org/drawingml/2006/main" xmlns:r="http://schemas.openxmlformats.org/officeDocument/2006/relationships" xmlns:p="http://schemas.openxmlformats.org/presentationml/2006/main">
   <p:cSld>
     <p:spTree>
@@ -2759,7 +2830,7 @@
           <a:lstStyle/>
           <a:p>
             <a:r>
-              <a:t>The Golden Rule: Add With Defaults</a:t>
+              <a:t>Compatibility Modes</a:t>
             </a:r>
           </a:p>
         </p:txBody>
@@ -2781,102 +2852,65 @@
           <a:p>
             <a:r>
               <a:rPr dirty="0"/>
-              <a:t> The one habit that keeps evolution safe under BACKWARD/FULL:</a:t>
-            </a:r>
+              <a:t> The subject's mode defines what changes are allowed and who can upgrade first.</a:t>
+            </a:r>
+            <a:endParaRPr lang="en-US" dirty="0"/>
+          </a:p>
+          <a:p>
+            <a:endParaRPr lang="en-US" dirty="0"/>
+          </a:p>
+          <a:p>
+            <a:endParaRPr lang="en-US" dirty="0"/>
+          </a:p>
+          <a:p>
+            <a:endParaRPr dirty="0"/>
+          </a:p>
+          <a:p>
+            <a:endParaRPr dirty="0"/>
+          </a:p>
+          <a:p>
+            <a:endParaRPr dirty="0"/>
+          </a:p>
+          <a:p>
+            <a:endParaRPr dirty="0"/>
+          </a:p>
+          <a:p>
+            <a:endParaRPr dirty="0"/>
+          </a:p>
+          <a:p>
+            <a:endParaRPr dirty="0"/>
+          </a:p>
+          <a:p>
+            <a:endParaRPr dirty="0"/>
           </a:p>
           <a:p>
             <a:r>
               <a:rPr b="1" dirty="0"/>
-              <a:t> Adding a field?</a:t>
+              <a:t> BACKWARD</a:t>
             </a:r>
             <a:r>
               <a:rPr dirty="0"/>
-              <a:t> Give it a</a:t>
-            </a:r>
+              <a:t> is the default and most common: upgrade consumers, they still read the old log</a:t>
+            </a:r>
+          </a:p>
+          <a:p>
             <a:r>
               <a:rPr b="1" dirty="0"/>
-              <a:t> default value</a:t>
+              <a:t> FORWARD</a:t>
             </a:r>
             <a:r>
               <a:rPr dirty="0"/>
-              <a:t> → old data (missing the field) still deserializes</a:t>
+              <a:t> when producers must move first and old consumers must tolerate new data</a:t>
             </a:r>
           </a:p>
           <a:p>
             <a:r>
               <a:rPr b="1" dirty="0"/>
-              <a:t> Removing a field?</a:t>
+              <a:t> FULL</a:t>
             </a:r>
             <a:r>
               <a:rPr dirty="0"/>
-              <a:t> Only safe if it</a:t>
-            </a:r>
-            <a:r>
-              <a:rPr b="1" dirty="0"/>
-              <a:t> had a default</a:t>
-            </a:r>
-            <a:r>
-              <a:rPr dirty="0"/>
-              <a:t> → consumers expecting it fall back</a:t>
-            </a:r>
-          </a:p>
-          <a:p>
-            <a:r>
-              <a:rPr b="1" dirty="0"/>
-              <a:t> Renaming / changing a type?</a:t>
-            </a:r>
-            <a:r>
-              <a:rPr dirty="0"/>
-              <a:t> Usually</a:t>
-            </a:r>
-            <a:r>
-              <a:rPr b="1" dirty="0"/>
-              <a:t> breaking</a:t>
-            </a:r>
-            <a:r>
-              <a:rPr dirty="0"/>
-              <a:t> — use aliases or a new field instead</a:t>
-            </a:r>
-          </a:p>
-          <a:p>
-            <a:endParaRPr lang="en-US" dirty="0"/>
-          </a:p>
-          <a:p>
-            <a:endParaRPr lang="en-US" dirty="0"/>
-          </a:p>
-          <a:p>
-            <a:endParaRPr dirty="0"/>
-          </a:p>
-          <a:p>
-            <a:r>
-              <a:rPr dirty="0"/>
-              <a:t> A new consumer reading an old record with no</a:t>
-            </a:r>
-            <a:r>
-              <a:rPr dirty="0">
-                <a:latin typeface="Courier New"/>
-              </a:rPr>
-              <a:t> region</a:t>
-            </a:r>
-            <a:r>
-              <a:rPr dirty="0"/>
-              <a:t> gets</a:t>
-            </a:r>
-            <a:r>
-              <a:rPr dirty="0">
-                <a:latin typeface="Courier New"/>
-              </a:rPr>
-              <a:t> "UNKNOWN"</a:t>
-            </a:r>
-            <a:r>
-              <a:rPr dirty="0"/>
-              <a:t> — no crash</a:t>
-            </a:r>
-          </a:p>
-          <a:p>
-            <a:r>
-              <a:rPr dirty="0"/>
-              <a:t> This single discipline (defaults on new fields) covers the majority of real evolutions</a:t>
+              <a:t> for the strictest cross-team contracts</a:t>
             </a:r>
           </a:p>
         </p:txBody>
@@ -2914,1063 +2948,6 @@
           </a:p>
         </p:txBody>
       </p:sp>
-      <p:pic>
-        <p:nvPicPr>
-          <p:cNvPr id="5" name="Picture 4" descr="1.png"/>
-          <p:cNvPicPr>
-            <a:picLocks noChangeAspect="1"/>
-          </p:cNvPicPr>
-          <p:nvPr/>
-        </p:nvPicPr>
-        <p:blipFill>
-          <a:blip r:embed="rId2"/>
-          <a:stretch>
-            <a:fillRect/>
-          </a:stretch>
-        </p:blipFill>
-        <p:spPr>
-          <a:xfrm>
-            <a:off x="0" y="4529931"/>
-            <a:ext cx="9372600" cy="520700"/>
-          </a:xfrm>
-          <a:prstGeom prst="rect">
-            <a:avLst/>
-          </a:prstGeom>
-        </p:spPr>
-      </p:pic>
-    </p:spTree>
-  </p:cSld>
-  <p:clrMapOvr>
-    <a:masterClrMapping/>
-  </p:clrMapOvr>
-</p:sld>
-</file>
-
-<file path=ppt/slides/slide11.xml><?xml version="1.0" encoding="utf-8"?>
-<p:sld xmlns:a="http://schemas.openxmlformats.org/drawingml/2006/main" xmlns:r="http://schemas.openxmlformats.org/officeDocument/2006/relationships" xmlns:p="http://schemas.openxmlformats.org/presentationml/2006/main">
-  <p:cSld>
-    <p:spTree>
-      <p:nvGrpSpPr>
-        <p:cNvPr id="1" name=""/>
-        <p:cNvGrpSpPr/>
-        <p:nvPr/>
-      </p:nvGrpSpPr>
-      <p:grpSpPr>
-        <a:xfrm>
-          <a:off x="0" y="0"/>
-          <a:ext cx="0" cy="0"/>
-          <a:chOff x="0" y="0"/>
-          <a:chExt cx="0" cy="0"/>
-        </a:xfrm>
-      </p:grpSpPr>
-      <p:sp>
-        <p:nvSpPr>
-          <p:cNvPr id="2" name="Title 1"/>
-          <p:cNvSpPr>
-            <a:spLocks noGrp="1"/>
-          </p:cNvSpPr>
-          <p:nvPr>
-            <p:ph type="title"/>
-          </p:nvPr>
-        </p:nvSpPr>
-        <p:spPr/>
-        <p:txBody>
-          <a:bodyPr/>
-          <a:lstStyle/>
-          <a:p>
-            <a:r>
-              <a:t>Data Contracts as Governance</a:t>
-            </a:r>
-          </a:p>
-        </p:txBody>
-      </p:sp>
-      <p:sp>
-        <p:nvSpPr>
-          <p:cNvPr id="3" name="Content Placeholder 2"/>
-          <p:cNvSpPr>
-            <a:spLocks noGrp="1"/>
-          </p:cNvSpPr>
-          <p:nvPr>
-            <p:ph idx="1"/>
-          </p:nvPr>
-        </p:nvSpPr>
-        <p:spPr/>
-        <p:txBody>
-          <a:bodyPr/>
-          <a:lstStyle/>
-          <a:p>
-            <a:r>
-              <a:t> The Schema Registry is a</a:t>
-            </a:r>
-            <a:r>
-              <a:rPr b="1"/>
-              <a:t> governance tool</a:t>
-            </a:r>
-            <a:r>
-              <a:t> , not just a codec. For an organization with many systems sharing events, it's how teams stay coordinated</a:t>
-            </a:r>
-            <a:r>
-              <a:rPr b="1"/>
-              <a:t> without</a:t>
-            </a:r>
-            <a:r>
-              <a:t> a change-control meeting.</a:t>
-            </a:r>
-          </a:p>
-          <a:p>
-            <a:r>
-              <a:t> The schema</a:t>
-            </a:r>
-            <a:r>
-              <a:rPr b="1"/>
-              <a:t> is the contract</a:t>
-            </a:r>
-            <a:r>
-              <a:t> between producing and consuming systems</a:t>
-            </a:r>
-          </a:p>
-          <a:p>
-            <a:r>
-              <a:t> Compatibility rules let teams</a:t>
-            </a:r>
-            <a:r>
-              <a:rPr b="1"/>
-              <a:t> deploy independently</a:t>
-            </a:r>
-            <a:r>
-              <a:t> — no lock-step, coordinated-outage upgrades</a:t>
-            </a:r>
-          </a:p>
-          <a:p>
-            <a:r>
-              <a:t> Breaking changes are</a:t>
-            </a:r>
-            <a:r>
-              <a:rPr b="1"/>
-              <a:t> caught at registration</a:t>
-            </a:r>
-            <a:r>
-              <a:t> , in CI, not in production at 2 AM</a:t>
-            </a:r>
-          </a:p>
-          <a:p>
-            <a:r>
-              <a:t> New consumers can be added anytime — they read the schema and understand the topic</a:t>
-            </a:r>
-          </a:p>
-          <a:p>
-            <a:r>
-              <a:rPr b="1"/>
-              <a:t> Business value:</a:t>
-            </a:r>
-            <a:r>
-              <a:t> independent teams, safe change, no big-bang upgrade windows.</a:t>
-            </a:r>
-          </a:p>
-        </p:txBody>
-      </p:sp>
-      <p:sp>
-        <p:nvSpPr>
-          <p:cNvPr id="4" name="TextBox 3"/>
-          <p:cNvSpPr txBox="1"/>
-          <p:nvPr/>
-        </p:nvSpPr>
-        <p:spPr>
-          <a:xfrm>
-            <a:off x="704088" y="8065008"/>
-            <a:ext cx="8915400" cy="228600"/>
-          </a:xfrm>
-          <a:prstGeom prst="rect">
-            <a:avLst/>
-          </a:prstGeom>
-          <a:noFill/>
-        </p:spPr>
-        <p:txBody>
-          <a:bodyPr wrap="none">
-            <a:spAutoFit/>
-          </a:bodyPr>
-          <a:lstStyle/>
-          <a:p>
-            <a:r>
-              <a:rPr sz="800">
-                <a:solidFill>
-                  <a:srgbClr val="000000"/>
-                </a:solidFill>
-              </a:rPr>
-              <a:t>Copyright © 2026 by Elephant Scale, All Rights Reserved</a:t>
-            </a:r>
-          </a:p>
-        </p:txBody>
-      </p:sp>
-    </p:spTree>
-  </p:cSld>
-  <p:clrMapOvr>
-    <a:masterClrMapping/>
-  </p:clrMapOvr>
-</p:sld>
-</file>
-
-<file path=ppt/slides/slide12.xml><?xml version="1.0" encoding="utf-8"?>
-<p:sld xmlns:a="http://schemas.openxmlformats.org/drawingml/2006/main" xmlns:r="http://schemas.openxmlformats.org/officeDocument/2006/relationships" xmlns:p="http://schemas.openxmlformats.org/presentationml/2006/main">
-  <p:cSld>
-    <p:spTree>
-      <p:nvGrpSpPr>
-        <p:cNvPr id="1" name=""/>
-        <p:cNvGrpSpPr/>
-        <p:nvPr/>
-      </p:nvGrpSpPr>
-      <p:grpSpPr>
-        <a:xfrm>
-          <a:off x="0" y="0"/>
-          <a:ext cx="0" cy="0"/>
-          <a:chOff x="0" y="0"/>
-          <a:chExt cx="0" cy="0"/>
-        </a:xfrm>
-      </p:grpSpPr>
-      <p:sp>
-        <p:nvSpPr>
-          <p:cNvPr id="2" name="Title 1"/>
-          <p:cNvSpPr>
-            <a:spLocks noGrp="1"/>
-          </p:cNvSpPr>
-          <p:nvPr>
-            <p:ph type="title"/>
-          </p:nvPr>
-        </p:nvSpPr>
-        <p:spPr/>
-        <p:txBody>
-          <a:bodyPr/>
-          <a:lstStyle/>
-          <a:p>
-            <a:r>
-              <a:t>Lab 05 — What You'll Do (Java)</a:t>
-            </a:r>
-          </a:p>
-        </p:txBody>
-      </p:sp>
-      <p:sp>
-        <p:nvSpPr>
-          <p:cNvPr id="3" name="Content Placeholder 2"/>
-          <p:cNvSpPr>
-            <a:spLocks noGrp="1"/>
-          </p:cNvSpPr>
-          <p:nvPr>
-            <p:ph idx="1"/>
-          </p:nvPr>
-        </p:nvSpPr>
-        <p:spPr/>
-        <p:txBody>
-          <a:bodyPr/>
-          <a:lstStyle/>
-          <a:p>
-            <a:r>
-              <a:t> Define an</a:t>
-            </a:r>
-            <a:r>
-              <a:rPr b="1"/>
-              <a:t> Avro schema</a:t>
-            </a:r>
-            <a:r>
-              <a:t> and produce records with</a:t>
-            </a:r>
-            <a:r>
-              <a:rPr>
-                <a:latin typeface="Courier New"/>
-              </a:rPr>
-              <a:t> KafkaAvroSerializer</a:t>
-            </a:r>
-          </a:p>
-          <a:p>
-            <a:r>
-              <a:t> Inspect the registered schema via the</a:t>
-            </a:r>
-            <a:r>
-              <a:rPr b="1"/>
-              <a:t> registry REST API</a:t>
-            </a:r>
-            <a:r>
-              <a:t> (</a:t>
-            </a:r>
-            <a:r>
-              <a:rPr>
-                <a:latin typeface="Courier New"/>
-              </a:rPr>
-              <a:t> :8081</a:t>
-            </a:r>
-            <a:r>
-              <a:t> )</a:t>
-            </a:r>
-          </a:p>
-          <a:p>
-            <a:r>
-              <a:t> Consume with</a:t>
-            </a:r>
-            <a:r>
-              <a:rPr>
-                <a:latin typeface="Courier New"/>
-              </a:rPr>
-              <a:t> KafkaAvroDeserializer</a:t>
-            </a:r>
-          </a:p>
-          <a:p>
-            <a:r>
-              <a:rPr b="1"/>
-              <a:t> Evolve</a:t>
-            </a:r>
-            <a:r>
-              <a:t> the schema (add a field with a default) under</a:t>
-            </a:r>
-            <a:r>
-              <a:rPr b="1"/>
-              <a:t> BACKWARD</a:t>
-            </a:r>
-            <a:r>
-              <a:t> compatibility — prove old consumers still work</a:t>
-            </a:r>
-          </a:p>
-          <a:p>
-            <a:r>
-              <a:t> Attempt an</a:t>
-            </a:r>
-            <a:r>
-              <a:rPr b="1"/>
-              <a:t> incompatible</a:t>
-            </a:r>
-            <a:r>
-              <a:t> change and watch the registry</a:t>
-            </a:r>
-            <a:r>
-              <a:rPr b="1"/>
-              <a:t> reject</a:t>
-            </a:r>
-            <a:r>
-              <a:t> it</a:t>
-            </a:r>
-          </a:p>
-          <a:p>
-            <a:r>
-              <a:rPr i="1"/>
-              <a:t> →</a:t>
-            </a:r>
-          </a:p>
-        </p:txBody>
-      </p:sp>
-      <p:sp>
-        <p:nvSpPr>
-          <p:cNvPr id="4" name="TextBox 3"/>
-          <p:cNvSpPr txBox="1"/>
-          <p:nvPr/>
-        </p:nvSpPr>
-        <p:spPr>
-          <a:xfrm>
-            <a:off x="704088" y="8065008"/>
-            <a:ext cx="8915400" cy="228600"/>
-          </a:xfrm>
-          <a:prstGeom prst="rect">
-            <a:avLst/>
-          </a:prstGeom>
-          <a:noFill/>
-        </p:spPr>
-        <p:txBody>
-          <a:bodyPr wrap="none">
-            <a:spAutoFit/>
-          </a:bodyPr>
-          <a:lstStyle/>
-          <a:p>
-            <a:r>
-              <a:rPr sz="800">
-                <a:solidFill>
-                  <a:srgbClr val="000000"/>
-                </a:solidFill>
-              </a:rPr>
-              <a:t>Copyright © 2026 by Elephant Scale, All Rights Reserved</a:t>
-            </a:r>
-          </a:p>
-        </p:txBody>
-      </p:sp>
-    </p:spTree>
-  </p:cSld>
-  <p:clrMapOvr>
-    <a:masterClrMapping/>
-  </p:clrMapOvr>
-</p:sld>
-</file>
-
-<file path=ppt/slides/slide13.xml><?xml version="1.0" encoding="utf-8"?>
-<p:sld xmlns:a="http://schemas.openxmlformats.org/drawingml/2006/main" xmlns:r="http://schemas.openxmlformats.org/officeDocument/2006/relationships" xmlns:p="http://schemas.openxmlformats.org/presentationml/2006/main">
-  <p:cSld>
-    <p:spTree>
-      <p:nvGrpSpPr>
-        <p:cNvPr id="1" name=""/>
-        <p:cNvGrpSpPr/>
-        <p:nvPr/>
-      </p:nvGrpSpPr>
-      <p:grpSpPr>
-        <a:xfrm>
-          <a:off x="0" y="0"/>
-          <a:ext cx="0" cy="0"/>
-          <a:chOff x="0" y="0"/>
-          <a:chExt cx="0" cy="0"/>
-        </a:xfrm>
-      </p:grpSpPr>
-      <p:sp>
-        <p:nvSpPr>
-          <p:cNvPr id="2" name="Title 1"/>
-          <p:cNvSpPr>
-            <a:spLocks noGrp="1"/>
-          </p:cNvSpPr>
-          <p:nvPr>
-            <p:ph type="title"/>
-          </p:nvPr>
-        </p:nvSpPr>
-        <p:spPr/>
-        <p:txBody>
-          <a:bodyPr/>
-          <a:lstStyle/>
-          <a:p>
-            <a:r>
-              <a:t>Summary</a:t>
-            </a:r>
-          </a:p>
-        </p:txBody>
-      </p:sp>
-      <p:sp>
-        <p:nvSpPr>
-          <p:cNvPr id="3" name="Content Placeholder 2"/>
-          <p:cNvSpPr>
-            <a:spLocks noGrp="1"/>
-          </p:cNvSpPr>
-          <p:nvPr>
-            <p:ph idx="1"/>
-          </p:nvPr>
-        </p:nvSpPr>
-        <p:spPr/>
-        <p:txBody>
-          <a:bodyPr/>
-          <a:lstStyle/>
-          <a:p>
-            <a:r>
-              <a:t> Kafka moves bytes; a</a:t>
-            </a:r>
-            <a:r>
-              <a:rPr b="1"/>
-              <a:t> schema</a:t>
-            </a:r>
-            <a:r>
-              <a:t> is the enforced contract on their meaning</a:t>
-            </a:r>
-          </a:p>
-          <a:p>
-            <a:r>
-              <a:rPr b="1"/>
-              <a:t> Avro + Schema Registry</a:t>
-            </a:r>
-            <a:r>
-              <a:t> is the mainstream pattern: schemas travel</a:t>
-            </a:r>
-            <a:r>
-              <a:rPr b="1"/>
-              <a:t> by ID</a:t>
-            </a:r>
-            <a:r>
-              <a:t> , serdes do the work</a:t>
-            </a:r>
-          </a:p>
-          <a:p>
-            <a:r>
-              <a:t> Schemas live as</a:t>
-            </a:r>
-            <a:r>
-              <a:rPr b="1"/>
-              <a:t> subjects</a:t>
-            </a:r>
-            <a:r>
-              <a:t> with</a:t>
-            </a:r>
-            <a:r>
-              <a:rPr b="1"/>
-              <a:t> versions</a:t>
-            </a:r>
-            <a:r>
-              <a:t> and a</a:t>
-            </a:r>
-            <a:r>
-              <a:rPr b="1"/>
-              <a:t> compatibility rule</a:t>
-            </a:r>
-            <a:r>
-              <a:t> that the registry enforces</a:t>
-            </a:r>
-          </a:p>
-          <a:p>
-            <a:r>
-              <a:rPr b="1"/>
-              <a:t> BACKWARD / FORWARD / FULL</a:t>
-            </a:r>
-            <a:r>
-              <a:t> decide what changes are legal and</a:t>
-            </a:r>
-            <a:r>
-              <a:rPr b="1"/>
-              <a:t> who upgrades first</a:t>
-            </a:r>
-          </a:p>
-          <a:p>
-            <a:r>
-              <a:rPr b="1"/>
-              <a:t> Add fields with defaults</a:t>
-            </a:r>
-            <a:r>
-              <a:t> — the golden rule for safe evolution</a:t>
-            </a:r>
-          </a:p>
-          <a:p>
-            <a:r>
-              <a:t> The registry is</a:t>
-            </a:r>
-            <a:r>
-              <a:rPr b="1"/>
-              <a:t> governance</a:t>
-            </a:r>
-            <a:r>
-              <a:t> : independent deploys, safe change, no coordinated-outage upgrades</a:t>
-            </a:r>
-          </a:p>
-        </p:txBody>
-      </p:sp>
-      <p:sp>
-        <p:nvSpPr>
-          <p:cNvPr id="4" name="TextBox 3"/>
-          <p:cNvSpPr txBox="1"/>
-          <p:nvPr/>
-        </p:nvSpPr>
-        <p:spPr>
-          <a:xfrm>
-            <a:off x="704088" y="8065008"/>
-            <a:ext cx="8915400" cy="228600"/>
-          </a:xfrm>
-          <a:prstGeom prst="rect">
-            <a:avLst/>
-          </a:prstGeom>
-          <a:noFill/>
-        </p:spPr>
-        <p:txBody>
-          <a:bodyPr wrap="none">
-            <a:spAutoFit/>
-          </a:bodyPr>
-          <a:lstStyle/>
-          <a:p>
-            <a:r>
-              <a:rPr sz="800">
-                <a:solidFill>
-                  <a:srgbClr val="000000"/>
-                </a:solidFill>
-              </a:rPr>
-              <a:t>Copyright © 2026 by Elephant Scale, All Rights Reserved</a:t>
-            </a:r>
-          </a:p>
-        </p:txBody>
-      </p:sp>
-    </p:spTree>
-  </p:cSld>
-  <p:clrMapOvr>
-    <a:masterClrMapping/>
-  </p:clrMapOvr>
-</p:sld>
-</file>
-
-<file path=ppt/slides/slide2.xml><?xml version="1.0" encoding="utf-8"?>
-<p:sld xmlns:a="http://schemas.openxmlformats.org/drawingml/2006/main" xmlns:r="http://schemas.openxmlformats.org/officeDocument/2006/relationships" xmlns:p="http://schemas.openxmlformats.org/presentationml/2006/main">
-  <p:cSld>
-    <p:spTree>
-      <p:nvGrpSpPr>
-        <p:cNvPr id="1" name=""/>
-        <p:cNvGrpSpPr/>
-        <p:nvPr/>
-      </p:nvGrpSpPr>
-      <p:grpSpPr>
-        <a:xfrm>
-          <a:off x="0" y="0"/>
-          <a:ext cx="0" cy="0"/>
-          <a:chOff x="0" y="0"/>
-          <a:chExt cx="0" cy="0"/>
-        </a:xfrm>
-      </p:grpSpPr>
-      <p:sp>
-        <p:nvSpPr>
-          <p:cNvPr id="2" name="Title 1"/>
-          <p:cNvSpPr>
-            <a:spLocks noGrp="1"/>
-          </p:cNvSpPr>
-          <p:nvPr>
-            <p:ph type="title"/>
-          </p:nvPr>
-        </p:nvSpPr>
-        <p:spPr/>
-        <p:txBody>
-          <a:bodyPr/>
-          <a:lstStyle/>
-          <a:p>
-            <a:r>
-              <a:t>Agenda</a:t>
-            </a:r>
-          </a:p>
-        </p:txBody>
-      </p:sp>
-      <p:sp>
-        <p:nvSpPr>
-          <p:cNvPr id="3" name="Content Placeholder 2"/>
-          <p:cNvSpPr>
-            <a:spLocks noGrp="1"/>
-          </p:cNvSpPr>
-          <p:nvPr>
-            <p:ph idx="1"/>
-          </p:nvPr>
-        </p:nvSpPr>
-        <p:spPr/>
-        <p:txBody>
-          <a:bodyPr/>
-          <a:lstStyle/>
-          <a:p>
-            <a:r>
-              <a:t> Message formats: JSON, Avro, Protobuf</a:t>
-            </a:r>
-          </a:p>
-          <a:p>
-            <a:r>
-              <a:t> The Schema Registry: registering schemas, schema IDs, serdes</a:t>
-            </a:r>
-          </a:p>
-          <a:p>
-            <a:r>
-              <a:t> Schema evolution and compatibility (BACKWARD / FORWARD / FULL)</a:t>
-            </a:r>
-          </a:p>
-          <a:p>
-            <a:r>
-              <a:t> Data contracts as a governance practice</a:t>
-            </a:r>
-          </a:p>
-          <a:p>
-            <a:r>
-              <a:t> Hands-on: produce/consume Avro with the Schema Registry; evolve a schema</a:t>
-            </a:r>
-          </a:p>
-        </p:txBody>
-      </p:sp>
-      <p:sp>
-        <p:nvSpPr>
-          <p:cNvPr id="4" name="TextBox 3"/>
-          <p:cNvSpPr txBox="1"/>
-          <p:nvPr/>
-        </p:nvSpPr>
-        <p:spPr>
-          <a:xfrm>
-            <a:off x="704088" y="8065008"/>
-            <a:ext cx="8915400" cy="228600"/>
-          </a:xfrm>
-          <a:prstGeom prst="rect">
-            <a:avLst/>
-          </a:prstGeom>
-          <a:noFill/>
-        </p:spPr>
-        <p:txBody>
-          <a:bodyPr wrap="none">
-            <a:spAutoFit/>
-          </a:bodyPr>
-          <a:lstStyle/>
-          <a:p>
-            <a:r>
-              <a:rPr sz="800">
-                <a:solidFill>
-                  <a:srgbClr val="000000"/>
-                </a:solidFill>
-              </a:rPr>
-              <a:t>Copyright © 2026 by Elephant Scale, All Rights Reserved</a:t>
-            </a:r>
-          </a:p>
-        </p:txBody>
-      </p:sp>
-    </p:spTree>
-  </p:cSld>
-  <p:clrMapOvr>
-    <a:masterClrMapping/>
-  </p:clrMapOvr>
-</p:sld>
-</file>
-
-<file path=ppt/slides/slide3.xml><?xml version="1.0" encoding="utf-8"?>
-<p:sld xmlns:a="http://schemas.openxmlformats.org/drawingml/2006/main" xmlns:r="http://schemas.openxmlformats.org/officeDocument/2006/relationships" xmlns:p="http://schemas.openxmlformats.org/presentationml/2006/main">
-  <p:cSld>
-    <p:spTree>
-      <p:nvGrpSpPr>
-        <p:cNvPr id="1" name=""/>
-        <p:cNvGrpSpPr/>
-        <p:nvPr/>
-      </p:nvGrpSpPr>
-      <p:grpSpPr>
-        <a:xfrm>
-          <a:off x="0" y="0"/>
-          <a:ext cx="0" cy="0"/>
-          <a:chOff x="0" y="0"/>
-          <a:chExt cx="0" cy="0"/>
-        </a:xfrm>
-      </p:grpSpPr>
-      <p:sp>
-        <p:nvSpPr>
-          <p:cNvPr id="2" name="Title 1"/>
-          <p:cNvSpPr>
-            <a:spLocks noGrp="1"/>
-          </p:cNvSpPr>
-          <p:nvPr>
-            <p:ph type="title"/>
-          </p:nvPr>
-        </p:nvSpPr>
-        <p:spPr/>
-        <p:txBody>
-          <a:bodyPr/>
-          <a:lstStyle/>
-          <a:p>
-            <a:r>
-              <a:t>Kafka Stores Bytes — Someone Must Agree on Meaning</a:t>
-            </a:r>
-          </a:p>
-        </p:txBody>
-      </p:sp>
-      <p:sp>
-        <p:nvSpPr>
-          <p:cNvPr id="3" name="Content Placeholder 2"/>
-          <p:cNvSpPr>
-            <a:spLocks noGrp="1"/>
-          </p:cNvSpPr>
-          <p:nvPr>
-            <p:ph idx="1"/>
-          </p:nvPr>
-        </p:nvSpPr>
-        <p:spPr/>
-        <p:txBody>
-          <a:bodyPr/>
-          <a:lstStyle/>
-          <a:p>
-            <a:r>
-              <a:rPr dirty="0"/>
-              <a:t> From the producer module: Kafka moves</a:t>
-            </a:r>
-            <a:r>
-              <a:rPr b="1" dirty="0"/>
-              <a:t> bytes</a:t>
-            </a:r>
-            <a:r>
-              <a:rPr dirty="0"/>
-              <a:t> . The producer serializes; the consumer deserializes. Nothing in the broker enforces what those bytes</a:t>
-            </a:r>
-            <a:r>
-              <a:rPr i="1" dirty="0"/>
-              <a:t> mean</a:t>
-            </a:r>
-            <a:r>
-              <a:rPr dirty="0"/>
-              <a:t> .</a:t>
-            </a:r>
-          </a:p>
-          <a:p>
-            <a:endParaRPr lang="en-US" dirty="0"/>
-          </a:p>
-          <a:p>
-            <a:endParaRPr lang="en-US" dirty="0"/>
-          </a:p>
-          <a:p>
-            <a:endParaRPr dirty="0"/>
-          </a:p>
-          <a:p>
-            <a:r>
-              <a:rPr dirty="0"/>
-              <a:t> If producer and consumer disagree on the shape, the consumer reads</a:t>
-            </a:r>
-            <a:r>
-              <a:rPr b="1" dirty="0"/>
-              <a:t> garbage</a:t>
-            </a:r>
-            <a:r>
-              <a:rPr dirty="0"/>
-              <a:t> — or crashes</a:t>
-            </a:r>
-          </a:p>
-          <a:p>
-            <a:r>
-              <a:rPr dirty="0"/>
-              <a:t> With</a:t>
-            </a:r>
-            <a:r>
-              <a:rPr b="1" dirty="0"/>
-              <a:t> several systems</a:t>
-            </a:r>
-            <a:r>
-              <a:rPr dirty="0"/>
-              <a:t> producing and consuming the same topics, "just agree informally" doesn't scale</a:t>
-            </a:r>
-          </a:p>
-          <a:p>
-            <a:r>
-              <a:rPr dirty="0"/>
-              <a:t> You need a</a:t>
-            </a:r>
-            <a:r>
-              <a:rPr b="1" dirty="0"/>
-              <a:t> contract</a:t>
-            </a:r>
-            <a:r>
-              <a:rPr dirty="0"/>
-              <a:t> on the data's shape — enforced, versioned, shared</a:t>
-            </a:r>
-          </a:p>
-          <a:p>
-            <a:r>
-              <a:rPr dirty="0"/>
-              <a:t> That contract is a</a:t>
-            </a:r>
-            <a:r>
-              <a:rPr b="1" dirty="0"/>
-              <a:t> schema</a:t>
-            </a:r>
-            <a:r>
-              <a:rPr dirty="0"/>
-              <a:t> , and the Schema Registry is where it lives.</a:t>
-            </a:r>
-          </a:p>
-        </p:txBody>
-      </p:sp>
-      <p:sp>
-        <p:nvSpPr>
-          <p:cNvPr id="4" name="TextBox 3"/>
-          <p:cNvSpPr txBox="1"/>
-          <p:nvPr/>
-        </p:nvSpPr>
-        <p:spPr>
-          <a:xfrm>
-            <a:off x="704088" y="8065008"/>
-            <a:ext cx="8915400" cy="228600"/>
-          </a:xfrm>
-          <a:prstGeom prst="rect">
-            <a:avLst/>
-          </a:prstGeom>
-          <a:noFill/>
-        </p:spPr>
-        <p:txBody>
-          <a:bodyPr wrap="none">
-            <a:spAutoFit/>
-          </a:bodyPr>
-          <a:lstStyle/>
-          <a:p>
-            <a:r>
-              <a:rPr sz="800">
-                <a:solidFill>
-                  <a:srgbClr val="000000"/>
-                </a:solidFill>
-              </a:rPr>
-              <a:t>Copyright © 2026 by Elephant Scale, All Rights Reserved</a:t>
-            </a:r>
-          </a:p>
-        </p:txBody>
-      </p:sp>
-      <p:pic>
-        <p:nvPicPr>
-          <p:cNvPr id="5" name="Picture 4" descr="1.png"/>
-          <p:cNvPicPr>
-            <a:picLocks noChangeAspect="1"/>
-          </p:cNvPicPr>
-          <p:nvPr/>
-        </p:nvPicPr>
-        <p:blipFill>
-          <a:blip r:embed="rId3"/>
-          <a:stretch>
-            <a:fillRect/>
-          </a:stretch>
-        </p:blipFill>
-        <p:spPr>
-          <a:xfrm>
-            <a:off x="234950" y="2472531"/>
-            <a:ext cx="8915400" cy="550553"/>
-          </a:xfrm>
-          <a:prstGeom prst="rect">
-            <a:avLst/>
-          </a:prstGeom>
-        </p:spPr>
-      </p:pic>
-    </p:spTree>
-  </p:cSld>
-  <p:clrMapOvr>
-    <a:masterClrMapping/>
-  </p:clrMapOvr>
-</p:sld>
-</file>
-
-<file path=ppt/slides/slide4.xml><?xml version="1.0" encoding="utf-8"?>
-<p:sld xmlns:a="http://schemas.openxmlformats.org/drawingml/2006/main" xmlns:r="http://schemas.openxmlformats.org/officeDocument/2006/relationships" xmlns:p="http://schemas.openxmlformats.org/presentationml/2006/main">
-  <p:cSld>
-    <p:spTree>
-      <p:nvGrpSpPr>
-        <p:cNvPr id="1" name=""/>
-        <p:cNvGrpSpPr/>
-        <p:nvPr/>
-      </p:nvGrpSpPr>
-      <p:grpSpPr>
-        <a:xfrm>
-          <a:off x="0" y="0"/>
-          <a:ext cx="0" cy="0"/>
-          <a:chOff x="0" y="0"/>
-          <a:chExt cx="0" cy="0"/>
-        </a:xfrm>
-      </p:grpSpPr>
-      <p:sp>
-        <p:nvSpPr>
-          <p:cNvPr id="2" name="Title 1"/>
-          <p:cNvSpPr>
-            <a:spLocks noGrp="1"/>
-          </p:cNvSpPr>
-          <p:nvPr>
-            <p:ph type="title"/>
-          </p:nvPr>
-        </p:nvSpPr>
-        <p:spPr/>
-        <p:txBody>
-          <a:bodyPr/>
-          <a:lstStyle/>
-          <a:p>
-            <a:r>
-              <a:t>Message Formats</a:t>
-            </a:r>
-          </a:p>
-        </p:txBody>
-      </p:sp>
-      <p:sp>
-        <p:nvSpPr>
-          <p:cNvPr id="3" name="Content Placeholder 2"/>
-          <p:cNvSpPr>
-            <a:spLocks noGrp="1"/>
-          </p:cNvSpPr>
-          <p:nvPr>
-            <p:ph idx="1"/>
-          </p:nvPr>
-        </p:nvSpPr>
-        <p:spPr/>
-        <p:txBody>
-          <a:bodyPr/>
-          <a:lstStyle/>
-          <a:p>
-            <a:r>
-              <a:rPr dirty="0"/>
-              <a:t> Three common ways to structure event payloads:</a:t>
-            </a:r>
-          </a:p>
-          <a:p>
-            <a:endParaRPr dirty="0"/>
-          </a:p>
-          <a:p>
-            <a:endParaRPr dirty="0"/>
-          </a:p>
-          <a:p>
-            <a:endParaRPr dirty="0"/>
-          </a:p>
-          <a:p>
-            <a:endParaRPr dirty="0"/>
-          </a:p>
-          <a:p>
-            <a:endParaRPr lang="en-US" dirty="0"/>
-          </a:p>
-          <a:p>
-            <a:endParaRPr lang="en-US" dirty="0"/>
-          </a:p>
-          <a:p>
-            <a:endParaRPr lang="en-US" dirty="0"/>
-          </a:p>
-          <a:p>
-            <a:endParaRPr lang="en-US" dirty="0"/>
-          </a:p>
-          <a:p>
-            <a:endParaRPr dirty="0"/>
-          </a:p>
-          <a:p>
-            <a:r>
-              <a:rPr dirty="0"/>
-              <a:t> Plain JSON is easy but</a:t>
-            </a:r>
-            <a:r>
-              <a:rPr b="1" dirty="0"/>
-              <a:t> unenforced</a:t>
-            </a:r>
-            <a:r>
-              <a:rPr dirty="0"/>
-              <a:t> — every consumer hopes the fields are there</a:t>
-            </a:r>
-          </a:p>
-          <a:p>
-            <a:r>
-              <a:rPr b="1" dirty="0"/>
-              <a:t> Avro / </a:t>
-            </a:r>
-            <a:r>
-              <a:rPr b="1" dirty="0" err="1"/>
-              <a:t>Protobuf</a:t>
-            </a:r>
-            <a:r>
-              <a:rPr dirty="0"/>
-              <a:t> carry a real schema, are compact on the wire, and support</a:t>
-            </a:r>
-            <a:r>
-              <a:rPr b="1" dirty="0"/>
-              <a:t> safe evolution</a:t>
-            </a:r>
-          </a:p>
-          <a:p>
-            <a:r>
-              <a:rPr dirty="0"/>
-              <a:t> This course uses</a:t>
-            </a:r>
-            <a:r>
-              <a:rPr b="1" dirty="0"/>
-              <a:t> Avro</a:t>
-            </a:r>
-            <a:r>
-              <a:rPr dirty="0"/>
-              <a:t> with the Schema Registry — the mainstream Kafka pattern</a:t>
-            </a:r>
-          </a:p>
-        </p:txBody>
-      </p:sp>
-      <p:sp>
-        <p:nvSpPr>
-          <p:cNvPr id="4" name="TextBox 3"/>
-          <p:cNvSpPr txBox="1"/>
-          <p:nvPr/>
-        </p:nvSpPr>
-        <p:spPr>
-          <a:xfrm>
-            <a:off x="704088" y="8065008"/>
-            <a:ext cx="8915400" cy="228600"/>
-          </a:xfrm>
-          <a:prstGeom prst="rect">
-            <a:avLst/>
-          </a:prstGeom>
-          <a:noFill/>
-        </p:spPr>
-        <p:txBody>
-          <a:bodyPr wrap="none">
-            <a:spAutoFit/>
-          </a:bodyPr>
-          <a:lstStyle/>
-          <a:p>
-            <a:r>
-              <a:rPr sz="800">
-                <a:solidFill>
-                  <a:srgbClr val="000000"/>
-                </a:solidFill>
-              </a:rPr>
-              <a:t>Copyright © 2026 by Elephant Scale, All Rights Reserved</a:t>
-            </a:r>
-          </a:p>
-        </p:txBody>
-      </p:sp>
       <p:graphicFrame>
         <p:nvGraphicFramePr>
           <p:cNvPr id="5" name="Table 4"/>
@@ -3980,1240 +2957,7 @@
           <p:nvPr>
             <p:extLst>
               <p:ext uri="{D42A27DB-BD31-4B8C-83A1-F6EECF244321}">
-                <p14:modId xmlns:p14="http://schemas.microsoft.com/office/powerpoint/2010/main" val="534517137"/>
-              </p:ext>
-            </p:extLst>
-          </p:nvPr>
-        </p:nvGraphicFramePr>
-        <p:xfrm>
-          <a:off x="571499" y="1693672"/>
-          <a:ext cx="8581645" cy="3383280"/>
-        </p:xfrm>
-        <a:graphic>
-          <a:graphicData uri="http://schemas.openxmlformats.org/drawingml/2006/table">
-            <a:tbl>
-              <a:tblPr firstRow="1" bandRow="1">
-                <a:tableStyleId>{5C22544A-7EE6-4342-B048-85BDC9FD1C3A}</a:tableStyleId>
-              </a:tblPr>
-              <a:tblGrid>
-                <a:gridCol w="1895095">
-                  <a:extLst>
-                    <a:ext uri="{9D8B030D-6E8A-4147-A177-3AD203B41FA5}">
-                      <a16:colId xmlns:a16="http://schemas.microsoft.com/office/drawing/2014/main" val="20000"/>
-                    </a:ext>
-                  </a:extLst>
-                </a:gridCol>
-                <a:gridCol w="2228850">
-                  <a:extLst>
-                    <a:ext uri="{9D8B030D-6E8A-4147-A177-3AD203B41FA5}">
-                      <a16:colId xmlns:a16="http://schemas.microsoft.com/office/drawing/2014/main" val="20001"/>
-                    </a:ext>
-                  </a:extLst>
-                </a:gridCol>
-                <a:gridCol w="2228850">
-                  <a:extLst>
-                    <a:ext uri="{9D8B030D-6E8A-4147-A177-3AD203B41FA5}">
-                      <a16:colId xmlns:a16="http://schemas.microsoft.com/office/drawing/2014/main" val="20002"/>
-                    </a:ext>
-                  </a:extLst>
-                </a:gridCol>
-                <a:gridCol w="2228850">
-                  <a:extLst>
-                    <a:ext uri="{9D8B030D-6E8A-4147-A177-3AD203B41FA5}">
-                      <a16:colId xmlns:a16="http://schemas.microsoft.com/office/drawing/2014/main" val="20003"/>
-                    </a:ext>
-                  </a:extLst>
-                </a:gridCol>
-              </a:tblGrid>
-              <a:tr h="0">
-                <a:tc>
-                  <a:txBody>
-                    <a:bodyPr/>
-                    <a:lstStyle/>
-                    <a:p>
-                      <a:r>
-                        <a:t>Format</a:t>
-                      </a:r>
-                    </a:p>
-                  </a:txBody>
-                  <a:tcPr/>
-                </a:tc>
-                <a:tc>
-                  <a:txBody>
-                    <a:bodyPr/>
-                    <a:lstStyle/>
-                    <a:p>
-                      <a:r>
-                        <a:t>Schema</a:t>
-                      </a:r>
-                    </a:p>
-                  </a:txBody>
-                  <a:tcPr/>
-                </a:tc>
-                <a:tc>
-                  <a:txBody>
-                    <a:bodyPr/>
-                    <a:lstStyle/>
-                    <a:p>
-                      <a:r>
-                        <a:t>Size</a:t>
-                      </a:r>
-                    </a:p>
-                  </a:txBody>
-                  <a:tcPr/>
-                </a:tc>
-                <a:tc>
-                  <a:txBody>
-                    <a:bodyPr/>
-                    <a:lstStyle/>
-                    <a:p>
-                      <a:r>
-                        <a:t>Notes</a:t>
-                      </a:r>
-                    </a:p>
-                  </a:txBody>
-                  <a:tcPr/>
-                </a:tc>
-                <a:extLst>
-                  <a:ext uri="{0D108BD9-81ED-4DB2-BD59-A6C34878D82A}">
-                    <a16:rowId xmlns:a16="http://schemas.microsoft.com/office/drawing/2014/main" val="10000"/>
-                  </a:ext>
-                </a:extLst>
-              </a:tr>
-              <a:tr h="457200">
-                <a:tc>
-                  <a:txBody>
-                    <a:bodyPr/>
-                    <a:lstStyle/>
-                    <a:p>
-                      <a:r>
-                        <a:rPr b="1"/>
-                        <a:t>JSON</a:t>
-                      </a:r>
-                    </a:p>
-                  </a:txBody>
-                  <a:tcPr/>
-                </a:tc>
-                <a:tc>
-                  <a:txBody>
-                    <a:bodyPr/>
-                    <a:lstStyle/>
-                    <a:p>
-                      <a:r>
-                        <a:t>none (or JSON Schema)</a:t>
-                      </a:r>
-                    </a:p>
-                  </a:txBody>
-                  <a:tcPr/>
-                </a:tc>
-                <a:tc>
-                  <a:txBody>
-                    <a:bodyPr/>
-                    <a:lstStyle/>
-                    <a:p>
-                      <a:r>
-                        <a:t>large (text)</a:t>
-                      </a:r>
-                    </a:p>
-                  </a:txBody>
-                  <a:tcPr/>
-                </a:tc>
-                <a:tc>
-                  <a:txBody>
-                    <a:bodyPr/>
-                    <a:lstStyle/>
-                    <a:p>
-                      <a:r>
-                        <a:t>human-readable, no enforcement by default</a:t>
-                      </a:r>
-                    </a:p>
-                  </a:txBody>
-                  <a:tcPr/>
-                </a:tc>
-                <a:extLst>
-                  <a:ext uri="{0D108BD9-81ED-4DB2-BD59-A6C34878D82A}">
-                    <a16:rowId xmlns:a16="http://schemas.microsoft.com/office/drawing/2014/main" val="10001"/>
-                  </a:ext>
-                </a:extLst>
-              </a:tr>
-              <a:tr h="457200">
-                <a:tc>
-                  <a:txBody>
-                    <a:bodyPr/>
-                    <a:lstStyle/>
-                    <a:p>
-                      <a:r>
-                        <a:rPr b="1"/>
-                        <a:t>Avro</a:t>
-                      </a:r>
-                    </a:p>
-                  </a:txBody>
-                  <a:tcPr/>
-                </a:tc>
-                <a:tc>
-                  <a:txBody>
-                    <a:bodyPr/>
-                    <a:lstStyle/>
-                    <a:p>
-                      <a:r>
-                        <a:t>required (`.avsc`)</a:t>
-                      </a:r>
-                    </a:p>
-                  </a:txBody>
-                  <a:tcPr/>
-                </a:tc>
-                <a:tc>
-                  <a:txBody>
-                    <a:bodyPr/>
-                    <a:lstStyle/>
-                    <a:p>
-                      <a:r>
-                        <a:t>small (binary)</a:t>
-                      </a:r>
-                    </a:p>
-                  </a:txBody>
-                  <a:tcPr/>
-                </a:tc>
-                <a:tc>
-                  <a:txBody>
-                    <a:bodyPr/>
-                    <a:lstStyle/>
-                    <a:p>
-                      <a:r>
-                        <a:t>compact, strong evolution rules, Kafka's most common choice</a:t>
-                      </a:r>
-                    </a:p>
-                  </a:txBody>
-                  <a:tcPr/>
-                </a:tc>
-                <a:extLst>
-                  <a:ext uri="{0D108BD9-81ED-4DB2-BD59-A6C34878D82A}">
-                    <a16:rowId xmlns:a16="http://schemas.microsoft.com/office/drawing/2014/main" val="10002"/>
-                  </a:ext>
-                </a:extLst>
-              </a:tr>
-              <a:tr h="457200">
-                <a:tc>
-                  <a:txBody>
-                    <a:bodyPr/>
-                    <a:lstStyle/>
-                    <a:p>
-                      <a:r>
-                        <a:rPr b="1"/>
-                        <a:t>Protobuf</a:t>
-                      </a:r>
-                    </a:p>
-                  </a:txBody>
-                  <a:tcPr/>
-                </a:tc>
-                <a:tc>
-                  <a:txBody>
-                    <a:bodyPr/>
-                    <a:lstStyle/>
-                    <a:p>
-                      <a:r>
-                        <a:t>required (`.proto`)</a:t>
-                      </a:r>
-                    </a:p>
-                  </a:txBody>
-                  <a:tcPr/>
-                </a:tc>
-                <a:tc>
-                  <a:txBody>
-                    <a:bodyPr/>
-                    <a:lstStyle/>
-                    <a:p>
-                      <a:r>
-                        <a:t>small (binary)</a:t>
-                      </a:r>
-                    </a:p>
-                  </a:txBody>
-                  <a:tcPr/>
-                </a:tc>
-                <a:tc>
-                  <a:txBody>
-                    <a:bodyPr/>
-                    <a:lstStyle/>
-                    <a:p>
-                      <a:r>
-                        <a:rPr dirty="0"/>
-                        <a:t>cross-language, popular for </a:t>
-                      </a:r>
-                      <a:r>
-                        <a:rPr dirty="0" err="1"/>
-                        <a:t>gRPC</a:t>
-                      </a:r>
-                      <a:r>
-                        <a:rPr dirty="0"/>
-                        <a:t> shops</a:t>
-                      </a:r>
-                    </a:p>
-                  </a:txBody>
-                  <a:tcPr/>
-                </a:tc>
-                <a:extLst>
-                  <a:ext uri="{0D108BD9-81ED-4DB2-BD59-A6C34878D82A}">
-                    <a16:rowId xmlns:a16="http://schemas.microsoft.com/office/drawing/2014/main" val="10003"/>
-                  </a:ext>
-                </a:extLst>
-              </a:tr>
-            </a:tbl>
-          </a:graphicData>
-        </a:graphic>
-      </p:graphicFrame>
-    </p:spTree>
-  </p:cSld>
-  <p:clrMapOvr>
-    <a:masterClrMapping/>
-  </p:clrMapOvr>
-</p:sld>
-</file>
-
-<file path=ppt/slides/slide5.xml><?xml version="1.0" encoding="utf-8"?>
-<p:sld xmlns:a="http://schemas.openxmlformats.org/drawingml/2006/main" xmlns:r="http://schemas.openxmlformats.org/officeDocument/2006/relationships" xmlns:p="http://schemas.openxmlformats.org/presentationml/2006/main">
-  <p:cSld>
-    <p:spTree>
-      <p:nvGrpSpPr>
-        <p:cNvPr id="1" name=""/>
-        <p:cNvGrpSpPr/>
-        <p:nvPr/>
-      </p:nvGrpSpPr>
-      <p:grpSpPr>
-        <a:xfrm>
-          <a:off x="0" y="0"/>
-          <a:ext cx="0" cy="0"/>
-          <a:chOff x="0" y="0"/>
-          <a:chExt cx="0" cy="0"/>
-        </a:xfrm>
-      </p:grpSpPr>
-      <p:sp>
-        <p:nvSpPr>
-          <p:cNvPr id="2" name="Title 1"/>
-          <p:cNvSpPr>
-            <a:spLocks noGrp="1"/>
-          </p:cNvSpPr>
-          <p:nvPr>
-            <p:ph type="title"/>
-          </p:nvPr>
-        </p:nvSpPr>
-        <p:spPr/>
-        <p:txBody>
-          <a:bodyPr/>
-          <a:lstStyle/>
-          <a:p>
-            <a:r>
-              <a:t>The Schema Registry</a:t>
-            </a:r>
-          </a:p>
-        </p:txBody>
-      </p:sp>
-      <p:sp>
-        <p:nvSpPr>
-          <p:cNvPr id="3" name="Content Placeholder 2"/>
-          <p:cNvSpPr>
-            <a:spLocks noGrp="1"/>
-          </p:cNvSpPr>
-          <p:nvPr>
-            <p:ph idx="1"/>
-          </p:nvPr>
-        </p:nvSpPr>
-        <p:spPr/>
-        <p:txBody>
-          <a:bodyPr/>
-          <a:lstStyle/>
-          <a:p>
-            <a:r>
-              <a:rPr dirty="0"/>
-              <a:t> A standalone service (in our lab at</a:t>
-            </a:r>
-            <a:r>
-              <a:rPr dirty="0">
-                <a:latin typeface="Courier New"/>
-              </a:rPr>
-              <a:t> :8081</a:t>
-            </a:r>
-            <a:r>
-              <a:rPr dirty="0"/>
-              <a:t> ) that stores schemas and hands out IDs.</a:t>
-            </a:r>
-          </a:p>
-          <a:p>
-            <a:endParaRPr dirty="0"/>
-          </a:p>
-          <a:p>
-            <a:endParaRPr lang="en-US" dirty="0"/>
-          </a:p>
-          <a:p>
-            <a:endParaRPr lang="en-US" dirty="0"/>
-          </a:p>
-          <a:p>
-            <a:endParaRPr lang="en-US" dirty="0"/>
-          </a:p>
-          <a:p>
-            <a:endParaRPr dirty="0"/>
-          </a:p>
-          <a:p>
-            <a:r>
-              <a:rPr dirty="0"/>
-              <a:t> The</a:t>
-            </a:r>
-            <a:r>
-              <a:rPr b="1" dirty="0"/>
-              <a:t> schema travels by ID</a:t>
-            </a:r>
-            <a:r>
-              <a:rPr dirty="0"/>
-              <a:t> , not inline — a few bytes, not the whole schema per message</a:t>
-            </a:r>
-          </a:p>
-          <a:p>
-            <a:r>
-              <a:rPr dirty="0"/>
-              <a:t> Producers</a:t>
-            </a:r>
-            <a:r>
-              <a:rPr b="1" dirty="0"/>
-              <a:t> auto-register</a:t>
-            </a:r>
-            <a:r>
-              <a:rPr dirty="0"/>
-              <a:t> schemas; consumers</a:t>
-            </a:r>
-            <a:r>
-              <a:rPr b="1" dirty="0"/>
-              <a:t> fetch by ID</a:t>
-            </a:r>
-            <a:r>
-              <a:rPr dirty="0"/>
-              <a:t> and cache them</a:t>
-            </a:r>
-          </a:p>
-          <a:p>
-            <a:r>
-              <a:rPr dirty="0"/>
-              <a:t> One source of truth for "what's in this topic," shared across all systems</a:t>
-            </a:r>
-          </a:p>
-        </p:txBody>
-      </p:sp>
-      <p:sp>
-        <p:nvSpPr>
-          <p:cNvPr id="4" name="TextBox 3"/>
-          <p:cNvSpPr txBox="1"/>
-          <p:nvPr/>
-        </p:nvSpPr>
-        <p:spPr>
-          <a:xfrm>
-            <a:off x="704088" y="8065008"/>
-            <a:ext cx="8915400" cy="228600"/>
-          </a:xfrm>
-          <a:prstGeom prst="rect">
-            <a:avLst/>
-          </a:prstGeom>
-          <a:noFill/>
-        </p:spPr>
-        <p:txBody>
-          <a:bodyPr wrap="none">
-            <a:spAutoFit/>
-          </a:bodyPr>
-          <a:lstStyle/>
-          <a:p>
-            <a:r>
-              <a:rPr sz="800">
-                <a:solidFill>
-                  <a:srgbClr val="000000"/>
-                </a:solidFill>
-              </a:rPr>
-              <a:t>Copyright © 2026 by Elephant Scale, All Rights Reserved</a:t>
-            </a:r>
-          </a:p>
-        </p:txBody>
-      </p:sp>
-      <p:pic>
-        <p:nvPicPr>
-          <p:cNvPr id="5" name="Picture 4" descr="1.png"/>
-          <p:cNvPicPr>
-            <a:picLocks noChangeAspect="1"/>
-          </p:cNvPicPr>
-          <p:nvPr/>
-        </p:nvPicPr>
-        <p:blipFill>
-          <a:blip r:embed="rId2"/>
-          <a:stretch>
-            <a:fillRect/>
-          </a:stretch>
-        </p:blipFill>
-        <p:spPr>
-          <a:xfrm>
-            <a:off x="222250" y="2243931"/>
-            <a:ext cx="8915400" cy="946124"/>
-          </a:xfrm>
-          <a:prstGeom prst="rect">
-            <a:avLst/>
-          </a:prstGeom>
-        </p:spPr>
-      </p:pic>
-    </p:spTree>
-  </p:cSld>
-  <p:clrMapOvr>
-    <a:masterClrMapping/>
-  </p:clrMapOvr>
-</p:sld>
-</file>
-
-<file path=ppt/slides/slide6.xml><?xml version="1.0" encoding="utf-8"?>
-<p:sld xmlns:a="http://schemas.openxmlformats.org/drawingml/2006/main" xmlns:r="http://schemas.openxmlformats.org/officeDocument/2006/relationships" xmlns:p="http://schemas.openxmlformats.org/presentationml/2006/main">
-  <p:cSld>
-    <p:spTree>
-      <p:nvGrpSpPr>
-        <p:cNvPr id="1" name=""/>
-        <p:cNvGrpSpPr/>
-        <p:nvPr/>
-      </p:nvGrpSpPr>
-      <p:grpSpPr>
-        <a:xfrm>
-          <a:off x="0" y="0"/>
-          <a:ext cx="0" cy="0"/>
-          <a:chOff x="0" y="0"/>
-          <a:chExt cx="0" cy="0"/>
-        </a:xfrm>
-      </p:grpSpPr>
-      <p:sp>
-        <p:nvSpPr>
-          <p:cNvPr id="2" name="Title 1"/>
-          <p:cNvSpPr>
-            <a:spLocks noGrp="1"/>
-          </p:cNvSpPr>
-          <p:nvPr>
-            <p:ph type="title"/>
-          </p:nvPr>
-        </p:nvSpPr>
-        <p:spPr/>
-        <p:txBody>
-          <a:bodyPr/>
-          <a:lstStyle/>
-          <a:p>
-            <a:r>
-              <a:t>Serdes: How Your Code Uses It</a:t>
-            </a:r>
-          </a:p>
-        </p:txBody>
-      </p:sp>
-      <p:sp>
-        <p:nvSpPr>
-          <p:cNvPr id="3" name="Content Placeholder 2"/>
-          <p:cNvSpPr>
-            <a:spLocks noGrp="1"/>
-          </p:cNvSpPr>
-          <p:nvPr>
-            <p:ph idx="1"/>
-          </p:nvPr>
-        </p:nvSpPr>
-        <p:spPr/>
-        <p:txBody>
-          <a:bodyPr/>
-          <a:lstStyle/>
-          <a:p>
-            <a:r>
-              <a:rPr dirty="0"/>
-              <a:t> You don't hand-code the wire format — a</a:t>
-            </a:r>
-            <a:r>
-              <a:rPr b="1" dirty="0"/>
-              <a:t> serializer/</a:t>
-            </a:r>
-            <a:r>
-              <a:rPr b="1" dirty="0" err="1"/>
-              <a:t>deserializer</a:t>
-            </a:r>
-            <a:r>
-              <a:rPr b="1" dirty="0"/>
-              <a:t> (</a:t>
-            </a:r>
-            <a:r>
-              <a:rPr b="1" dirty="0" err="1"/>
-              <a:t>serde</a:t>
-            </a:r>
-            <a:r>
-              <a:rPr b="1" dirty="0"/>
-              <a:t>)</a:t>
-            </a:r>
-            <a:r>
-              <a:rPr dirty="0"/>
-              <a:t> does it. In the Kafka</a:t>
-            </a:r>
-            <a:r>
-              <a:rPr b="1" dirty="0"/>
-              <a:t> Java</a:t>
-            </a:r>
-            <a:r>
-              <a:rPr dirty="0"/>
-              <a:t> client that's Confluent's Avro </a:t>
-            </a:r>
-            <a:r>
-              <a:rPr dirty="0" err="1"/>
-              <a:t>serde</a:t>
-            </a:r>
-            <a:r>
-              <a:rPr dirty="0"/>
-              <a:t>:</a:t>
-            </a:r>
-          </a:p>
-          <a:p>
-            <a:endParaRPr dirty="0"/>
-          </a:p>
-          <a:p>
-            <a:endParaRPr dirty="0"/>
-          </a:p>
-          <a:p>
-            <a:endParaRPr lang="en-US" dirty="0"/>
-          </a:p>
-          <a:p>
-            <a:endParaRPr lang="en-US" dirty="0"/>
-          </a:p>
-          <a:p>
-            <a:endParaRPr lang="en-US" dirty="0"/>
-          </a:p>
-          <a:p>
-            <a:endParaRPr dirty="0"/>
-          </a:p>
-          <a:p>
-            <a:endParaRPr dirty="0"/>
-          </a:p>
-          <a:p>
-            <a:r>
-              <a:rPr dirty="0"/>
-              <a:t> The serializer registers the schema (if new) and prefixes the ID</a:t>
-            </a:r>
-          </a:p>
-          <a:p>
-            <a:r>
-              <a:rPr dirty="0"/>
-              <a:t> The </a:t>
-            </a:r>
-            <a:r>
-              <a:rPr dirty="0" err="1"/>
-              <a:t>deserializer</a:t>
-            </a:r>
-            <a:r>
-              <a:rPr dirty="0"/>
-              <a:t> reads the ID, fetches/caches the schema, and decodes</a:t>
-            </a:r>
-          </a:p>
-          <a:p>
-            <a:r>
-              <a:rPr dirty="0"/>
-              <a:t> Your business code sees</a:t>
-            </a:r>
-            <a:r>
-              <a:rPr b="1" dirty="0"/>
-              <a:t> objects</a:t>
-            </a:r>
-            <a:r>
-              <a:rPr dirty="0"/>
-              <a:t> , not bytes</a:t>
-            </a:r>
-          </a:p>
-        </p:txBody>
-      </p:sp>
-      <p:sp>
-        <p:nvSpPr>
-          <p:cNvPr id="4" name="TextBox 3"/>
-          <p:cNvSpPr txBox="1"/>
-          <p:nvPr/>
-        </p:nvSpPr>
-        <p:spPr>
-          <a:xfrm>
-            <a:off x="704088" y="8065008"/>
-            <a:ext cx="8915400" cy="228600"/>
-          </a:xfrm>
-          <a:prstGeom prst="rect">
-            <a:avLst/>
-          </a:prstGeom>
-          <a:noFill/>
-        </p:spPr>
-        <p:txBody>
-          <a:bodyPr wrap="none">
-            <a:spAutoFit/>
-          </a:bodyPr>
-          <a:lstStyle/>
-          <a:p>
-            <a:r>
-              <a:rPr sz="800">
-                <a:solidFill>
-                  <a:srgbClr val="000000"/>
-                </a:solidFill>
-              </a:rPr>
-              <a:t>Copyright © 2026 by Elephant Scale, All Rights Reserved</a:t>
-            </a:r>
-          </a:p>
-        </p:txBody>
-      </p:sp>
-      <p:pic>
-        <p:nvPicPr>
-          <p:cNvPr id="5" name="Picture 4" descr="1.png"/>
-          <p:cNvPicPr>
-            <a:picLocks noChangeAspect="1"/>
-          </p:cNvPicPr>
-          <p:nvPr/>
-        </p:nvPicPr>
-        <p:blipFill>
-          <a:blip r:embed="rId3"/>
-          <a:stretch>
-            <a:fillRect/>
-          </a:stretch>
-        </p:blipFill>
-        <p:spPr>
-          <a:xfrm>
-            <a:off x="222250" y="2493128"/>
-            <a:ext cx="8915400" cy="1675646"/>
-          </a:xfrm>
-          <a:prstGeom prst="rect">
-            <a:avLst/>
-          </a:prstGeom>
-        </p:spPr>
-      </p:pic>
-    </p:spTree>
-  </p:cSld>
-  <p:clrMapOvr>
-    <a:masterClrMapping/>
-  </p:clrMapOvr>
-</p:sld>
-</file>
-
-<file path=ppt/slides/slide7.xml><?xml version="1.0" encoding="utf-8"?>
-<p:sld xmlns:a="http://schemas.openxmlformats.org/drawingml/2006/main" xmlns:r="http://schemas.openxmlformats.org/officeDocument/2006/relationships" xmlns:p="http://schemas.openxmlformats.org/presentationml/2006/main">
-  <p:cSld>
-    <p:spTree>
-      <p:nvGrpSpPr>
-        <p:cNvPr id="1" name=""/>
-        <p:cNvGrpSpPr/>
-        <p:nvPr/>
-      </p:nvGrpSpPr>
-      <p:grpSpPr>
-        <a:xfrm>
-          <a:off x="0" y="0"/>
-          <a:ext cx="0" cy="0"/>
-          <a:chOff x="0" y="0"/>
-          <a:chExt cx="0" cy="0"/>
-        </a:xfrm>
-      </p:grpSpPr>
-      <p:sp>
-        <p:nvSpPr>
-          <p:cNvPr id="2" name="Title 1"/>
-          <p:cNvSpPr>
-            <a:spLocks noGrp="1"/>
-          </p:cNvSpPr>
-          <p:nvPr>
-            <p:ph type="title"/>
-          </p:nvPr>
-        </p:nvSpPr>
-        <p:spPr/>
-        <p:txBody>
-          <a:bodyPr/>
-          <a:lstStyle/>
-          <a:p>
-            <a:r>
-              <a:t>Subjects and Versions</a:t>
-            </a:r>
-          </a:p>
-        </p:txBody>
-      </p:sp>
-      <p:sp>
-        <p:nvSpPr>
-          <p:cNvPr id="3" name="Content Placeholder 2"/>
-          <p:cNvSpPr>
-            <a:spLocks noGrp="1"/>
-          </p:cNvSpPr>
-          <p:nvPr>
-            <p:ph idx="1"/>
-          </p:nvPr>
-        </p:nvSpPr>
-        <p:spPr/>
-        <p:txBody>
-          <a:bodyPr/>
-          <a:lstStyle/>
-          <a:p>
-            <a:r>
-              <a:rPr dirty="0"/>
-              <a:t> The registry organizes schemas into</a:t>
-            </a:r>
-            <a:r>
-              <a:rPr b="1" dirty="0"/>
-              <a:t> subjects</a:t>
-            </a:r>
-            <a:r>
-              <a:rPr dirty="0"/>
-              <a:t> , each with a version history.</a:t>
-            </a:r>
-          </a:p>
-          <a:p>
-            <a:r>
-              <a:rPr dirty="0"/>
-              <a:t> Default naming: a topic</a:t>
-            </a:r>
-            <a:r>
-              <a:rPr dirty="0">
-                <a:latin typeface="Courier New"/>
-              </a:rPr>
-              <a:t> claims</a:t>
-            </a:r>
-            <a:r>
-              <a:rPr dirty="0"/>
-              <a:t> has subjects</a:t>
-            </a:r>
-            <a:r>
-              <a:rPr dirty="0">
-                <a:latin typeface="Courier New"/>
-              </a:rPr>
-              <a:t> claims-value</a:t>
-            </a:r>
-            <a:r>
-              <a:rPr dirty="0"/>
-              <a:t> (and</a:t>
-            </a:r>
-            <a:r>
-              <a:rPr dirty="0">
-                <a:latin typeface="Courier New"/>
-              </a:rPr>
-              <a:t> claims-key</a:t>
-            </a:r>
-            <a:r>
-              <a:rPr dirty="0"/>
-              <a:t> if keyed)</a:t>
-            </a:r>
-          </a:p>
-          <a:p>
-            <a:r>
-              <a:rPr dirty="0"/>
-              <a:t> Each subject holds an ordered list of</a:t>
-            </a:r>
-            <a:r>
-              <a:rPr b="1" dirty="0"/>
-              <a:t> versions</a:t>
-            </a:r>
-            <a:r>
-              <a:rPr dirty="0"/>
-              <a:t> : v1, v2, v3, …</a:t>
-            </a:r>
-          </a:p>
-          <a:p>
-            <a:r>
-              <a:rPr dirty="0"/>
-              <a:t> A</a:t>
-            </a:r>
-            <a:r>
-              <a:rPr b="1" dirty="0"/>
-              <a:t> compatibility rule</a:t>
-            </a:r>
-            <a:r>
-              <a:rPr dirty="0"/>
-              <a:t> is attached per subject and governs which new versions are allowed</a:t>
-            </a:r>
-          </a:p>
-          <a:p>
-            <a:endParaRPr lang="en-US" dirty="0"/>
-          </a:p>
-          <a:p>
-            <a:endParaRPr lang="en-US" dirty="0"/>
-          </a:p>
-          <a:p>
-            <a:endParaRPr lang="en-US" dirty="0"/>
-          </a:p>
-          <a:p>
-            <a:endParaRPr dirty="0"/>
-          </a:p>
-          <a:p>
-            <a:endParaRPr dirty="0"/>
-          </a:p>
-          <a:p>
-            <a:r>
-              <a:rPr dirty="0"/>
-              <a:t> The registry</a:t>
-            </a:r>
-            <a:r>
-              <a:rPr b="1" dirty="0"/>
-              <a:t> rejects</a:t>
-            </a:r>
-            <a:r>
-              <a:rPr dirty="0"/>
-              <a:t> a new version that violates the subject's compatibility rule — that's the enforcement that keeps producers and consumers from breaking each other.</a:t>
-            </a:r>
-          </a:p>
-        </p:txBody>
-      </p:sp>
-      <p:sp>
-        <p:nvSpPr>
-          <p:cNvPr id="4" name="TextBox 3"/>
-          <p:cNvSpPr txBox="1"/>
-          <p:nvPr/>
-        </p:nvSpPr>
-        <p:spPr>
-          <a:xfrm>
-            <a:off x="704088" y="8065008"/>
-            <a:ext cx="8915400" cy="228600"/>
-          </a:xfrm>
-          <a:prstGeom prst="rect">
-            <a:avLst/>
-          </a:prstGeom>
-          <a:noFill/>
-        </p:spPr>
-        <p:txBody>
-          <a:bodyPr wrap="none">
-            <a:spAutoFit/>
-          </a:bodyPr>
-          <a:lstStyle/>
-          <a:p>
-            <a:r>
-              <a:rPr sz="800">
-                <a:solidFill>
-                  <a:srgbClr val="000000"/>
-                </a:solidFill>
-              </a:rPr>
-              <a:t>Copyright © 2026 by Elephant Scale, All Rights Reserved</a:t>
-            </a:r>
-          </a:p>
-        </p:txBody>
-      </p:sp>
-      <p:pic>
-        <p:nvPicPr>
-          <p:cNvPr id="5" name="Picture 4" descr="1.png"/>
-          <p:cNvPicPr>
-            <a:picLocks noChangeAspect="1"/>
-          </p:cNvPicPr>
-          <p:nvPr/>
-        </p:nvPicPr>
-        <p:blipFill>
-          <a:blip r:embed="rId2"/>
-          <a:stretch>
-            <a:fillRect/>
-          </a:stretch>
-        </p:blipFill>
-        <p:spPr>
-          <a:xfrm>
-            <a:off x="0" y="4358625"/>
-            <a:ext cx="9372600" cy="1059511"/>
-          </a:xfrm>
-          <a:prstGeom prst="rect">
-            <a:avLst/>
-          </a:prstGeom>
-        </p:spPr>
-      </p:pic>
-    </p:spTree>
-  </p:cSld>
-  <p:clrMapOvr>
-    <a:masterClrMapping/>
-  </p:clrMapOvr>
-</p:sld>
-</file>
-
-<file path=ppt/slides/slide8.xml><?xml version="1.0" encoding="utf-8"?>
-<p:sld xmlns:a="http://schemas.openxmlformats.org/drawingml/2006/main" xmlns:r="http://schemas.openxmlformats.org/officeDocument/2006/relationships" xmlns:p="http://schemas.openxmlformats.org/presentationml/2006/main">
-  <p:cSld>
-    <p:spTree>
-      <p:nvGrpSpPr>
-        <p:cNvPr id="1" name=""/>
-        <p:cNvGrpSpPr/>
-        <p:nvPr/>
-      </p:nvGrpSpPr>
-      <p:grpSpPr>
-        <a:xfrm>
-          <a:off x="0" y="0"/>
-          <a:ext cx="0" cy="0"/>
-          <a:chOff x="0" y="0"/>
-          <a:chExt cx="0" cy="0"/>
-        </a:xfrm>
-      </p:grpSpPr>
-      <p:sp>
-        <p:nvSpPr>
-          <p:cNvPr id="2" name="Title 1"/>
-          <p:cNvSpPr>
-            <a:spLocks noGrp="1"/>
-          </p:cNvSpPr>
-          <p:nvPr>
-            <p:ph type="title"/>
-          </p:nvPr>
-        </p:nvSpPr>
-        <p:spPr/>
-        <p:txBody>
-          <a:bodyPr/>
-          <a:lstStyle/>
-          <a:p>
-            <a:r>
-              <a:t>Schema Evolution — The Real Problem</a:t>
-            </a:r>
-          </a:p>
-        </p:txBody>
-      </p:sp>
-      <p:sp>
-        <p:nvSpPr>
-          <p:cNvPr id="3" name="Content Placeholder 2"/>
-          <p:cNvSpPr>
-            <a:spLocks noGrp="1"/>
-          </p:cNvSpPr>
-          <p:nvPr>
-            <p:ph idx="1"/>
-          </p:nvPr>
-        </p:nvSpPr>
-        <p:spPr/>
-        <p:txBody>
-          <a:bodyPr/>
-          <a:lstStyle/>
-          <a:p>
-            <a:r>
-              <a:t> Systems change independently. A producer adds a field; a consumer hasn't been updated yet — or vice versa.</a:t>
-            </a:r>
-            <a:r>
-              <a:rPr b="1"/>
-              <a:t> Evolution rules</a:t>
-            </a:r>
-            <a:r>
-              <a:t> decide whether that's safe.</a:t>
-            </a:r>
-          </a:p>
-          <a:p>
-            <a:r>
-              <a:t> Two directions to reason about:</a:t>
-            </a:r>
-          </a:p>
-          <a:p>
-            <a:r>
-              <a:rPr b="1"/>
-              <a:t> Can a NEW consumer read OLD data?</a:t>
-            </a:r>
-            <a:r>
-              <a:t> (you upgraded the reader first)</a:t>
-            </a:r>
-          </a:p>
-          <a:p>
-            <a:r>
-              <a:rPr b="1"/>
-              <a:t> Can an OLD consumer read NEW data?</a:t>
-            </a:r>
-            <a:r>
-              <a:t> (the writer changed first)</a:t>
-            </a:r>
-          </a:p>
-          <a:p>
-            <a:r>
-              <a:t> Because Kafka</a:t>
-            </a:r>
-            <a:r>
-              <a:rPr b="1"/>
-              <a:t> retains</a:t>
-            </a:r>
-            <a:r>
-              <a:t> the log, a topic can hold</a:t>
-            </a:r>
-            <a:r>
-              <a:rPr b="1"/>
-              <a:t> old and new versions at once</a:t>
-            </a:r>
-            <a:r>
-              <a:t> — a consumer replaying history will meet both. So evolution isn't optional; it's the normal state.</a:t>
-            </a:r>
-          </a:p>
-        </p:txBody>
-      </p:sp>
-      <p:sp>
-        <p:nvSpPr>
-          <p:cNvPr id="4" name="TextBox 3"/>
-          <p:cNvSpPr txBox="1"/>
-          <p:nvPr/>
-        </p:nvSpPr>
-        <p:spPr>
-          <a:xfrm>
-            <a:off x="704088" y="8065008"/>
-            <a:ext cx="8915400" cy="228600"/>
-          </a:xfrm>
-          <a:prstGeom prst="rect">
-            <a:avLst/>
-          </a:prstGeom>
-          <a:noFill/>
-        </p:spPr>
-        <p:txBody>
-          <a:bodyPr wrap="none">
-            <a:spAutoFit/>
-          </a:bodyPr>
-          <a:lstStyle/>
-          <a:p>
-            <a:r>
-              <a:rPr sz="800">
-                <a:solidFill>
-                  <a:srgbClr val="000000"/>
-                </a:solidFill>
-              </a:rPr>
-              <a:t>Copyright © 2026 by Elephant Scale, All Rights Reserved</a:t>
-            </a:r>
-          </a:p>
-        </p:txBody>
-      </p:sp>
-    </p:spTree>
-  </p:cSld>
-  <p:clrMapOvr>
-    <a:masterClrMapping/>
-  </p:clrMapOvr>
-</p:sld>
-</file>
-
-<file path=ppt/slides/slide9.xml><?xml version="1.0" encoding="utf-8"?>
-<p:sld xmlns:a="http://schemas.openxmlformats.org/drawingml/2006/main" xmlns:r="http://schemas.openxmlformats.org/officeDocument/2006/relationships" xmlns:p="http://schemas.openxmlformats.org/presentationml/2006/main">
-  <p:cSld>
-    <p:spTree>
-      <p:nvGrpSpPr>
-        <p:cNvPr id="1" name=""/>
-        <p:cNvGrpSpPr/>
-        <p:nvPr/>
-      </p:nvGrpSpPr>
-      <p:grpSpPr>
-        <a:xfrm>
-          <a:off x="0" y="0"/>
-          <a:ext cx="0" cy="0"/>
-          <a:chOff x="0" y="0"/>
-          <a:chExt cx="0" cy="0"/>
-        </a:xfrm>
-      </p:grpSpPr>
-      <p:sp>
-        <p:nvSpPr>
-          <p:cNvPr id="2" name="Title 1"/>
-          <p:cNvSpPr>
-            <a:spLocks noGrp="1"/>
-          </p:cNvSpPr>
-          <p:nvPr>
-            <p:ph type="title"/>
-          </p:nvPr>
-        </p:nvSpPr>
-        <p:spPr/>
-        <p:txBody>
-          <a:bodyPr/>
-          <a:lstStyle/>
-          <a:p>
-            <a:r>
-              <a:t>Compatibility Modes</a:t>
-            </a:r>
-          </a:p>
-        </p:txBody>
-      </p:sp>
-      <p:sp>
-        <p:nvSpPr>
-          <p:cNvPr id="3" name="Content Placeholder 2"/>
-          <p:cNvSpPr>
-            <a:spLocks noGrp="1"/>
-          </p:cNvSpPr>
-          <p:nvPr>
-            <p:ph idx="1"/>
-          </p:nvPr>
-        </p:nvSpPr>
-        <p:spPr/>
-        <p:txBody>
-          <a:bodyPr/>
-          <a:lstStyle/>
-          <a:p>
-            <a:r>
-              <a:rPr dirty="0"/>
-              <a:t> The subject's mode defines what changes are allowed and who can upgrade first.</a:t>
-            </a:r>
-            <a:endParaRPr lang="en-US" dirty="0"/>
-          </a:p>
-          <a:p>
-            <a:endParaRPr lang="en-US" dirty="0"/>
-          </a:p>
-          <a:p>
-            <a:endParaRPr dirty="0"/>
-          </a:p>
-          <a:p>
-            <a:endParaRPr dirty="0"/>
-          </a:p>
-          <a:p>
-            <a:endParaRPr dirty="0"/>
-          </a:p>
-          <a:p>
-            <a:endParaRPr dirty="0"/>
-          </a:p>
-          <a:p>
-            <a:endParaRPr dirty="0"/>
-          </a:p>
-          <a:p>
-            <a:endParaRPr dirty="0"/>
-          </a:p>
-          <a:p>
-            <a:endParaRPr dirty="0"/>
-          </a:p>
-          <a:p>
-            <a:r>
-              <a:rPr b="1" dirty="0"/>
-              <a:t> BACKWARD</a:t>
-            </a:r>
-            <a:r>
-              <a:rPr dirty="0"/>
-              <a:t> is the default and most common: upgrade consumers, they still read the old log</a:t>
-            </a:r>
-          </a:p>
-          <a:p>
-            <a:r>
-              <a:rPr b="1" dirty="0"/>
-              <a:t> FORWARD</a:t>
-            </a:r>
-            <a:r>
-              <a:rPr dirty="0"/>
-              <a:t> when producers must move first and old consumers must tolerate new data</a:t>
-            </a:r>
-          </a:p>
-          <a:p>
-            <a:r>
-              <a:rPr b="1" dirty="0"/>
-              <a:t> FULL</a:t>
-            </a:r>
-            <a:r>
-              <a:rPr dirty="0"/>
-              <a:t> for the strictest cross-team contracts</a:t>
-            </a:r>
-          </a:p>
-        </p:txBody>
-      </p:sp>
-      <p:sp>
-        <p:nvSpPr>
-          <p:cNvPr id="4" name="TextBox 3"/>
-          <p:cNvSpPr txBox="1"/>
-          <p:nvPr/>
-        </p:nvSpPr>
-        <p:spPr>
-          <a:xfrm>
-            <a:off x="704088" y="8065008"/>
-            <a:ext cx="8915400" cy="228600"/>
-          </a:xfrm>
-          <a:prstGeom prst="rect">
-            <a:avLst/>
-          </a:prstGeom>
-          <a:noFill/>
-        </p:spPr>
-        <p:txBody>
-          <a:bodyPr wrap="none">
-            <a:spAutoFit/>
-          </a:bodyPr>
-          <a:lstStyle/>
-          <a:p>
-            <a:r>
-              <a:rPr sz="800">
-                <a:solidFill>
-                  <a:srgbClr val="000000"/>
-                </a:solidFill>
-              </a:rPr>
-              <a:t>Copyright © 2026 by Elephant Scale, All Rights Reserved</a:t>
-            </a:r>
-          </a:p>
-        </p:txBody>
-      </p:sp>
-      <p:graphicFrame>
-        <p:nvGraphicFramePr>
-          <p:cNvPr id="5" name="Table 4"/>
-          <p:cNvGraphicFramePr>
-            <a:graphicFrameLocks noGrp="1"/>
-          </p:cNvGraphicFramePr>
-          <p:nvPr>
-            <p:extLst>
-              <p:ext uri="{D42A27DB-BD31-4B8C-83A1-F6EECF244321}">
-                <p14:modId xmlns:p14="http://schemas.microsoft.com/office/powerpoint/2010/main" val="515643704"/>
+                <p14:modId xmlns:p14="http://schemas.microsoft.com/office/powerpoint/2010/main" val="1504125275"/>
               </p:ext>
             </p:extLst>
           </p:nvPr>
@@ -5570,6 +3314,2759 @@
           </a:graphicData>
         </a:graphic>
       </p:graphicFrame>
+    </p:spTree>
+  </p:cSld>
+  <p:clrMapOvr>
+    <a:masterClrMapping/>
+  </p:clrMapOvr>
+</p:sld>
+</file>
+
+<file path=ppt/slides/slide11.xml><?xml version="1.0" encoding="utf-8"?>
+<p:sld xmlns:a="http://schemas.openxmlformats.org/drawingml/2006/main" xmlns:r="http://schemas.openxmlformats.org/officeDocument/2006/relationships" xmlns:p="http://schemas.openxmlformats.org/presentationml/2006/main">
+  <p:cSld>
+    <p:spTree>
+      <p:nvGrpSpPr>
+        <p:cNvPr id="1" name=""/>
+        <p:cNvGrpSpPr/>
+        <p:nvPr/>
+      </p:nvGrpSpPr>
+      <p:grpSpPr>
+        <a:xfrm>
+          <a:off x="0" y="0"/>
+          <a:ext cx="0" cy="0"/>
+          <a:chOff x="0" y="0"/>
+          <a:chExt cx="0" cy="0"/>
+        </a:xfrm>
+      </p:grpSpPr>
+      <p:sp>
+        <p:nvSpPr>
+          <p:cNvPr id="2" name="Title 1"/>
+          <p:cNvSpPr>
+            <a:spLocks noGrp="1"/>
+          </p:cNvSpPr>
+          <p:nvPr>
+            <p:ph type="title"/>
+          </p:nvPr>
+        </p:nvSpPr>
+        <p:spPr/>
+        <p:txBody>
+          <a:bodyPr/>
+          <a:lstStyle/>
+          <a:p>
+            <a:r>
+              <a:t>The Golden Rule: Add With Defaults</a:t>
+            </a:r>
+          </a:p>
+        </p:txBody>
+      </p:sp>
+      <p:sp>
+        <p:nvSpPr>
+          <p:cNvPr id="3" name="Content Placeholder 2"/>
+          <p:cNvSpPr>
+            <a:spLocks noGrp="1"/>
+          </p:cNvSpPr>
+          <p:nvPr>
+            <p:ph idx="1"/>
+          </p:nvPr>
+        </p:nvSpPr>
+        <p:spPr/>
+        <p:txBody>
+          <a:bodyPr/>
+          <a:lstStyle/>
+          <a:p>
+            <a:r>
+              <a:t> The one habit that keeps evolution safe under BACKWARD/FULL:</a:t>
+            </a:r>
+          </a:p>
+          <a:p>
+            <a:r>
+              <a:rPr b="1"/>
+              <a:t> Adding a field?</a:t>
+            </a:r>
+            <a:r>
+              <a:t> Give it a</a:t>
+            </a:r>
+            <a:r>
+              <a:rPr b="1"/>
+              <a:t> default value</a:t>
+            </a:r>
+            <a:r>
+              <a:t> → old data (missing the field) still deserializes</a:t>
+            </a:r>
+          </a:p>
+          <a:p>
+            <a:r>
+              <a:rPr b="1"/>
+              <a:t> Removing a field?</a:t>
+            </a:r>
+            <a:r>
+              <a:t> Only safe if it</a:t>
+            </a:r>
+            <a:r>
+              <a:rPr b="1"/>
+              <a:t> had a default</a:t>
+            </a:r>
+            <a:r>
+              <a:t> → consumers expecting it fall back</a:t>
+            </a:r>
+          </a:p>
+          <a:p>
+            <a:r>
+              <a:rPr b="1"/>
+              <a:t> Renaming / changing a type?</a:t>
+            </a:r>
+            <a:r>
+              <a:t> Usually</a:t>
+            </a:r>
+            <a:r>
+              <a:rPr b="1"/>
+              <a:t> breaking</a:t>
+            </a:r>
+            <a:r>
+              <a:t> — use aliases or a new field instead</a:t>
+            </a:r>
+          </a:p>
+          <a:p>
+            <a:endParaRPr/>
+          </a:p>
+          <a:p>
+            <a:r>
+              <a:t> A new consumer reading an old record with no</a:t>
+            </a:r>
+            <a:r>
+              <a:rPr>
+                <a:latin typeface="Courier New"/>
+              </a:rPr>
+              <a:t> region</a:t>
+            </a:r>
+            <a:r>
+              <a:t> gets</a:t>
+            </a:r>
+            <a:r>
+              <a:rPr>
+                <a:latin typeface="Courier New"/>
+              </a:rPr>
+              <a:t> "UNKNOWN"</a:t>
+            </a:r>
+            <a:r>
+              <a:t> — no crash</a:t>
+            </a:r>
+          </a:p>
+          <a:p>
+            <a:r>
+              <a:t> This single discipline (defaults on new fields) covers the majority of real evolutions</a:t>
+            </a:r>
+          </a:p>
+        </p:txBody>
+      </p:sp>
+      <p:sp>
+        <p:nvSpPr>
+          <p:cNvPr id="4" name="TextBox 3"/>
+          <p:cNvSpPr txBox="1"/>
+          <p:nvPr/>
+        </p:nvSpPr>
+        <p:spPr>
+          <a:xfrm>
+            <a:off x="704088" y="8065008"/>
+            <a:ext cx="8915400" cy="228600"/>
+          </a:xfrm>
+          <a:prstGeom prst="rect">
+            <a:avLst/>
+          </a:prstGeom>
+          <a:noFill/>
+        </p:spPr>
+        <p:txBody>
+          <a:bodyPr wrap="none">
+            <a:spAutoFit/>
+          </a:bodyPr>
+          <a:lstStyle/>
+          <a:p>
+            <a:r>
+              <a:rPr sz="800">
+                <a:solidFill>
+                  <a:srgbClr val="000000"/>
+                </a:solidFill>
+              </a:rPr>
+              <a:t>Copyright © 2026 by Elephant Scale, All Rights Reserved</a:t>
+            </a:r>
+          </a:p>
+        </p:txBody>
+      </p:sp>
+      <p:pic>
+        <p:nvPicPr>
+          <p:cNvPr id="5" name="Picture 4" descr="1.png"/>
+          <p:cNvPicPr>
+            <a:picLocks noChangeAspect="1"/>
+          </p:cNvPicPr>
+          <p:nvPr/>
+        </p:nvPicPr>
+        <p:blipFill>
+          <a:blip r:embed="rId2"/>
+          <a:stretch>
+            <a:fillRect/>
+          </a:stretch>
+        </p:blipFill>
+        <p:spPr>
+          <a:xfrm>
+            <a:off x="0" y="3108960"/>
+            <a:ext cx="9855200" cy="520700"/>
+          </a:xfrm>
+          <a:prstGeom prst="rect">
+            <a:avLst/>
+          </a:prstGeom>
+        </p:spPr>
+      </p:pic>
+    </p:spTree>
+  </p:cSld>
+  <p:clrMapOvr>
+    <a:masterClrMapping/>
+  </p:clrMapOvr>
+</p:sld>
+</file>
+
+<file path=ppt/slides/slide12.xml><?xml version="1.0" encoding="utf-8"?>
+<p:sld xmlns:a="http://schemas.openxmlformats.org/drawingml/2006/main" xmlns:r="http://schemas.openxmlformats.org/officeDocument/2006/relationships" xmlns:p="http://schemas.openxmlformats.org/presentationml/2006/main">
+  <p:cSld>
+    <p:spTree>
+      <p:nvGrpSpPr>
+        <p:cNvPr id="1" name=""/>
+        <p:cNvGrpSpPr/>
+        <p:nvPr/>
+      </p:nvGrpSpPr>
+      <p:grpSpPr>
+        <a:xfrm>
+          <a:off x="0" y="0"/>
+          <a:ext cx="0" cy="0"/>
+          <a:chOff x="0" y="0"/>
+          <a:chExt cx="0" cy="0"/>
+        </a:xfrm>
+      </p:grpSpPr>
+      <p:sp>
+        <p:nvSpPr>
+          <p:cNvPr id="2" name="Title 1"/>
+          <p:cNvSpPr>
+            <a:spLocks noGrp="1"/>
+          </p:cNvSpPr>
+          <p:nvPr>
+            <p:ph type="title"/>
+          </p:nvPr>
+        </p:nvSpPr>
+        <p:spPr/>
+        <p:txBody>
+          <a:bodyPr/>
+          <a:lstStyle/>
+          <a:p>
+            <a:r>
+              <a:t>Data Contracts as Governance</a:t>
+            </a:r>
+          </a:p>
+        </p:txBody>
+      </p:sp>
+      <p:sp>
+        <p:nvSpPr>
+          <p:cNvPr id="3" name="Content Placeholder 2"/>
+          <p:cNvSpPr>
+            <a:spLocks noGrp="1"/>
+          </p:cNvSpPr>
+          <p:nvPr>
+            <p:ph idx="1"/>
+          </p:nvPr>
+        </p:nvSpPr>
+        <p:spPr/>
+        <p:txBody>
+          <a:bodyPr/>
+          <a:lstStyle/>
+          <a:p>
+            <a:r>
+              <a:t> The Schema Registry is a</a:t>
+            </a:r>
+            <a:r>
+              <a:rPr b="1"/>
+              <a:t> governance tool</a:t>
+            </a:r>
+            <a:r>
+              <a:t> , not just a codec. For an organization with many systems sharing events, it's how teams stay coordinated</a:t>
+            </a:r>
+            <a:r>
+              <a:rPr b="1"/>
+              <a:t> without</a:t>
+            </a:r>
+            <a:r>
+              <a:t> a change-control meeting.</a:t>
+            </a:r>
+          </a:p>
+          <a:p>
+            <a:r>
+              <a:t> The schema</a:t>
+            </a:r>
+            <a:r>
+              <a:rPr b="1"/>
+              <a:t> is the contract</a:t>
+            </a:r>
+            <a:r>
+              <a:t> between producing and consuming systems</a:t>
+            </a:r>
+          </a:p>
+          <a:p>
+            <a:r>
+              <a:t> Compatibility rules let teams</a:t>
+            </a:r>
+            <a:r>
+              <a:rPr b="1"/>
+              <a:t> deploy independently</a:t>
+            </a:r>
+            <a:r>
+              <a:t> — no lock-step, coordinated-outage upgrades</a:t>
+            </a:r>
+          </a:p>
+          <a:p>
+            <a:r>
+              <a:t> Breaking changes are</a:t>
+            </a:r>
+            <a:r>
+              <a:rPr b="1"/>
+              <a:t> caught at registration</a:t>
+            </a:r>
+            <a:r>
+              <a:t> , in CI, not in production at 2 AM</a:t>
+            </a:r>
+          </a:p>
+          <a:p>
+            <a:r>
+              <a:t> New consumers can be added anytime — they read the schema and understand the topic</a:t>
+            </a:r>
+          </a:p>
+          <a:p>
+            <a:r>
+              <a:rPr b="1"/>
+              <a:t> Business value:</a:t>
+            </a:r>
+            <a:r>
+              <a:t> independent teams, safe change, no big-bang upgrade windows.</a:t>
+            </a:r>
+          </a:p>
+        </p:txBody>
+      </p:sp>
+      <p:sp>
+        <p:nvSpPr>
+          <p:cNvPr id="4" name="TextBox 3"/>
+          <p:cNvSpPr txBox="1"/>
+          <p:nvPr/>
+        </p:nvSpPr>
+        <p:spPr>
+          <a:xfrm>
+            <a:off x="704088" y="8065008"/>
+            <a:ext cx="8915400" cy="228600"/>
+          </a:xfrm>
+          <a:prstGeom prst="rect">
+            <a:avLst/>
+          </a:prstGeom>
+          <a:noFill/>
+        </p:spPr>
+        <p:txBody>
+          <a:bodyPr wrap="none">
+            <a:spAutoFit/>
+          </a:bodyPr>
+          <a:lstStyle/>
+          <a:p>
+            <a:r>
+              <a:rPr sz="800">
+                <a:solidFill>
+                  <a:srgbClr val="000000"/>
+                </a:solidFill>
+              </a:rPr>
+              <a:t>Copyright © 2026 by Elephant Scale, All Rights Reserved</a:t>
+            </a:r>
+          </a:p>
+        </p:txBody>
+      </p:sp>
+    </p:spTree>
+  </p:cSld>
+  <p:clrMapOvr>
+    <a:masterClrMapping/>
+  </p:clrMapOvr>
+</p:sld>
+</file>
+
+<file path=ppt/slides/slide13.xml><?xml version="1.0" encoding="utf-8"?>
+<p:sld xmlns:a="http://schemas.openxmlformats.org/drawingml/2006/main" xmlns:r="http://schemas.openxmlformats.org/officeDocument/2006/relationships" xmlns:p="http://schemas.openxmlformats.org/presentationml/2006/main">
+  <p:cSld>
+    <p:spTree>
+      <p:nvGrpSpPr>
+        <p:cNvPr id="1" name=""/>
+        <p:cNvGrpSpPr/>
+        <p:nvPr/>
+      </p:nvGrpSpPr>
+      <p:grpSpPr>
+        <a:xfrm>
+          <a:off x="0" y="0"/>
+          <a:ext cx="0" cy="0"/>
+          <a:chOff x="0" y="0"/>
+          <a:chExt cx="0" cy="0"/>
+        </a:xfrm>
+      </p:grpSpPr>
+      <p:sp>
+        <p:nvSpPr>
+          <p:cNvPr id="2" name="Title 1"/>
+          <p:cNvSpPr>
+            <a:spLocks noGrp="1"/>
+          </p:cNvSpPr>
+          <p:nvPr>
+            <p:ph type="title"/>
+          </p:nvPr>
+        </p:nvSpPr>
+        <p:spPr/>
+        <p:txBody>
+          <a:bodyPr/>
+          <a:lstStyle/>
+          <a:p>
+            <a:r>
+              <a:t>Lab 05 — What You'll Do (Java)</a:t>
+            </a:r>
+          </a:p>
+        </p:txBody>
+      </p:sp>
+      <p:sp>
+        <p:nvSpPr>
+          <p:cNvPr id="3" name="Content Placeholder 2"/>
+          <p:cNvSpPr>
+            <a:spLocks noGrp="1"/>
+          </p:cNvSpPr>
+          <p:nvPr>
+            <p:ph idx="1"/>
+          </p:nvPr>
+        </p:nvSpPr>
+        <p:spPr/>
+        <p:txBody>
+          <a:bodyPr/>
+          <a:lstStyle/>
+          <a:p>
+            <a:r>
+              <a:t> Define an</a:t>
+            </a:r>
+            <a:r>
+              <a:rPr b="1"/>
+              <a:t> Avro schema</a:t>
+            </a:r>
+            <a:r>
+              <a:t> and produce records with</a:t>
+            </a:r>
+            <a:r>
+              <a:rPr>
+                <a:latin typeface="Courier New"/>
+              </a:rPr>
+              <a:t> KafkaAvroSerializer</a:t>
+            </a:r>
+          </a:p>
+          <a:p>
+            <a:r>
+              <a:t> Inspect the registered schema via the</a:t>
+            </a:r>
+            <a:r>
+              <a:rPr b="1"/>
+              <a:t> registry REST API</a:t>
+            </a:r>
+            <a:r>
+              <a:t> (</a:t>
+            </a:r>
+            <a:r>
+              <a:rPr>
+                <a:latin typeface="Courier New"/>
+              </a:rPr>
+              <a:t> :8081</a:t>
+            </a:r>
+            <a:r>
+              <a:t> )</a:t>
+            </a:r>
+          </a:p>
+          <a:p>
+            <a:r>
+              <a:t> Consume with</a:t>
+            </a:r>
+            <a:r>
+              <a:rPr>
+                <a:latin typeface="Courier New"/>
+              </a:rPr>
+              <a:t> KafkaAvroDeserializer</a:t>
+            </a:r>
+          </a:p>
+          <a:p>
+            <a:r>
+              <a:rPr b="1"/>
+              <a:t> Evolve</a:t>
+            </a:r>
+            <a:r>
+              <a:t> the schema (add a field with a default) under</a:t>
+            </a:r>
+            <a:r>
+              <a:rPr b="1"/>
+              <a:t> BACKWARD</a:t>
+            </a:r>
+            <a:r>
+              <a:t> compatibility — prove old consumers still work</a:t>
+            </a:r>
+          </a:p>
+          <a:p>
+            <a:r>
+              <a:t> Attempt an</a:t>
+            </a:r>
+            <a:r>
+              <a:rPr b="1"/>
+              <a:t> incompatible</a:t>
+            </a:r>
+            <a:r>
+              <a:t> change and watch the registry</a:t>
+            </a:r>
+            <a:r>
+              <a:rPr b="1"/>
+              <a:t> reject</a:t>
+            </a:r>
+            <a:r>
+              <a:t> it</a:t>
+            </a:r>
+          </a:p>
+          <a:p>
+            <a:r>
+              <a:rPr i="1"/>
+              <a:t> →</a:t>
+            </a:r>
+          </a:p>
+        </p:txBody>
+      </p:sp>
+      <p:sp>
+        <p:nvSpPr>
+          <p:cNvPr id="4" name="TextBox 3"/>
+          <p:cNvSpPr txBox="1"/>
+          <p:nvPr/>
+        </p:nvSpPr>
+        <p:spPr>
+          <a:xfrm>
+            <a:off x="704088" y="8065008"/>
+            <a:ext cx="8915400" cy="228600"/>
+          </a:xfrm>
+          <a:prstGeom prst="rect">
+            <a:avLst/>
+          </a:prstGeom>
+          <a:noFill/>
+        </p:spPr>
+        <p:txBody>
+          <a:bodyPr wrap="none">
+            <a:spAutoFit/>
+          </a:bodyPr>
+          <a:lstStyle/>
+          <a:p>
+            <a:r>
+              <a:rPr sz="800">
+                <a:solidFill>
+                  <a:srgbClr val="000000"/>
+                </a:solidFill>
+              </a:rPr>
+              <a:t>Copyright © 2026 by Elephant Scale, All Rights Reserved</a:t>
+            </a:r>
+          </a:p>
+        </p:txBody>
+      </p:sp>
+    </p:spTree>
+  </p:cSld>
+  <p:clrMapOvr>
+    <a:masterClrMapping/>
+  </p:clrMapOvr>
+</p:sld>
+</file>
+
+<file path=ppt/slides/slide14.xml><?xml version="1.0" encoding="utf-8"?>
+<p:sld xmlns:a="http://schemas.openxmlformats.org/drawingml/2006/main" xmlns:r="http://schemas.openxmlformats.org/officeDocument/2006/relationships" xmlns:p="http://schemas.openxmlformats.org/presentationml/2006/main">
+  <p:cSld>
+    <p:spTree>
+      <p:nvGrpSpPr>
+        <p:cNvPr id="1" name=""/>
+        <p:cNvGrpSpPr/>
+        <p:nvPr/>
+      </p:nvGrpSpPr>
+      <p:grpSpPr>
+        <a:xfrm>
+          <a:off x="0" y="0"/>
+          <a:ext cx="0" cy="0"/>
+          <a:chOff x="0" y="0"/>
+          <a:chExt cx="0" cy="0"/>
+        </a:xfrm>
+      </p:grpSpPr>
+      <p:sp>
+        <p:nvSpPr>
+          <p:cNvPr id="2" name="Title 1"/>
+          <p:cNvSpPr>
+            <a:spLocks noGrp="1"/>
+          </p:cNvSpPr>
+          <p:nvPr>
+            <p:ph type="title"/>
+          </p:nvPr>
+        </p:nvSpPr>
+        <p:spPr/>
+        <p:txBody>
+          <a:bodyPr/>
+          <a:lstStyle/>
+          <a:p>
+            <a:r>
+              <a:t>Summary</a:t>
+            </a:r>
+          </a:p>
+        </p:txBody>
+      </p:sp>
+      <p:sp>
+        <p:nvSpPr>
+          <p:cNvPr id="3" name="Content Placeholder 2"/>
+          <p:cNvSpPr>
+            <a:spLocks noGrp="1"/>
+          </p:cNvSpPr>
+          <p:nvPr>
+            <p:ph idx="1"/>
+          </p:nvPr>
+        </p:nvSpPr>
+        <p:spPr/>
+        <p:txBody>
+          <a:bodyPr/>
+          <a:lstStyle/>
+          <a:p>
+            <a:r>
+              <a:t> Kafka moves bytes; a</a:t>
+            </a:r>
+            <a:r>
+              <a:rPr b="1"/>
+              <a:t> schema</a:t>
+            </a:r>
+            <a:r>
+              <a:t> is the enforced contract on their meaning</a:t>
+            </a:r>
+          </a:p>
+          <a:p>
+            <a:r>
+              <a:rPr b="1"/>
+              <a:t> Avro + Schema Registry</a:t>
+            </a:r>
+            <a:r>
+              <a:t> is the mainstream pattern: schemas travel</a:t>
+            </a:r>
+            <a:r>
+              <a:rPr b="1"/>
+              <a:t> by ID</a:t>
+            </a:r>
+            <a:r>
+              <a:t> , serdes do the work</a:t>
+            </a:r>
+          </a:p>
+          <a:p>
+            <a:r>
+              <a:t> Schemas live as</a:t>
+            </a:r>
+            <a:r>
+              <a:rPr b="1"/>
+              <a:t> subjects</a:t>
+            </a:r>
+            <a:r>
+              <a:t> with</a:t>
+            </a:r>
+            <a:r>
+              <a:rPr b="1"/>
+              <a:t> versions</a:t>
+            </a:r>
+            <a:r>
+              <a:t> and a</a:t>
+            </a:r>
+            <a:r>
+              <a:rPr b="1"/>
+              <a:t> compatibility rule</a:t>
+            </a:r>
+            <a:r>
+              <a:t> that the registry enforces</a:t>
+            </a:r>
+          </a:p>
+          <a:p>
+            <a:r>
+              <a:rPr b="1"/>
+              <a:t> BACKWARD / FORWARD / FULL</a:t>
+            </a:r>
+            <a:r>
+              <a:t> decide what changes are legal and</a:t>
+            </a:r>
+            <a:r>
+              <a:rPr b="1"/>
+              <a:t> who upgrades first</a:t>
+            </a:r>
+          </a:p>
+          <a:p>
+            <a:r>
+              <a:rPr b="1"/>
+              <a:t> Add fields with defaults</a:t>
+            </a:r>
+            <a:r>
+              <a:t> — the golden rule for safe evolution</a:t>
+            </a:r>
+          </a:p>
+          <a:p>
+            <a:r>
+              <a:t> The registry is</a:t>
+            </a:r>
+            <a:r>
+              <a:rPr b="1"/>
+              <a:t> governance</a:t>
+            </a:r>
+            <a:r>
+              <a:t> : independent deploys, safe change, no coordinated-outage upgrades</a:t>
+            </a:r>
+          </a:p>
+        </p:txBody>
+      </p:sp>
+      <p:sp>
+        <p:nvSpPr>
+          <p:cNvPr id="4" name="TextBox 3"/>
+          <p:cNvSpPr txBox="1"/>
+          <p:nvPr/>
+        </p:nvSpPr>
+        <p:spPr>
+          <a:xfrm>
+            <a:off x="704088" y="8065008"/>
+            <a:ext cx="8915400" cy="228600"/>
+          </a:xfrm>
+          <a:prstGeom prst="rect">
+            <a:avLst/>
+          </a:prstGeom>
+          <a:noFill/>
+        </p:spPr>
+        <p:txBody>
+          <a:bodyPr wrap="none">
+            <a:spAutoFit/>
+          </a:bodyPr>
+          <a:lstStyle/>
+          <a:p>
+            <a:r>
+              <a:rPr sz="800">
+                <a:solidFill>
+                  <a:srgbClr val="000000"/>
+                </a:solidFill>
+              </a:rPr>
+              <a:t>Copyright © 2026 by Elephant Scale, All Rights Reserved</a:t>
+            </a:r>
+          </a:p>
+        </p:txBody>
+      </p:sp>
+    </p:spTree>
+  </p:cSld>
+  <p:clrMapOvr>
+    <a:masterClrMapping/>
+  </p:clrMapOvr>
+</p:sld>
+</file>
+
+<file path=ppt/slides/slide2.xml><?xml version="1.0" encoding="utf-8"?>
+<p:sld xmlns:a="http://schemas.openxmlformats.org/drawingml/2006/main" xmlns:r="http://schemas.openxmlformats.org/officeDocument/2006/relationships" xmlns:p="http://schemas.openxmlformats.org/presentationml/2006/main">
+  <p:cSld>
+    <p:spTree>
+      <p:nvGrpSpPr>
+        <p:cNvPr id="1" name=""/>
+        <p:cNvGrpSpPr/>
+        <p:nvPr/>
+      </p:nvGrpSpPr>
+      <p:grpSpPr>
+        <a:xfrm>
+          <a:off x="0" y="0"/>
+          <a:ext cx="0" cy="0"/>
+          <a:chOff x="0" y="0"/>
+          <a:chExt cx="0" cy="0"/>
+        </a:xfrm>
+      </p:grpSpPr>
+      <p:sp>
+        <p:nvSpPr>
+          <p:cNvPr id="2" name="Title 1"/>
+          <p:cNvSpPr>
+            <a:spLocks noGrp="1"/>
+          </p:cNvSpPr>
+          <p:nvPr>
+            <p:ph type="title"/>
+          </p:nvPr>
+        </p:nvSpPr>
+        <p:spPr/>
+        <p:txBody>
+          <a:bodyPr/>
+          <a:lstStyle/>
+          <a:p>
+            <a:r>
+              <a:t>Agenda</a:t>
+            </a:r>
+          </a:p>
+        </p:txBody>
+      </p:sp>
+      <p:sp>
+        <p:nvSpPr>
+          <p:cNvPr id="3" name="Content Placeholder 2"/>
+          <p:cNvSpPr>
+            <a:spLocks noGrp="1"/>
+          </p:cNvSpPr>
+          <p:nvPr>
+            <p:ph idx="1"/>
+          </p:nvPr>
+        </p:nvSpPr>
+        <p:spPr/>
+        <p:txBody>
+          <a:bodyPr/>
+          <a:lstStyle/>
+          <a:p>
+            <a:r>
+              <a:t> Message formats: JSON, Avro, Protobuf</a:t>
+            </a:r>
+          </a:p>
+          <a:p>
+            <a:r>
+              <a:t> The Schema Registry: registering schemas, schema IDs, serdes</a:t>
+            </a:r>
+          </a:p>
+          <a:p>
+            <a:r>
+              <a:t> Schema evolution and compatibility (BACKWARD / FORWARD / FULL)</a:t>
+            </a:r>
+          </a:p>
+          <a:p>
+            <a:r>
+              <a:t> Data contracts as a governance practice</a:t>
+            </a:r>
+          </a:p>
+          <a:p>
+            <a:r>
+              <a:t> Hands-on: produce/consume Avro with the Schema Registry; evolve a schema</a:t>
+            </a:r>
+          </a:p>
+        </p:txBody>
+      </p:sp>
+      <p:sp>
+        <p:nvSpPr>
+          <p:cNvPr id="4" name="TextBox 3"/>
+          <p:cNvSpPr txBox="1"/>
+          <p:nvPr/>
+        </p:nvSpPr>
+        <p:spPr>
+          <a:xfrm>
+            <a:off x="704088" y="8065008"/>
+            <a:ext cx="8915400" cy="228600"/>
+          </a:xfrm>
+          <a:prstGeom prst="rect">
+            <a:avLst/>
+          </a:prstGeom>
+          <a:noFill/>
+        </p:spPr>
+        <p:txBody>
+          <a:bodyPr wrap="none">
+            <a:spAutoFit/>
+          </a:bodyPr>
+          <a:lstStyle/>
+          <a:p>
+            <a:r>
+              <a:rPr sz="800">
+                <a:solidFill>
+                  <a:srgbClr val="000000"/>
+                </a:solidFill>
+              </a:rPr>
+              <a:t>Copyright © 2026 by Elephant Scale, All Rights Reserved</a:t>
+            </a:r>
+          </a:p>
+        </p:txBody>
+      </p:sp>
+    </p:spTree>
+  </p:cSld>
+  <p:clrMapOvr>
+    <a:masterClrMapping/>
+  </p:clrMapOvr>
+</p:sld>
+</file>
+
+<file path=ppt/slides/slide3.xml><?xml version="1.0" encoding="utf-8"?>
+<p:sld xmlns:a="http://schemas.openxmlformats.org/drawingml/2006/main" xmlns:r="http://schemas.openxmlformats.org/officeDocument/2006/relationships" xmlns:p="http://schemas.openxmlformats.org/presentationml/2006/main">
+  <p:cSld>
+    <p:spTree>
+      <p:nvGrpSpPr>
+        <p:cNvPr id="1" name=""/>
+        <p:cNvGrpSpPr/>
+        <p:nvPr/>
+      </p:nvGrpSpPr>
+      <p:grpSpPr>
+        <a:xfrm>
+          <a:off x="0" y="0"/>
+          <a:ext cx="0" cy="0"/>
+          <a:chOff x="0" y="0"/>
+          <a:chExt cx="0" cy="0"/>
+        </a:xfrm>
+      </p:grpSpPr>
+      <p:sp>
+        <p:nvSpPr>
+          <p:cNvPr id="2" name="Title 1"/>
+          <p:cNvSpPr>
+            <a:spLocks noGrp="1"/>
+          </p:cNvSpPr>
+          <p:nvPr>
+            <p:ph type="title"/>
+          </p:nvPr>
+        </p:nvSpPr>
+        <p:spPr/>
+        <p:txBody>
+          <a:bodyPr/>
+          <a:lstStyle/>
+          <a:p>
+            <a:r>
+              <a:t>Kafka Stores Bytes — Someone Must Agree on Meaning</a:t>
+            </a:r>
+          </a:p>
+        </p:txBody>
+      </p:sp>
+      <p:sp>
+        <p:nvSpPr>
+          <p:cNvPr id="3" name="Content Placeholder 2"/>
+          <p:cNvSpPr>
+            <a:spLocks noGrp="1"/>
+          </p:cNvSpPr>
+          <p:nvPr>
+            <p:ph idx="1"/>
+          </p:nvPr>
+        </p:nvSpPr>
+        <p:spPr/>
+        <p:txBody>
+          <a:bodyPr/>
+          <a:lstStyle/>
+          <a:p>
+            <a:r>
+              <a:rPr dirty="0"/>
+              <a:t> From the producer module: Kafka moves</a:t>
+            </a:r>
+            <a:r>
+              <a:rPr b="1" dirty="0"/>
+              <a:t> bytes</a:t>
+            </a:r>
+            <a:r>
+              <a:rPr dirty="0"/>
+              <a:t> . The producer serializes; the consumer deserializes. Nothing in the broker enforces what those bytes</a:t>
+            </a:r>
+            <a:r>
+              <a:rPr i="1" dirty="0"/>
+              <a:t> mean</a:t>
+            </a:r>
+            <a:r>
+              <a:rPr dirty="0"/>
+              <a:t> .</a:t>
+            </a:r>
+          </a:p>
+          <a:p>
+            <a:endParaRPr lang="en-US" dirty="0"/>
+          </a:p>
+          <a:p>
+            <a:endParaRPr lang="en-US" dirty="0"/>
+          </a:p>
+          <a:p>
+            <a:endParaRPr dirty="0"/>
+          </a:p>
+          <a:p>
+            <a:r>
+              <a:rPr dirty="0"/>
+              <a:t> If producer and consumer disagree on the shape, the consumer reads</a:t>
+            </a:r>
+            <a:r>
+              <a:rPr b="1" dirty="0"/>
+              <a:t> garbage</a:t>
+            </a:r>
+            <a:r>
+              <a:rPr dirty="0"/>
+              <a:t> — or crashes</a:t>
+            </a:r>
+          </a:p>
+          <a:p>
+            <a:r>
+              <a:rPr dirty="0"/>
+              <a:t> With</a:t>
+            </a:r>
+            <a:r>
+              <a:rPr b="1" dirty="0"/>
+              <a:t> several systems</a:t>
+            </a:r>
+            <a:r>
+              <a:rPr dirty="0"/>
+              <a:t> producing and consuming the same topics, "just agree informally" doesn't scale</a:t>
+            </a:r>
+          </a:p>
+          <a:p>
+            <a:r>
+              <a:rPr dirty="0"/>
+              <a:t> You need a</a:t>
+            </a:r>
+            <a:r>
+              <a:rPr b="1" dirty="0"/>
+              <a:t> contract</a:t>
+            </a:r>
+            <a:r>
+              <a:rPr dirty="0"/>
+              <a:t> on the data's shape — enforced, versioned, shared</a:t>
+            </a:r>
+          </a:p>
+          <a:p>
+            <a:r>
+              <a:rPr dirty="0"/>
+              <a:t> That contract is a</a:t>
+            </a:r>
+            <a:r>
+              <a:rPr b="1" dirty="0"/>
+              <a:t> schema</a:t>
+            </a:r>
+            <a:r>
+              <a:rPr dirty="0"/>
+              <a:t> , and the Schema Registry is where it lives.</a:t>
+            </a:r>
+          </a:p>
+        </p:txBody>
+      </p:sp>
+      <p:sp>
+        <p:nvSpPr>
+          <p:cNvPr id="4" name="TextBox 3"/>
+          <p:cNvSpPr txBox="1"/>
+          <p:nvPr/>
+        </p:nvSpPr>
+        <p:spPr>
+          <a:xfrm>
+            <a:off x="704088" y="8065008"/>
+            <a:ext cx="8915400" cy="228600"/>
+          </a:xfrm>
+          <a:prstGeom prst="rect">
+            <a:avLst/>
+          </a:prstGeom>
+          <a:noFill/>
+        </p:spPr>
+        <p:txBody>
+          <a:bodyPr wrap="none">
+            <a:spAutoFit/>
+          </a:bodyPr>
+          <a:lstStyle/>
+          <a:p>
+            <a:r>
+              <a:rPr sz="800">
+                <a:solidFill>
+                  <a:srgbClr val="000000"/>
+                </a:solidFill>
+              </a:rPr>
+              <a:t>Copyright © 2026 by Elephant Scale, All Rights Reserved</a:t>
+            </a:r>
+          </a:p>
+        </p:txBody>
+      </p:sp>
+      <p:pic>
+        <p:nvPicPr>
+          <p:cNvPr id="5" name="Picture 4" descr="1.png"/>
+          <p:cNvPicPr>
+            <a:picLocks noChangeAspect="1"/>
+          </p:cNvPicPr>
+          <p:nvPr/>
+        </p:nvPicPr>
+        <p:blipFill>
+          <a:blip r:embed="rId3"/>
+          <a:stretch>
+            <a:fillRect/>
+          </a:stretch>
+        </p:blipFill>
+        <p:spPr>
+          <a:xfrm>
+            <a:off x="217487" y="2472531"/>
+            <a:ext cx="8915400" cy="550553"/>
+          </a:xfrm>
+          <a:prstGeom prst="rect">
+            <a:avLst/>
+          </a:prstGeom>
+        </p:spPr>
+      </p:pic>
+    </p:spTree>
+  </p:cSld>
+  <p:clrMapOvr>
+    <a:masterClrMapping/>
+  </p:clrMapOvr>
+</p:sld>
+</file>
+
+<file path=ppt/slides/slide4.xml><?xml version="1.0" encoding="utf-8"?>
+<p:sld xmlns:a="http://schemas.openxmlformats.org/drawingml/2006/main" xmlns:r="http://schemas.openxmlformats.org/officeDocument/2006/relationships" xmlns:p="http://schemas.openxmlformats.org/presentationml/2006/main">
+  <p:cSld>
+    <p:spTree>
+      <p:nvGrpSpPr>
+        <p:cNvPr id="1" name=""/>
+        <p:cNvGrpSpPr/>
+        <p:nvPr/>
+      </p:nvGrpSpPr>
+      <p:grpSpPr>
+        <a:xfrm>
+          <a:off x="0" y="0"/>
+          <a:ext cx="0" cy="0"/>
+          <a:chOff x="0" y="0"/>
+          <a:chExt cx="0" cy="0"/>
+        </a:xfrm>
+      </p:grpSpPr>
+      <p:sp>
+        <p:nvSpPr>
+          <p:cNvPr id="2" name="Title 1"/>
+          <p:cNvSpPr>
+            <a:spLocks noGrp="1"/>
+          </p:cNvSpPr>
+          <p:nvPr>
+            <p:ph type="title"/>
+          </p:nvPr>
+        </p:nvSpPr>
+        <p:spPr/>
+        <p:txBody>
+          <a:bodyPr/>
+          <a:lstStyle/>
+          <a:p>
+            <a:r>
+              <a:t>Message Formats</a:t>
+            </a:r>
+          </a:p>
+        </p:txBody>
+      </p:sp>
+      <p:sp>
+        <p:nvSpPr>
+          <p:cNvPr id="3" name="Content Placeholder 2"/>
+          <p:cNvSpPr>
+            <a:spLocks noGrp="1"/>
+          </p:cNvSpPr>
+          <p:nvPr>
+            <p:ph idx="1"/>
+          </p:nvPr>
+        </p:nvSpPr>
+        <p:spPr/>
+        <p:txBody>
+          <a:bodyPr/>
+          <a:lstStyle/>
+          <a:p>
+            <a:r>
+              <a:rPr dirty="0"/>
+              <a:t> Three common ways to structure event payloads:</a:t>
+            </a:r>
+            <a:endParaRPr lang="en-US" dirty="0"/>
+          </a:p>
+          <a:p>
+            <a:endParaRPr lang="en-US" dirty="0"/>
+          </a:p>
+          <a:p>
+            <a:endParaRPr lang="en-US" dirty="0"/>
+          </a:p>
+          <a:p>
+            <a:endParaRPr lang="en-US" dirty="0"/>
+          </a:p>
+          <a:p>
+            <a:endParaRPr dirty="0"/>
+          </a:p>
+          <a:p>
+            <a:endParaRPr dirty="0"/>
+          </a:p>
+          <a:p>
+            <a:endParaRPr dirty="0"/>
+          </a:p>
+          <a:p>
+            <a:endParaRPr dirty="0"/>
+          </a:p>
+          <a:p>
+            <a:endParaRPr dirty="0"/>
+          </a:p>
+          <a:p>
+            <a:endParaRPr dirty="0"/>
+          </a:p>
+          <a:p>
+            <a:r>
+              <a:rPr dirty="0"/>
+              <a:t> Plain JSON is easy but</a:t>
+            </a:r>
+            <a:r>
+              <a:rPr b="1" dirty="0"/>
+              <a:t> unenforced</a:t>
+            </a:r>
+            <a:r>
+              <a:rPr dirty="0"/>
+              <a:t> — every consumer hopes the fields are there</a:t>
+            </a:r>
+          </a:p>
+          <a:p>
+            <a:r>
+              <a:rPr b="1" dirty="0"/>
+              <a:t> Avro / </a:t>
+            </a:r>
+            <a:r>
+              <a:rPr b="1" dirty="0" err="1"/>
+              <a:t>Protobuf</a:t>
+            </a:r>
+            <a:r>
+              <a:rPr dirty="0"/>
+              <a:t> carry a real schema, are compact on the wire, and support</a:t>
+            </a:r>
+            <a:r>
+              <a:rPr b="1" dirty="0"/>
+              <a:t> safe evolution</a:t>
+            </a:r>
+          </a:p>
+          <a:p>
+            <a:r>
+              <a:rPr dirty="0"/>
+              <a:t> This course uses</a:t>
+            </a:r>
+            <a:r>
+              <a:rPr b="1" dirty="0"/>
+              <a:t> Avro</a:t>
+            </a:r>
+            <a:r>
+              <a:rPr dirty="0"/>
+              <a:t> with the Schema Registry — the mainstream Kafka pattern</a:t>
+            </a:r>
+          </a:p>
+        </p:txBody>
+      </p:sp>
+      <p:sp>
+        <p:nvSpPr>
+          <p:cNvPr id="4" name="TextBox 3"/>
+          <p:cNvSpPr txBox="1"/>
+          <p:nvPr/>
+        </p:nvSpPr>
+        <p:spPr>
+          <a:xfrm>
+            <a:off x="704088" y="8065008"/>
+            <a:ext cx="8915400" cy="228600"/>
+          </a:xfrm>
+          <a:prstGeom prst="rect">
+            <a:avLst/>
+          </a:prstGeom>
+          <a:noFill/>
+        </p:spPr>
+        <p:txBody>
+          <a:bodyPr wrap="none">
+            <a:spAutoFit/>
+          </a:bodyPr>
+          <a:lstStyle/>
+          <a:p>
+            <a:r>
+              <a:rPr sz="800">
+                <a:solidFill>
+                  <a:srgbClr val="000000"/>
+                </a:solidFill>
+              </a:rPr>
+              <a:t>Copyright © 2026 by Elephant Scale, All Rights Reserved</a:t>
+            </a:r>
+          </a:p>
+        </p:txBody>
+      </p:sp>
+      <p:graphicFrame>
+        <p:nvGraphicFramePr>
+          <p:cNvPr id="5" name="Table 4"/>
+          <p:cNvGraphicFramePr>
+            <a:graphicFrameLocks noGrp="1"/>
+          </p:cNvGraphicFramePr>
+          <p:nvPr>
+            <p:extLst>
+              <p:ext uri="{D42A27DB-BD31-4B8C-83A1-F6EECF244321}">
+                <p14:modId xmlns:p14="http://schemas.microsoft.com/office/powerpoint/2010/main" val="855889943"/>
+              </p:ext>
+            </p:extLst>
+          </p:nvPr>
+        </p:nvGraphicFramePr>
+        <p:xfrm>
+          <a:off x="237744" y="1693672"/>
+          <a:ext cx="8915400" cy="3383280"/>
+        </p:xfrm>
+        <a:graphic>
+          <a:graphicData uri="http://schemas.openxmlformats.org/drawingml/2006/table">
+            <a:tbl>
+              <a:tblPr firstRow="1" bandRow="1">
+                <a:tableStyleId>{5C22544A-7EE6-4342-B048-85BDC9FD1C3A}</a:tableStyleId>
+              </a:tblPr>
+              <a:tblGrid>
+                <a:gridCol w="2228850">
+                  <a:extLst>
+                    <a:ext uri="{9D8B030D-6E8A-4147-A177-3AD203B41FA5}">
+                      <a16:colId xmlns:a16="http://schemas.microsoft.com/office/drawing/2014/main" val="20000"/>
+                    </a:ext>
+                  </a:extLst>
+                </a:gridCol>
+                <a:gridCol w="2228850">
+                  <a:extLst>
+                    <a:ext uri="{9D8B030D-6E8A-4147-A177-3AD203B41FA5}">
+                      <a16:colId xmlns:a16="http://schemas.microsoft.com/office/drawing/2014/main" val="20001"/>
+                    </a:ext>
+                  </a:extLst>
+                </a:gridCol>
+                <a:gridCol w="2228850">
+                  <a:extLst>
+                    <a:ext uri="{9D8B030D-6E8A-4147-A177-3AD203B41FA5}">
+                      <a16:colId xmlns:a16="http://schemas.microsoft.com/office/drawing/2014/main" val="20002"/>
+                    </a:ext>
+                  </a:extLst>
+                </a:gridCol>
+                <a:gridCol w="2228850">
+                  <a:extLst>
+                    <a:ext uri="{9D8B030D-6E8A-4147-A177-3AD203B41FA5}">
+                      <a16:colId xmlns:a16="http://schemas.microsoft.com/office/drawing/2014/main" val="20003"/>
+                    </a:ext>
+                  </a:extLst>
+                </a:gridCol>
+              </a:tblGrid>
+              <a:tr h="0">
+                <a:tc>
+                  <a:txBody>
+                    <a:bodyPr/>
+                    <a:lstStyle/>
+                    <a:p>
+                      <a:r>
+                        <a:t>Format</a:t>
+                      </a:r>
+                    </a:p>
+                  </a:txBody>
+                  <a:tcPr/>
+                </a:tc>
+                <a:tc>
+                  <a:txBody>
+                    <a:bodyPr/>
+                    <a:lstStyle/>
+                    <a:p>
+                      <a:r>
+                        <a:t>Schema</a:t>
+                      </a:r>
+                    </a:p>
+                  </a:txBody>
+                  <a:tcPr/>
+                </a:tc>
+                <a:tc>
+                  <a:txBody>
+                    <a:bodyPr/>
+                    <a:lstStyle/>
+                    <a:p>
+                      <a:r>
+                        <a:t>Size</a:t>
+                      </a:r>
+                    </a:p>
+                  </a:txBody>
+                  <a:tcPr/>
+                </a:tc>
+                <a:tc>
+                  <a:txBody>
+                    <a:bodyPr/>
+                    <a:lstStyle/>
+                    <a:p>
+                      <a:r>
+                        <a:t>Notes</a:t>
+                      </a:r>
+                    </a:p>
+                  </a:txBody>
+                  <a:tcPr/>
+                </a:tc>
+                <a:extLst>
+                  <a:ext uri="{0D108BD9-81ED-4DB2-BD59-A6C34878D82A}">
+                    <a16:rowId xmlns:a16="http://schemas.microsoft.com/office/drawing/2014/main" val="10000"/>
+                  </a:ext>
+                </a:extLst>
+              </a:tr>
+              <a:tr h="457200">
+                <a:tc>
+                  <a:txBody>
+                    <a:bodyPr/>
+                    <a:lstStyle/>
+                    <a:p>
+                      <a:r>
+                        <a:rPr b="1"/>
+                        <a:t>JSON</a:t>
+                      </a:r>
+                    </a:p>
+                  </a:txBody>
+                  <a:tcPr/>
+                </a:tc>
+                <a:tc>
+                  <a:txBody>
+                    <a:bodyPr/>
+                    <a:lstStyle/>
+                    <a:p>
+                      <a:r>
+                        <a:t>none (or JSON Schema)</a:t>
+                      </a:r>
+                    </a:p>
+                  </a:txBody>
+                  <a:tcPr/>
+                </a:tc>
+                <a:tc>
+                  <a:txBody>
+                    <a:bodyPr/>
+                    <a:lstStyle/>
+                    <a:p>
+                      <a:r>
+                        <a:rPr dirty="0"/>
+                        <a:t>large (text)</a:t>
+                      </a:r>
+                    </a:p>
+                  </a:txBody>
+                  <a:tcPr/>
+                </a:tc>
+                <a:tc>
+                  <a:txBody>
+                    <a:bodyPr/>
+                    <a:lstStyle/>
+                    <a:p>
+                      <a:r>
+                        <a:t>human-readable, no enforcement by default</a:t>
+                      </a:r>
+                    </a:p>
+                  </a:txBody>
+                  <a:tcPr/>
+                </a:tc>
+                <a:extLst>
+                  <a:ext uri="{0D108BD9-81ED-4DB2-BD59-A6C34878D82A}">
+                    <a16:rowId xmlns:a16="http://schemas.microsoft.com/office/drawing/2014/main" val="10001"/>
+                  </a:ext>
+                </a:extLst>
+              </a:tr>
+              <a:tr h="457200">
+                <a:tc>
+                  <a:txBody>
+                    <a:bodyPr/>
+                    <a:lstStyle/>
+                    <a:p>
+                      <a:r>
+                        <a:rPr b="1"/>
+                        <a:t>Avro</a:t>
+                      </a:r>
+                    </a:p>
+                  </a:txBody>
+                  <a:tcPr/>
+                </a:tc>
+                <a:tc>
+                  <a:txBody>
+                    <a:bodyPr/>
+                    <a:lstStyle/>
+                    <a:p>
+                      <a:r>
+                        <a:t>required (`.avsc`)</a:t>
+                      </a:r>
+                    </a:p>
+                  </a:txBody>
+                  <a:tcPr/>
+                </a:tc>
+                <a:tc>
+                  <a:txBody>
+                    <a:bodyPr/>
+                    <a:lstStyle/>
+                    <a:p>
+                      <a:r>
+                        <a:t>small (binary)</a:t>
+                      </a:r>
+                    </a:p>
+                  </a:txBody>
+                  <a:tcPr/>
+                </a:tc>
+                <a:tc>
+                  <a:txBody>
+                    <a:bodyPr/>
+                    <a:lstStyle/>
+                    <a:p>
+                      <a:r>
+                        <a:t>compact, strong evolution rules, Kafka's most common choice</a:t>
+                      </a:r>
+                    </a:p>
+                  </a:txBody>
+                  <a:tcPr/>
+                </a:tc>
+                <a:extLst>
+                  <a:ext uri="{0D108BD9-81ED-4DB2-BD59-A6C34878D82A}">
+                    <a16:rowId xmlns:a16="http://schemas.microsoft.com/office/drawing/2014/main" val="10002"/>
+                  </a:ext>
+                </a:extLst>
+              </a:tr>
+              <a:tr h="457200">
+                <a:tc>
+                  <a:txBody>
+                    <a:bodyPr/>
+                    <a:lstStyle/>
+                    <a:p>
+                      <a:r>
+                        <a:rPr b="1"/>
+                        <a:t>Protobuf</a:t>
+                      </a:r>
+                    </a:p>
+                  </a:txBody>
+                  <a:tcPr/>
+                </a:tc>
+                <a:tc>
+                  <a:txBody>
+                    <a:bodyPr/>
+                    <a:lstStyle/>
+                    <a:p>
+                      <a:r>
+                        <a:t>required (`.proto`)</a:t>
+                      </a:r>
+                    </a:p>
+                  </a:txBody>
+                  <a:tcPr/>
+                </a:tc>
+                <a:tc>
+                  <a:txBody>
+                    <a:bodyPr/>
+                    <a:lstStyle/>
+                    <a:p>
+                      <a:r>
+                        <a:rPr dirty="0"/>
+                        <a:t>small (binary)</a:t>
+                      </a:r>
+                    </a:p>
+                  </a:txBody>
+                  <a:tcPr/>
+                </a:tc>
+                <a:tc>
+                  <a:txBody>
+                    <a:bodyPr/>
+                    <a:lstStyle/>
+                    <a:p>
+                      <a:r>
+                        <a:rPr dirty="0"/>
+                        <a:t>cross-language, popular for </a:t>
+                      </a:r>
+                      <a:r>
+                        <a:rPr dirty="0" err="1"/>
+                        <a:t>gRPC</a:t>
+                      </a:r>
+                      <a:r>
+                        <a:rPr dirty="0"/>
+                        <a:t> shops</a:t>
+                      </a:r>
+                    </a:p>
+                  </a:txBody>
+                  <a:tcPr/>
+                </a:tc>
+                <a:extLst>
+                  <a:ext uri="{0D108BD9-81ED-4DB2-BD59-A6C34878D82A}">
+                    <a16:rowId xmlns:a16="http://schemas.microsoft.com/office/drawing/2014/main" val="10003"/>
+                  </a:ext>
+                </a:extLst>
+              </a:tr>
+            </a:tbl>
+          </a:graphicData>
+        </a:graphic>
+      </p:graphicFrame>
+    </p:spTree>
+  </p:cSld>
+  <p:clrMapOvr>
+    <a:masterClrMapping/>
+  </p:clrMapOvr>
+</p:sld>
+</file>
+
+<file path=ppt/slides/slide5.xml><?xml version="1.0" encoding="utf-8"?>
+<p:sld xmlns:a="http://schemas.openxmlformats.org/drawingml/2006/main" xmlns:r="http://schemas.openxmlformats.org/officeDocument/2006/relationships" xmlns:p="http://schemas.openxmlformats.org/presentationml/2006/main">
+  <p:cSld>
+    <p:spTree>
+      <p:nvGrpSpPr>
+        <p:cNvPr id="1" name=""/>
+        <p:cNvGrpSpPr/>
+        <p:nvPr/>
+      </p:nvGrpSpPr>
+      <p:grpSpPr>
+        <a:xfrm>
+          <a:off x="0" y="0"/>
+          <a:ext cx="0" cy="0"/>
+          <a:chOff x="0" y="0"/>
+          <a:chExt cx="0" cy="0"/>
+        </a:xfrm>
+      </p:grpSpPr>
+      <p:sp>
+        <p:nvSpPr>
+          <p:cNvPr id="2" name="Title 1"/>
+          <p:cNvSpPr>
+            <a:spLocks noGrp="1"/>
+          </p:cNvSpPr>
+          <p:nvPr>
+            <p:ph type="title"/>
+          </p:nvPr>
+        </p:nvSpPr>
+        <p:spPr/>
+        <p:txBody>
+          <a:bodyPr/>
+          <a:lstStyle/>
+          <a:p>
+            <a:r>
+              <a:t>The Schema Registry</a:t>
+            </a:r>
+          </a:p>
+        </p:txBody>
+      </p:sp>
+      <p:sp>
+        <p:nvSpPr>
+          <p:cNvPr id="3" name="Content Placeholder 2"/>
+          <p:cNvSpPr>
+            <a:spLocks noGrp="1"/>
+          </p:cNvSpPr>
+          <p:nvPr>
+            <p:ph idx="1"/>
+          </p:nvPr>
+        </p:nvSpPr>
+        <p:spPr/>
+        <p:txBody>
+          <a:bodyPr/>
+          <a:lstStyle/>
+          <a:p>
+            <a:r>
+              <a:rPr dirty="0"/>
+              <a:t> A standalone service (in our lab at</a:t>
+            </a:r>
+            <a:r>
+              <a:rPr dirty="0">
+                <a:latin typeface="Courier New"/>
+              </a:rPr>
+              <a:t> :8081</a:t>
+            </a:r>
+            <a:r>
+              <a:rPr dirty="0"/>
+              <a:t> ) that stores schemas and hands out IDs.</a:t>
+            </a:r>
+          </a:p>
+          <a:p>
+            <a:endParaRPr lang="en-US" dirty="0"/>
+          </a:p>
+          <a:p>
+            <a:endParaRPr lang="en-US" dirty="0"/>
+          </a:p>
+          <a:p>
+            <a:endParaRPr dirty="0"/>
+          </a:p>
+          <a:p>
+            <a:endParaRPr dirty="0"/>
+          </a:p>
+          <a:p>
+            <a:r>
+              <a:rPr dirty="0"/>
+              <a:t> The</a:t>
+            </a:r>
+            <a:r>
+              <a:rPr b="1" dirty="0"/>
+              <a:t> schema travels by ID</a:t>
+            </a:r>
+            <a:r>
+              <a:rPr dirty="0"/>
+              <a:t> , not inline — a few bytes, not the whole schema per message</a:t>
+            </a:r>
+          </a:p>
+          <a:p>
+            <a:r>
+              <a:rPr dirty="0"/>
+              <a:t> Producers</a:t>
+            </a:r>
+            <a:r>
+              <a:rPr b="1" dirty="0"/>
+              <a:t> auto-register</a:t>
+            </a:r>
+            <a:r>
+              <a:rPr dirty="0"/>
+              <a:t> schemas; consumers</a:t>
+            </a:r>
+            <a:r>
+              <a:rPr b="1" dirty="0"/>
+              <a:t> fetch by ID</a:t>
+            </a:r>
+            <a:r>
+              <a:rPr dirty="0"/>
+              <a:t> and cache them</a:t>
+            </a:r>
+          </a:p>
+          <a:p>
+            <a:r>
+              <a:rPr dirty="0"/>
+              <a:t> One source of truth for "what's in this topic," shared across all systems</a:t>
+            </a:r>
+          </a:p>
+        </p:txBody>
+      </p:sp>
+      <p:sp>
+        <p:nvSpPr>
+          <p:cNvPr id="4" name="TextBox 3"/>
+          <p:cNvSpPr txBox="1"/>
+          <p:nvPr/>
+        </p:nvSpPr>
+        <p:spPr>
+          <a:xfrm>
+            <a:off x="704088" y="8065008"/>
+            <a:ext cx="8915400" cy="228600"/>
+          </a:xfrm>
+          <a:prstGeom prst="rect">
+            <a:avLst/>
+          </a:prstGeom>
+          <a:noFill/>
+        </p:spPr>
+        <p:txBody>
+          <a:bodyPr wrap="none">
+            <a:spAutoFit/>
+          </a:bodyPr>
+          <a:lstStyle/>
+          <a:p>
+            <a:r>
+              <a:rPr sz="800">
+                <a:solidFill>
+                  <a:srgbClr val="000000"/>
+                </a:solidFill>
+              </a:rPr>
+              <a:t>Copyright © 2026 by Elephant Scale, All Rights Reserved</a:t>
+            </a:r>
+          </a:p>
+        </p:txBody>
+      </p:sp>
+      <p:pic>
+        <p:nvPicPr>
+          <p:cNvPr id="5" name="Picture 4" descr="1.png"/>
+          <p:cNvPicPr>
+            <a:picLocks noChangeAspect="1"/>
+          </p:cNvPicPr>
+          <p:nvPr/>
+        </p:nvPicPr>
+        <p:blipFill>
+          <a:blip r:embed="rId2"/>
+          <a:stretch>
+            <a:fillRect/>
+          </a:stretch>
+        </p:blipFill>
+        <p:spPr>
+          <a:xfrm>
+            <a:off x="260350" y="1939131"/>
+            <a:ext cx="8915400" cy="946124"/>
+          </a:xfrm>
+          <a:prstGeom prst="rect">
+            <a:avLst/>
+          </a:prstGeom>
+        </p:spPr>
+      </p:pic>
+    </p:spTree>
+  </p:cSld>
+  <p:clrMapOvr>
+    <a:masterClrMapping/>
+  </p:clrMapOvr>
+</p:sld>
+</file>
+
+<file path=ppt/slides/slide6.xml><?xml version="1.0" encoding="utf-8"?>
+<p:sld xmlns:a="http://schemas.openxmlformats.org/drawingml/2006/main" xmlns:r="http://schemas.openxmlformats.org/officeDocument/2006/relationships" xmlns:p="http://schemas.openxmlformats.org/presentationml/2006/main">
+  <p:cSld>
+    <p:spTree>
+      <p:nvGrpSpPr>
+        <p:cNvPr id="1" name=""/>
+        <p:cNvGrpSpPr/>
+        <p:nvPr/>
+      </p:nvGrpSpPr>
+      <p:grpSpPr>
+        <a:xfrm>
+          <a:off x="0" y="0"/>
+          <a:ext cx="0" cy="0"/>
+          <a:chOff x="0" y="0"/>
+          <a:chExt cx="0" cy="0"/>
+        </a:xfrm>
+      </p:grpSpPr>
+      <p:sp>
+        <p:nvSpPr>
+          <p:cNvPr id="2" name="Title 1"/>
+          <p:cNvSpPr>
+            <a:spLocks noGrp="1"/>
+          </p:cNvSpPr>
+          <p:nvPr>
+            <p:ph type="title"/>
+          </p:nvPr>
+        </p:nvSpPr>
+        <p:spPr/>
+        <p:txBody>
+          <a:bodyPr/>
+          <a:lstStyle/>
+          <a:p>
+            <a:r>
+              <a:t>Aside: Apache Kafka vs. Confluent</a:t>
+            </a:r>
+          </a:p>
+        </p:txBody>
+      </p:sp>
+      <p:sp>
+        <p:nvSpPr>
+          <p:cNvPr id="3" name="Content Placeholder 2"/>
+          <p:cNvSpPr>
+            <a:spLocks noGrp="1"/>
+          </p:cNvSpPr>
+          <p:nvPr>
+            <p:ph idx="1"/>
+          </p:nvPr>
+        </p:nvSpPr>
+        <p:spPr/>
+        <p:txBody>
+          <a:bodyPr>
+            <a:normAutofit fontScale="92500" lnSpcReduction="10000"/>
+          </a:bodyPr>
+          <a:lstStyle/>
+          <a:p>
+            <a:r>
+              <a:rPr dirty="0"/>
+              <a:t> The registry is our first</a:t>
+            </a:r>
+            <a:r>
+              <a:rPr b="1" dirty="0"/>
+              <a:t> Confluent</a:t>
+            </a:r>
+            <a:r>
+              <a:rPr dirty="0"/>
+              <a:t> component — worth</a:t>
+            </a:r>
+            <a:endParaRPr lang="en-US" dirty="0"/>
+          </a:p>
+          <a:p>
+            <a:endParaRPr lang="en-US" dirty="0"/>
+          </a:p>
+          <a:p>
+            <a:endParaRPr lang="en-US" dirty="0"/>
+          </a:p>
+          <a:p>
+            <a:r>
+              <a:rPr dirty="0"/>
+              <a:t> knowing where the line is.</a:t>
+            </a:r>
+          </a:p>
+          <a:p>
+            <a:endParaRPr dirty="0"/>
+          </a:p>
+          <a:p>
+            <a:endParaRPr dirty="0"/>
+          </a:p>
+          <a:p>
+            <a:endParaRPr dirty="0"/>
+          </a:p>
+          <a:p>
+            <a:endParaRPr dirty="0"/>
+          </a:p>
+          <a:p>
+            <a:endParaRPr dirty="0"/>
+          </a:p>
+          <a:p>
+            <a:r>
+              <a:rPr b="1" dirty="0"/>
+              <a:t> </a:t>
+            </a:r>
+            <a:endParaRPr lang="en-US" b="1" dirty="0"/>
+          </a:p>
+          <a:p>
+            <a:r>
+              <a:rPr b="1" dirty="0"/>
+              <a:t>Confluent is not a fork</a:t>
+            </a:r>
+            <a:r>
+              <a:rPr dirty="0"/>
+              <a:t> — Confluent Platform ships stock Apache brokers and adds services</a:t>
+            </a:r>
+            <a:r>
+              <a:rPr i="1" dirty="0"/>
+              <a:t> around</a:t>
+            </a:r>
+            <a:r>
+              <a:rPr dirty="0"/>
+              <a:t> them.</a:t>
+            </a:r>
+          </a:p>
+          <a:p>
+            <a:r>
+              <a:rPr dirty="0"/>
+              <a:t> Look at this course's own stack:</a:t>
+            </a:r>
+          </a:p>
+          <a:p>
+            <a:r>
+              <a:rPr dirty="0"/>
+              <a:t> Brokers</a:t>
+            </a:r>
+            <a:r>
+              <a:rPr dirty="0">
+                <a:latin typeface="Courier New"/>
+              </a:rPr>
+              <a:t> </a:t>
+            </a:r>
+            <a:r>
+              <a:rPr dirty="0" err="1">
+                <a:latin typeface="Courier New"/>
+              </a:rPr>
+              <a:t>apache</a:t>
+            </a:r>
+            <a:r>
+              <a:rPr dirty="0">
+                <a:latin typeface="Courier New"/>
+              </a:rPr>
+              <a:t>/kafka:4.0.0</a:t>
+            </a:r>
+            <a:r>
+              <a:rPr dirty="0"/>
+              <a:t> , and Flink —</a:t>
+            </a:r>
+            <a:r>
+              <a:rPr b="1" dirty="0"/>
+              <a:t> Apache</a:t>
+            </a:r>
+          </a:p>
+          <a:p>
+            <a:r>
+              <a:rPr dirty="0"/>
+              <a:t> Schema Registry, the Avro </a:t>
+            </a:r>
+            <a:r>
+              <a:rPr dirty="0" err="1"/>
+              <a:t>serdes</a:t>
+            </a:r>
+            <a:r>
+              <a:rPr dirty="0"/>
+              <a:t>, the JDBC &amp; S3 connectors —</a:t>
+            </a:r>
+            <a:r>
+              <a:rPr b="1" dirty="0"/>
+              <a:t> Confluent</a:t>
+            </a:r>
+          </a:p>
+          <a:p>
+            <a:r>
+              <a:rPr dirty="0"/>
+              <a:t> That extra</a:t>
+            </a:r>
+            <a:r>
+              <a:rPr dirty="0">
+                <a:latin typeface="Courier New"/>
+              </a:rPr>
+              <a:t> &lt;repository&gt;</a:t>
+            </a:r>
+            <a:r>
+              <a:rPr dirty="0"/>
+              <a:t> in your</a:t>
+            </a:r>
+            <a:r>
+              <a:rPr dirty="0">
+                <a:latin typeface="Courier New"/>
+              </a:rPr>
+              <a:t> </a:t>
+            </a:r>
+            <a:r>
+              <a:rPr dirty="0" err="1">
+                <a:latin typeface="Courier New"/>
+              </a:rPr>
+              <a:t>pom.xml</a:t>
+            </a:r>
+            <a:r>
+              <a:rPr dirty="0"/>
+              <a:t> ? The </a:t>
+            </a:r>
+            <a:r>
+              <a:rPr dirty="0" err="1"/>
+              <a:t>serdes</a:t>
+            </a:r>
+            <a:r>
+              <a:rPr dirty="0"/>
+              <a:t> aren't on Maven Central.</a:t>
+            </a:r>
+          </a:p>
+          <a:p>
+            <a:endParaRPr dirty="0"/>
+          </a:p>
+        </p:txBody>
+      </p:sp>
+      <p:sp>
+        <p:nvSpPr>
+          <p:cNvPr id="4" name="TextBox 3"/>
+          <p:cNvSpPr txBox="1"/>
+          <p:nvPr/>
+        </p:nvSpPr>
+        <p:spPr>
+          <a:xfrm>
+            <a:off x="704088" y="8065008"/>
+            <a:ext cx="8915400" cy="228600"/>
+          </a:xfrm>
+          <a:prstGeom prst="rect">
+            <a:avLst/>
+          </a:prstGeom>
+          <a:noFill/>
+        </p:spPr>
+        <p:txBody>
+          <a:bodyPr wrap="none">
+            <a:spAutoFit/>
+          </a:bodyPr>
+          <a:lstStyle/>
+          <a:p>
+            <a:r>
+              <a:rPr sz="800">
+                <a:solidFill>
+                  <a:srgbClr val="000000"/>
+                </a:solidFill>
+              </a:rPr>
+              <a:t>Copyright © 2026 by Elephant Scale, All Rights Reserved</a:t>
+            </a:r>
+          </a:p>
+        </p:txBody>
+      </p:sp>
+      <p:graphicFrame>
+        <p:nvGraphicFramePr>
+          <p:cNvPr id="5" name="Table 4"/>
+          <p:cNvGraphicFramePr>
+            <a:graphicFrameLocks noGrp="1"/>
+          </p:cNvGraphicFramePr>
+          <p:nvPr>
+            <p:extLst>
+              <p:ext uri="{D42A27DB-BD31-4B8C-83A1-F6EECF244321}">
+                <p14:modId xmlns:p14="http://schemas.microsoft.com/office/powerpoint/2010/main" val="2265994281"/>
+              </p:ext>
+            </p:extLst>
+          </p:nvPr>
+        </p:nvGraphicFramePr>
+        <p:xfrm>
+          <a:off x="234950" y="1481931"/>
+          <a:ext cx="8915400" cy="3185280"/>
+        </p:xfrm>
+        <a:graphic>
+          <a:graphicData uri="http://schemas.openxmlformats.org/drawingml/2006/table">
+            <a:tbl>
+              <a:tblPr firstRow="1" bandRow="1">
+                <a:tableStyleId>{5C22544A-7EE6-4342-B048-85BDC9FD1C3A}</a:tableStyleId>
+              </a:tblPr>
+              <a:tblGrid>
+                <a:gridCol w="1705356">
+                  <a:extLst>
+                    <a:ext uri="{9D8B030D-6E8A-4147-A177-3AD203B41FA5}">
+                      <a16:colId xmlns:a16="http://schemas.microsoft.com/office/drawing/2014/main" val="20000"/>
+                    </a:ext>
+                  </a:extLst>
+                </a:gridCol>
+                <a:gridCol w="3962400">
+                  <a:extLst>
+                    <a:ext uri="{9D8B030D-6E8A-4147-A177-3AD203B41FA5}">
+                      <a16:colId xmlns:a16="http://schemas.microsoft.com/office/drawing/2014/main" val="20001"/>
+                    </a:ext>
+                  </a:extLst>
+                </a:gridCol>
+                <a:gridCol w="3247644">
+                  <a:extLst>
+                    <a:ext uri="{9D8B030D-6E8A-4147-A177-3AD203B41FA5}">
+                      <a16:colId xmlns:a16="http://schemas.microsoft.com/office/drawing/2014/main" val="20002"/>
+                    </a:ext>
+                  </a:extLst>
+                </a:gridCol>
+              </a:tblGrid>
+              <a:tr h="576831">
+                <a:tc>
+                  <a:txBody>
+                    <a:bodyPr/>
+                    <a:lstStyle/>
+                    <a:p>
+                      <a:endParaRPr dirty="0"/>
+                    </a:p>
+                  </a:txBody>
+                  <a:tcPr/>
+                </a:tc>
+                <a:tc>
+                  <a:txBody>
+                    <a:bodyPr/>
+                    <a:lstStyle/>
+                    <a:p>
+                      <a:r>
+                        <a:t>Apache (ASF, Apache 2.0)</a:t>
+                      </a:r>
+                    </a:p>
+                  </a:txBody>
+                  <a:tcPr/>
+                </a:tc>
+                <a:tc>
+                  <a:txBody>
+                    <a:bodyPr/>
+                    <a:lstStyle/>
+                    <a:p>
+                      <a:r>
+                        <a:t>Confluent (company, since 2014)</a:t>
+                      </a:r>
+                    </a:p>
+                  </a:txBody>
+                  <a:tcPr/>
+                </a:tc>
+                <a:extLst>
+                  <a:ext uri="{0D108BD9-81ED-4DB2-BD59-A6C34878D82A}">
+                    <a16:rowId xmlns:a16="http://schemas.microsoft.com/office/drawing/2014/main" val="10000"/>
+                  </a:ext>
+                </a:extLst>
+              </a:tr>
+              <a:tr h="824045">
+                <a:tc>
+                  <a:txBody>
+                    <a:bodyPr/>
+                    <a:lstStyle/>
+                    <a:p>
+                      <a:r>
+                        <a:rPr b="1"/>
+                        <a:t>Core</a:t>
+                      </a:r>
+                    </a:p>
+                  </a:txBody>
+                  <a:tcPr/>
+                </a:tc>
+                <a:tc>
+                  <a:txBody>
+                    <a:bodyPr/>
+                    <a:lstStyle/>
+                    <a:p>
+                      <a:r>
+                        <a:t>Brokers, Java clients, Kafka Streams, Connect *framework*, MirrorMaker</a:t>
+                      </a:r>
+                    </a:p>
+                  </a:txBody>
+                  <a:tcPr/>
+                </a:tc>
+                <a:tc>
+                  <a:txBody>
+                    <a:bodyPr/>
+                    <a:lstStyle/>
+                    <a:p>
+                      <a:r>
+                        <a:t>—</a:t>
+                      </a:r>
+                    </a:p>
+                  </a:txBody>
+                  <a:tcPr/>
+                </a:tc>
+                <a:extLst>
+                  <a:ext uri="{0D108BD9-81ED-4DB2-BD59-A6C34878D82A}">
+                    <a16:rowId xmlns:a16="http://schemas.microsoft.com/office/drawing/2014/main" val="10001"/>
+                  </a:ext>
+                </a:extLst>
+              </a:tr>
+              <a:tr h="716400">
+                <a:tc>
+                  <a:txBody>
+                    <a:bodyPr/>
+                    <a:lstStyle/>
+                    <a:p>
+                      <a:r>
+                        <a:rPr b="1"/>
+                        <a:t>Added</a:t>
+                      </a:r>
+                    </a:p>
+                  </a:txBody>
+                  <a:tcPr/>
+                </a:tc>
+                <a:tc>
+                  <a:txBody>
+                    <a:bodyPr/>
+                    <a:lstStyle/>
+                    <a:p>
+                      <a:r>
+                        <a:t>—</a:t>
+                      </a:r>
+                    </a:p>
+                  </a:txBody>
+                  <a:tcPr/>
+                </a:tc>
+                <a:tc>
+                  <a:txBody>
+                    <a:bodyPr/>
+                    <a:lstStyle/>
+                    <a:p>
+                      <a:r>
+                        <a:t>Schema Registry, ksqlDB, REST Proxy, most connectors</a:t>
+                      </a:r>
+                    </a:p>
+                  </a:txBody>
+                  <a:tcPr/>
+                </a:tc>
+                <a:extLst>
+                  <a:ext uri="{0D108BD9-81ED-4DB2-BD59-A6C34878D82A}">
+                    <a16:rowId xmlns:a16="http://schemas.microsoft.com/office/drawing/2014/main" val="10002"/>
+                  </a:ext>
+                </a:extLst>
+              </a:tr>
+              <a:tr h="824045">
+                <a:tc>
+                  <a:txBody>
+                    <a:bodyPr/>
+                    <a:lstStyle/>
+                    <a:p>
+                      <a:r>
+                        <a:rPr b="1"/>
+                        <a:t>Commercial</a:t>
+                      </a:r>
+                    </a:p>
+                  </a:txBody>
+                  <a:tcPr/>
+                </a:tc>
+                <a:tc>
+                  <a:txBody>
+                    <a:bodyPr/>
+                    <a:lstStyle/>
+                    <a:p>
+                      <a:r>
+                        <a:t>—</a:t>
+                      </a:r>
+                    </a:p>
+                  </a:txBody>
+                  <a:tcPr/>
+                </a:tc>
+                <a:tc>
+                  <a:txBody>
+                    <a:bodyPr/>
+                    <a:lstStyle/>
+                    <a:p>
+                      <a:r>
+                        <a:rPr dirty="0"/>
+                        <a:t>Control Center, RBAC, Cluster Linking, Confluent Cloud</a:t>
+                      </a:r>
+                    </a:p>
+                  </a:txBody>
+                  <a:tcPr/>
+                </a:tc>
+                <a:extLst>
+                  <a:ext uri="{0D108BD9-81ED-4DB2-BD59-A6C34878D82A}">
+                    <a16:rowId xmlns:a16="http://schemas.microsoft.com/office/drawing/2014/main" val="10003"/>
+                  </a:ext>
+                </a:extLst>
+              </a:tr>
+            </a:tbl>
+          </a:graphicData>
+        </a:graphic>
+      </p:graphicFrame>
+    </p:spTree>
+  </p:cSld>
+  <p:clrMapOvr>
+    <a:masterClrMapping/>
+  </p:clrMapOvr>
+</p:sld>
+</file>
+
+<file path=ppt/slides/slide7.xml><?xml version="1.0" encoding="utf-8"?>
+<p:sld xmlns:a="http://schemas.openxmlformats.org/drawingml/2006/main" xmlns:r="http://schemas.openxmlformats.org/officeDocument/2006/relationships" xmlns:p="http://schemas.openxmlformats.org/presentationml/2006/main">
+  <p:cSld>
+    <p:spTree>
+      <p:nvGrpSpPr>
+        <p:cNvPr id="1" name=""/>
+        <p:cNvGrpSpPr/>
+        <p:nvPr/>
+      </p:nvGrpSpPr>
+      <p:grpSpPr>
+        <a:xfrm>
+          <a:off x="0" y="0"/>
+          <a:ext cx="0" cy="0"/>
+          <a:chOff x="0" y="0"/>
+          <a:chExt cx="0" cy="0"/>
+        </a:xfrm>
+      </p:grpSpPr>
+      <p:sp>
+        <p:nvSpPr>
+          <p:cNvPr id="2" name="Title 1"/>
+          <p:cNvSpPr>
+            <a:spLocks noGrp="1"/>
+          </p:cNvSpPr>
+          <p:nvPr>
+            <p:ph type="title"/>
+          </p:nvPr>
+        </p:nvSpPr>
+        <p:spPr/>
+        <p:txBody>
+          <a:bodyPr/>
+          <a:lstStyle/>
+          <a:p>
+            <a:r>
+              <a:t>Serdes: How Your Code Uses It</a:t>
+            </a:r>
+          </a:p>
+        </p:txBody>
+      </p:sp>
+      <p:sp>
+        <p:nvSpPr>
+          <p:cNvPr id="3" name="Content Placeholder 2"/>
+          <p:cNvSpPr>
+            <a:spLocks noGrp="1"/>
+          </p:cNvSpPr>
+          <p:nvPr>
+            <p:ph idx="1"/>
+          </p:nvPr>
+        </p:nvSpPr>
+        <p:spPr/>
+        <p:txBody>
+          <a:bodyPr/>
+          <a:lstStyle/>
+          <a:p>
+            <a:r>
+              <a:t> You don't hand-code the wire format — a</a:t>
+            </a:r>
+            <a:r>
+              <a:rPr b="1"/>
+              <a:t> serializer/deserializer (serde)</a:t>
+            </a:r>
+            <a:r>
+              <a:t> does it. In the Kafka</a:t>
+            </a:r>
+            <a:r>
+              <a:rPr b="1"/>
+              <a:t> Java</a:t>
+            </a:r>
+            <a:r>
+              <a:t> client that's Confluent's Avro serde:</a:t>
+            </a:r>
+          </a:p>
+          <a:p>
+            <a:endParaRPr/>
+          </a:p>
+          <a:p>
+            <a:endParaRPr/>
+          </a:p>
+          <a:p>
+            <a:endParaRPr/>
+          </a:p>
+          <a:p>
+            <a:endParaRPr/>
+          </a:p>
+          <a:p>
+            <a:r>
+              <a:t> The serializer registers the schema (if new) and prefixes the ID</a:t>
+            </a:r>
+          </a:p>
+          <a:p>
+            <a:r>
+              <a:t> The deserializer reads the ID, fetches/caches the schema, and decodes</a:t>
+            </a:r>
+          </a:p>
+          <a:p>
+            <a:r>
+              <a:t> Your business code sees</a:t>
+            </a:r>
+            <a:r>
+              <a:rPr b="1"/>
+              <a:t> objects</a:t>
+            </a:r>
+            <a:r>
+              <a:t> , not bytes</a:t>
+            </a:r>
+          </a:p>
+        </p:txBody>
+      </p:sp>
+      <p:sp>
+        <p:nvSpPr>
+          <p:cNvPr id="4" name="TextBox 3"/>
+          <p:cNvSpPr txBox="1"/>
+          <p:nvPr/>
+        </p:nvSpPr>
+        <p:spPr>
+          <a:xfrm>
+            <a:off x="704088" y="8065008"/>
+            <a:ext cx="8915400" cy="228600"/>
+          </a:xfrm>
+          <a:prstGeom prst="rect">
+            <a:avLst/>
+          </a:prstGeom>
+          <a:noFill/>
+        </p:spPr>
+        <p:txBody>
+          <a:bodyPr wrap="none">
+            <a:spAutoFit/>
+          </a:bodyPr>
+          <a:lstStyle/>
+          <a:p>
+            <a:r>
+              <a:rPr sz="800">
+                <a:solidFill>
+                  <a:srgbClr val="000000"/>
+                </a:solidFill>
+              </a:rPr>
+              <a:t>Copyright © 2026 by Elephant Scale, All Rights Reserved</a:t>
+            </a:r>
+          </a:p>
+        </p:txBody>
+      </p:sp>
+      <p:pic>
+        <p:nvPicPr>
+          <p:cNvPr id="5" name="Picture 4" descr="1.png"/>
+          <p:cNvPicPr>
+            <a:picLocks noChangeAspect="1"/>
+          </p:cNvPicPr>
+          <p:nvPr/>
+        </p:nvPicPr>
+        <p:blipFill>
+          <a:blip r:embed="rId3"/>
+          <a:stretch>
+            <a:fillRect/>
+          </a:stretch>
+        </p:blipFill>
+        <p:spPr>
+          <a:xfrm>
+            <a:off x="222250" y="2243931"/>
+            <a:ext cx="8915400" cy="1675646"/>
+          </a:xfrm>
+          <a:prstGeom prst="rect">
+            <a:avLst/>
+          </a:prstGeom>
+        </p:spPr>
+      </p:pic>
+    </p:spTree>
+  </p:cSld>
+  <p:clrMapOvr>
+    <a:masterClrMapping/>
+  </p:clrMapOvr>
+</p:sld>
+</file>
+
+<file path=ppt/slides/slide8.xml><?xml version="1.0" encoding="utf-8"?>
+<p:sld xmlns:a="http://schemas.openxmlformats.org/drawingml/2006/main" xmlns:r="http://schemas.openxmlformats.org/officeDocument/2006/relationships" xmlns:p="http://schemas.openxmlformats.org/presentationml/2006/main">
+  <p:cSld>
+    <p:spTree>
+      <p:nvGrpSpPr>
+        <p:cNvPr id="1" name=""/>
+        <p:cNvGrpSpPr/>
+        <p:nvPr/>
+      </p:nvGrpSpPr>
+      <p:grpSpPr>
+        <a:xfrm>
+          <a:off x="0" y="0"/>
+          <a:ext cx="0" cy="0"/>
+          <a:chOff x="0" y="0"/>
+          <a:chExt cx="0" cy="0"/>
+        </a:xfrm>
+      </p:grpSpPr>
+      <p:sp>
+        <p:nvSpPr>
+          <p:cNvPr id="2" name="Title 1"/>
+          <p:cNvSpPr>
+            <a:spLocks noGrp="1"/>
+          </p:cNvSpPr>
+          <p:nvPr>
+            <p:ph type="title"/>
+          </p:nvPr>
+        </p:nvSpPr>
+        <p:spPr/>
+        <p:txBody>
+          <a:bodyPr/>
+          <a:lstStyle/>
+          <a:p>
+            <a:r>
+              <a:t>Subjects and Versions</a:t>
+            </a:r>
+          </a:p>
+        </p:txBody>
+      </p:sp>
+      <p:sp>
+        <p:nvSpPr>
+          <p:cNvPr id="3" name="Content Placeholder 2"/>
+          <p:cNvSpPr>
+            <a:spLocks noGrp="1"/>
+          </p:cNvSpPr>
+          <p:nvPr>
+            <p:ph idx="1"/>
+          </p:nvPr>
+        </p:nvSpPr>
+        <p:spPr/>
+        <p:txBody>
+          <a:bodyPr/>
+          <a:lstStyle/>
+          <a:p>
+            <a:r>
+              <a:rPr dirty="0"/>
+              <a:t> The registry organizes schemas into</a:t>
+            </a:r>
+            <a:r>
+              <a:rPr b="1" dirty="0"/>
+              <a:t> subjects</a:t>
+            </a:r>
+            <a:r>
+              <a:rPr dirty="0"/>
+              <a:t> , each with a version history.</a:t>
+            </a:r>
+          </a:p>
+          <a:p>
+            <a:r>
+              <a:rPr dirty="0"/>
+              <a:t> Default naming: a topic</a:t>
+            </a:r>
+            <a:r>
+              <a:rPr dirty="0">
+                <a:latin typeface="Courier New"/>
+              </a:rPr>
+              <a:t> claims</a:t>
+            </a:r>
+            <a:r>
+              <a:rPr dirty="0"/>
+              <a:t> has subjects</a:t>
+            </a:r>
+            <a:r>
+              <a:rPr dirty="0">
+                <a:latin typeface="Courier New"/>
+              </a:rPr>
+              <a:t> claims-value</a:t>
+            </a:r>
+            <a:r>
+              <a:rPr dirty="0"/>
+              <a:t> (and</a:t>
+            </a:r>
+            <a:r>
+              <a:rPr dirty="0">
+                <a:latin typeface="Courier New"/>
+              </a:rPr>
+              <a:t> claims-key</a:t>
+            </a:r>
+            <a:r>
+              <a:rPr dirty="0"/>
+              <a:t> if keyed)</a:t>
+            </a:r>
+          </a:p>
+          <a:p>
+            <a:r>
+              <a:rPr dirty="0"/>
+              <a:t> Each subject holds an ordered list of</a:t>
+            </a:r>
+            <a:r>
+              <a:rPr b="1" dirty="0"/>
+              <a:t> versions</a:t>
+            </a:r>
+            <a:r>
+              <a:rPr dirty="0"/>
+              <a:t> : v1, v2, v3, …</a:t>
+            </a:r>
+          </a:p>
+          <a:p>
+            <a:r>
+              <a:rPr dirty="0"/>
+              <a:t> A</a:t>
+            </a:r>
+            <a:r>
+              <a:rPr b="1" dirty="0"/>
+              <a:t> compatibility rule</a:t>
+            </a:r>
+            <a:r>
+              <a:rPr dirty="0"/>
+              <a:t> is attached per subject and governs which new versions are allowed</a:t>
+            </a:r>
+          </a:p>
+          <a:p>
+            <a:endParaRPr dirty="0"/>
+          </a:p>
+          <a:p>
+            <a:endParaRPr lang="en-US" dirty="0"/>
+          </a:p>
+          <a:p>
+            <a:endParaRPr lang="en-US" dirty="0"/>
+          </a:p>
+          <a:p>
+            <a:endParaRPr lang="en-US" dirty="0"/>
+          </a:p>
+          <a:p>
+            <a:endParaRPr dirty="0"/>
+          </a:p>
+          <a:p>
+            <a:r>
+              <a:rPr dirty="0"/>
+              <a:t> The registry</a:t>
+            </a:r>
+            <a:r>
+              <a:rPr b="1" dirty="0"/>
+              <a:t> rejects</a:t>
+            </a:r>
+            <a:r>
+              <a:rPr dirty="0"/>
+              <a:t> a new version that violates the subject's compatibility rule — that's the enforcement that keeps producers and consumers from breaking each other.</a:t>
+            </a:r>
+          </a:p>
+        </p:txBody>
+      </p:sp>
+      <p:sp>
+        <p:nvSpPr>
+          <p:cNvPr id="4" name="TextBox 3"/>
+          <p:cNvSpPr txBox="1"/>
+          <p:nvPr/>
+        </p:nvSpPr>
+        <p:spPr>
+          <a:xfrm>
+            <a:off x="704088" y="8065008"/>
+            <a:ext cx="8915400" cy="228600"/>
+          </a:xfrm>
+          <a:prstGeom prst="rect">
+            <a:avLst/>
+          </a:prstGeom>
+          <a:noFill/>
+        </p:spPr>
+        <p:txBody>
+          <a:bodyPr wrap="none">
+            <a:spAutoFit/>
+          </a:bodyPr>
+          <a:lstStyle/>
+          <a:p>
+            <a:r>
+              <a:rPr sz="800">
+                <a:solidFill>
+                  <a:srgbClr val="000000"/>
+                </a:solidFill>
+              </a:rPr>
+              <a:t>Copyright © 2026 by Elephant Scale, All Rights Reserved</a:t>
+            </a:r>
+          </a:p>
+        </p:txBody>
+      </p:sp>
+      <p:pic>
+        <p:nvPicPr>
+          <p:cNvPr id="5" name="Picture 4" descr="1.png"/>
+          <p:cNvPicPr>
+            <a:picLocks noChangeAspect="1"/>
+          </p:cNvPicPr>
+          <p:nvPr/>
+        </p:nvPicPr>
+        <p:blipFill>
+          <a:blip r:embed="rId2"/>
+          <a:stretch>
+            <a:fillRect/>
+          </a:stretch>
+        </p:blipFill>
+        <p:spPr>
+          <a:xfrm>
+            <a:off x="0" y="4349813"/>
+            <a:ext cx="9372600" cy="1059511"/>
+          </a:xfrm>
+          <a:prstGeom prst="rect">
+            <a:avLst/>
+          </a:prstGeom>
+        </p:spPr>
+      </p:pic>
+    </p:spTree>
+  </p:cSld>
+  <p:clrMapOvr>
+    <a:masterClrMapping/>
+  </p:clrMapOvr>
+</p:sld>
+</file>
+
+<file path=ppt/slides/slide9.xml><?xml version="1.0" encoding="utf-8"?>
+<p:sld xmlns:a="http://schemas.openxmlformats.org/drawingml/2006/main" xmlns:r="http://schemas.openxmlformats.org/officeDocument/2006/relationships" xmlns:p="http://schemas.openxmlformats.org/presentationml/2006/main">
+  <p:cSld>
+    <p:spTree>
+      <p:nvGrpSpPr>
+        <p:cNvPr id="1" name=""/>
+        <p:cNvGrpSpPr/>
+        <p:nvPr/>
+      </p:nvGrpSpPr>
+      <p:grpSpPr>
+        <a:xfrm>
+          <a:off x="0" y="0"/>
+          <a:ext cx="0" cy="0"/>
+          <a:chOff x="0" y="0"/>
+          <a:chExt cx="0" cy="0"/>
+        </a:xfrm>
+      </p:grpSpPr>
+      <p:sp>
+        <p:nvSpPr>
+          <p:cNvPr id="2" name="Title 1"/>
+          <p:cNvSpPr>
+            <a:spLocks noGrp="1"/>
+          </p:cNvSpPr>
+          <p:nvPr>
+            <p:ph type="title"/>
+          </p:nvPr>
+        </p:nvSpPr>
+        <p:spPr/>
+        <p:txBody>
+          <a:bodyPr/>
+          <a:lstStyle/>
+          <a:p>
+            <a:r>
+              <a:t>Schema Evolution — The Real Problem</a:t>
+            </a:r>
+          </a:p>
+        </p:txBody>
+      </p:sp>
+      <p:sp>
+        <p:nvSpPr>
+          <p:cNvPr id="3" name="Content Placeholder 2"/>
+          <p:cNvSpPr>
+            <a:spLocks noGrp="1"/>
+          </p:cNvSpPr>
+          <p:nvPr>
+            <p:ph idx="1"/>
+          </p:nvPr>
+        </p:nvSpPr>
+        <p:spPr/>
+        <p:txBody>
+          <a:bodyPr/>
+          <a:lstStyle/>
+          <a:p>
+            <a:r>
+              <a:t> Systems change independently. A producer adds a field; a consumer hasn't been updated yet — or vice versa.</a:t>
+            </a:r>
+            <a:r>
+              <a:rPr b="1"/>
+              <a:t> Evolution rules</a:t>
+            </a:r>
+            <a:r>
+              <a:t> decide whether that's safe.</a:t>
+            </a:r>
+          </a:p>
+          <a:p>
+            <a:r>
+              <a:t> Two directions to reason about:</a:t>
+            </a:r>
+          </a:p>
+          <a:p>
+            <a:r>
+              <a:rPr b="1"/>
+              <a:t> Can a NEW consumer read OLD data?</a:t>
+            </a:r>
+            <a:r>
+              <a:t> (you upgraded the reader first)</a:t>
+            </a:r>
+          </a:p>
+          <a:p>
+            <a:r>
+              <a:rPr b="1"/>
+              <a:t> Can an OLD consumer read NEW data?</a:t>
+            </a:r>
+            <a:r>
+              <a:t> (the writer changed first)</a:t>
+            </a:r>
+          </a:p>
+          <a:p>
+            <a:r>
+              <a:t> Because Kafka</a:t>
+            </a:r>
+            <a:r>
+              <a:rPr b="1"/>
+              <a:t> retains</a:t>
+            </a:r>
+            <a:r>
+              <a:t> the log, a topic can hold</a:t>
+            </a:r>
+            <a:r>
+              <a:rPr b="1"/>
+              <a:t> old and new versions at once</a:t>
+            </a:r>
+            <a:r>
+              <a:t> — a consumer replaying history will meet both. So evolution isn't optional; it's the normal state.</a:t>
+            </a:r>
+          </a:p>
+        </p:txBody>
+      </p:sp>
+      <p:sp>
+        <p:nvSpPr>
+          <p:cNvPr id="4" name="TextBox 3"/>
+          <p:cNvSpPr txBox="1"/>
+          <p:nvPr/>
+        </p:nvSpPr>
+        <p:spPr>
+          <a:xfrm>
+            <a:off x="704088" y="8065008"/>
+            <a:ext cx="8915400" cy="228600"/>
+          </a:xfrm>
+          <a:prstGeom prst="rect">
+            <a:avLst/>
+          </a:prstGeom>
+          <a:noFill/>
+        </p:spPr>
+        <p:txBody>
+          <a:bodyPr wrap="none">
+            <a:spAutoFit/>
+          </a:bodyPr>
+          <a:lstStyle/>
+          <a:p>
+            <a:r>
+              <a:rPr sz="800">
+                <a:solidFill>
+                  <a:srgbClr val="000000"/>
+                </a:solidFill>
+              </a:rPr>
+              <a:t>Copyright © 2026 by Elephant Scale, All Rights Reserved</a:t>
+            </a:r>
+          </a:p>
+        </p:txBody>
+      </p:sp>
     </p:spTree>
   </p:cSld>
   <p:clrMapOvr>
